--- a/04_交付成品/序安_磷煤化工异常早期预警平台_黑客松路演_v14_ZH_REVIEW.pptx
+++ b/04_交付成品/序安_磷煤化工异常早期预警平台_黑客松路演_v14_ZH_REVIEW.pptx
@@ -1760,7 +1760,7 @@
       </p:sp>
       <p:pic>
         <p:nvPicPr>
-          <p:cNvPr id="5" name="Image 1" descr="/Users/rocalight/Desktop/All in one Data/01_PROJECTS/FDE任务/03_产品与解决方案/03_连续化工过程偏移副驾驶/90_构建与分析缓存/序安磷煤化工异常早期预警平台_黑客松路演_v14/assets/序安标志_v04.svg">    </p:cNvPr>
+          <p:cNvPr id="5" name="Image 1" descr="/Users/rocalight/Desktop/All in one Data/01_PROJECTS/FDE任务/03_产品与解决方案/03_连续化工过程偏移副驾驶/apps/web/public/brand/xuanan-anomaly-intercept-v04.svg">    </p:cNvPr>
           <p:cNvPicPr>
             <a:picLocks noChangeAspect="1"/>
           </p:cNvPicPr>
@@ -1780,8 +1780,8 @@
         </p:blipFill>
         <p:spPr>
           <a:xfrm>
-            <a:off x="731520" y="566928"/>
-            <a:ext cx="566928" cy="566928"/>
+            <a:off x="731520" y="512064"/>
+            <a:ext cx="749808" cy="749808"/>
           </a:xfrm>
           <a:prstGeom prst="rect">
             <a:avLst/>
@@ -1796,8 +1796,8 @@
         </p:nvSpPr>
         <p:spPr>
           <a:xfrm>
-            <a:off x="1371600" y="667512"/>
-            <a:ext cx="914400" cy="310896"/>
+            <a:off x="1536192" y="694944"/>
+            <a:ext cx="1024128" cy="347472"/>
           </a:xfrm>
           <a:prstGeom prst="rect">
             <a:avLst/>
@@ -1818,7 +1818,7 @@
               <a:buNone/>
             </a:pPr>
             <a:r>
-              <a:rPr lang="en-US" sz="1800" b="1" dirty="0">
+              <a:rPr lang="en-US" sz="2100" b="1" dirty="0">
                 <a:solidFill>
                   <a:srgbClr val="FFFFFF"/>
                 </a:solidFill>
@@ -1828,7 +1828,7 @@
               </a:rPr>
               <a:t>序安</a:t>
             </a:r>
-            <a:endParaRPr lang="en-US" sz="1800" dirty="0"/>
+            <a:endParaRPr lang="en-US" sz="2100" dirty="0"/>
           </a:p>
         </p:txBody>
       </p:sp>
@@ -2133,7 +2133,7 @@
       </p:grpSpPr>
       <p:pic>
         <p:nvPicPr>
-          <p:cNvPr id="2" name="Image 0" descr="/Users/rocalight/Desktop/All in one Data/01_PROJECTS/FDE任务/03_产品与解决方案/03_连续化工过程偏移副驾驶/90_构建与分析缓存/序安磷煤化工异常早期预警平台_黑客松路演_v14/assets/序安标志_v04.svg">    </p:cNvPr>
+          <p:cNvPr id="2" name="Image 0" descr="/Users/rocalight/Desktop/All in one Data/01_PROJECTS/FDE任务/03_产品与解决方案/03_连续化工过程偏移副驾驶/apps/web/public/brand/xuanan-anomaly-intercept-v04.svg">    </p:cNvPr>
           <p:cNvPicPr>
             <a:picLocks noChangeAspect="1"/>
           </p:cNvPicPr>
@@ -2153,8 +2153,8 @@
         </p:blipFill>
         <p:spPr>
           <a:xfrm>
-            <a:off x="10835640" y="256032"/>
-            <a:ext cx="457200" cy="457200"/>
+            <a:off x="10661904" y="201168"/>
+            <a:ext cx="566928" cy="566928"/>
           </a:xfrm>
           <a:prstGeom prst="rect">
             <a:avLst/>
@@ -2169,8 +2169,8 @@
         </p:nvSpPr>
         <p:spPr>
           <a:xfrm>
-            <a:off x="11247120" y="329184"/>
-            <a:ext cx="548640" cy="256032"/>
+            <a:off x="11192256" y="320040"/>
+            <a:ext cx="658368" cy="274320"/>
           </a:xfrm>
           <a:prstGeom prst="rect">
             <a:avLst/>
@@ -2191,7 +2191,7 @@
               <a:buNone/>
             </a:pPr>
             <a:r>
-              <a:rPr lang="en-US" sz="1300" b="1" dirty="0">
+              <a:rPr lang="en-US" sz="1400" b="1" dirty="0">
                 <a:solidFill>
                   <a:srgbClr val="FFFFFF"/>
                 </a:solidFill>
@@ -2201,7 +2201,7 @@
               </a:rPr>
               <a:t>序安</a:t>
             </a:r>
-            <a:endParaRPr lang="en-US" sz="1300" dirty="0"/>
+            <a:endParaRPr lang="en-US" sz="1400" dirty="0"/>
           </a:p>
         </p:txBody>
       </p:sp>
@@ -2956,7 +2956,7 @@
       </p:sp>
       <p:pic>
         <p:nvPicPr>
-          <p:cNvPr id="7" name="Image 0" descr="/Users/rocalight/Desktop/All in one Data/01_PROJECTS/FDE任务/03_产品与解决方案/03_连续化工过程偏移副驾驶/90_构建与分析缓存/序安磷煤化工异常早期预警平台_黑客松路演_v14/assets/序安标志_v04.svg">    </p:cNvPr>
+          <p:cNvPr id="7" name="Image 0" descr="/Users/rocalight/Desktop/All in one Data/01_PROJECTS/FDE任务/03_产品与解决方案/03_连续化工过程偏移副驾驶/apps/web/public/brand/xuanan-anomaly-intercept-v04.svg">    </p:cNvPr>
           <p:cNvPicPr>
             <a:picLocks noChangeAspect="1"/>
           </p:cNvPicPr>
@@ -2976,8 +2976,8 @@
         </p:blipFill>
         <p:spPr>
           <a:xfrm>
-            <a:off x="10835640" y="256032"/>
-            <a:ext cx="457200" cy="457200"/>
+            <a:off x="10661904" y="201168"/>
+            <a:ext cx="566928" cy="566928"/>
           </a:xfrm>
           <a:prstGeom prst="rect">
             <a:avLst/>
@@ -2992,8 +2992,8 @@
         </p:nvSpPr>
         <p:spPr>
           <a:xfrm>
-            <a:off x="11247120" y="329184"/>
-            <a:ext cx="548640" cy="256032"/>
+            <a:off x="11192256" y="320040"/>
+            <a:ext cx="658368" cy="274320"/>
           </a:xfrm>
           <a:prstGeom prst="rect">
             <a:avLst/>
@@ -3014,7 +3014,7 @@
               <a:buNone/>
             </a:pPr>
             <a:r>
-              <a:rPr lang="en-US" sz="1300" b="1" dirty="0">
+              <a:rPr lang="en-US" sz="1400" b="1" dirty="0">
                 <a:solidFill>
                   <a:srgbClr val="102A3A"/>
                 </a:solidFill>
@@ -3024,7 +3024,7 @@
               </a:rPr>
               <a:t>序安</a:t>
             </a:r>
-            <a:endParaRPr lang="en-US" sz="1300" dirty="0"/>
+            <a:endParaRPr lang="en-US" sz="1400" dirty="0"/>
           </a:p>
         </p:txBody>
       </p:sp>
@@ -3857,7 +3857,7 @@
       </p:sp>
       <p:pic>
         <p:nvPicPr>
-          <p:cNvPr id="4" name="Image 1" descr="/Users/rocalight/Desktop/All in one Data/01_PROJECTS/FDE任务/03_产品与解决方案/03_连续化工过程偏移副驾驶/90_构建与分析缓存/序安磷煤化工异常早期预警平台_黑客松路演_v14/assets/序安标志_v04.svg">    </p:cNvPr>
+          <p:cNvPr id="4" name="Image 1" descr="/Users/rocalight/Desktop/All in one Data/01_PROJECTS/FDE任务/03_产品与解决方案/03_连续化工过程偏移副驾驶/apps/web/public/brand/xuanan-anomaly-intercept-v04.svg">    </p:cNvPr>
           <p:cNvPicPr>
             <a:picLocks noChangeAspect="1"/>
           </p:cNvPicPr>
@@ -3877,8 +3877,8 @@
         </p:blipFill>
         <p:spPr>
           <a:xfrm>
-            <a:off x="10835640" y="256032"/>
-            <a:ext cx="457200" cy="457200"/>
+            <a:off x="10661904" y="201168"/>
+            <a:ext cx="566928" cy="566928"/>
           </a:xfrm>
           <a:prstGeom prst="rect">
             <a:avLst/>
@@ -3893,8 +3893,8 @@
         </p:nvSpPr>
         <p:spPr>
           <a:xfrm>
-            <a:off x="11247120" y="329184"/>
-            <a:ext cx="548640" cy="256032"/>
+            <a:off x="11192256" y="320040"/>
+            <a:ext cx="658368" cy="274320"/>
           </a:xfrm>
           <a:prstGeom prst="rect">
             <a:avLst/>
@@ -3915,7 +3915,7 @@
               <a:buNone/>
             </a:pPr>
             <a:r>
-              <a:rPr lang="en-US" sz="1300" b="1" dirty="0">
+              <a:rPr lang="en-US" sz="1400" b="1" dirty="0">
                 <a:solidFill>
                   <a:srgbClr val="FFFFFF"/>
                 </a:solidFill>
@@ -3925,7 +3925,7 @@
               </a:rPr>
               <a:t>序安</a:t>
             </a:r>
-            <a:endParaRPr lang="en-US" sz="1300" dirty="0"/>
+            <a:endParaRPr lang="en-US" sz="1400" dirty="0"/>
           </a:p>
         </p:txBody>
       </p:sp>
@@ -4592,7 +4592,7 @@
       </p:sp>
       <p:pic>
         <p:nvPicPr>
-          <p:cNvPr id="8" name="Image 0" descr="/Users/rocalight/Desktop/All in one Data/01_PROJECTS/FDE任务/03_产品与解决方案/03_连续化工过程偏移副驾驶/90_构建与分析缓存/序安磷煤化工异常早期预警平台_黑客松路演_v14/assets/序安标志_v04.svg">    </p:cNvPr>
+          <p:cNvPr id="8" name="Image 0" descr="/Users/rocalight/Desktop/All in one Data/01_PROJECTS/FDE任务/03_产品与解决方案/03_连续化工过程偏移副驾驶/apps/web/public/brand/xuanan-anomaly-intercept-v04.svg">    </p:cNvPr>
           <p:cNvPicPr>
             <a:picLocks noChangeAspect="1"/>
           </p:cNvPicPr>
@@ -4612,8 +4612,8 @@
         </p:blipFill>
         <p:spPr>
           <a:xfrm>
-            <a:off x="10835640" y="256032"/>
-            <a:ext cx="457200" cy="457200"/>
+            <a:off x="10661904" y="201168"/>
+            <a:ext cx="566928" cy="566928"/>
           </a:xfrm>
           <a:prstGeom prst="rect">
             <a:avLst/>
@@ -4628,8 +4628,8 @@
         </p:nvSpPr>
         <p:spPr>
           <a:xfrm>
-            <a:off x="11247120" y="329184"/>
-            <a:ext cx="548640" cy="256032"/>
+            <a:off x="11192256" y="320040"/>
+            <a:ext cx="658368" cy="274320"/>
           </a:xfrm>
           <a:prstGeom prst="rect">
             <a:avLst/>
@@ -4650,7 +4650,7 @@
               <a:buNone/>
             </a:pPr>
             <a:r>
-              <a:rPr lang="en-US" sz="1300" b="1" dirty="0">
+              <a:rPr lang="en-US" sz="1400" b="1" dirty="0">
                 <a:solidFill>
                   <a:srgbClr val="102A3A"/>
                 </a:solidFill>
@@ -4660,7 +4660,7 @@
               </a:rPr>
               <a:t>序安</a:t>
             </a:r>
-            <a:endParaRPr lang="en-US" sz="1300" dirty="0"/>
+            <a:endParaRPr lang="en-US" sz="1400" dirty="0"/>
           </a:p>
         </p:txBody>
       </p:sp>
@@ -5893,7 +5893,7 @@
       </p:sp>
       <p:pic>
         <p:nvPicPr>
-          <p:cNvPr id="8" name="Image 0" descr="/Users/rocalight/Desktop/All in one Data/01_PROJECTS/FDE任务/03_产品与解决方案/03_连续化工过程偏移副驾驶/90_构建与分析缓存/序安磷煤化工异常早期预警平台_黑客松路演_v14/assets/序安标志_v04.svg">    </p:cNvPr>
+          <p:cNvPr id="8" name="Image 0" descr="/Users/rocalight/Desktop/All in one Data/01_PROJECTS/FDE任务/03_产品与解决方案/03_连续化工过程偏移副驾驶/apps/web/public/brand/xuanan-anomaly-intercept-v04.svg">    </p:cNvPr>
           <p:cNvPicPr>
             <a:picLocks noChangeAspect="1"/>
           </p:cNvPicPr>
@@ -5913,8 +5913,8 @@
         </p:blipFill>
         <p:spPr>
           <a:xfrm>
-            <a:off x="10835640" y="256032"/>
-            <a:ext cx="457200" cy="457200"/>
+            <a:off x="10661904" y="201168"/>
+            <a:ext cx="566928" cy="566928"/>
           </a:xfrm>
           <a:prstGeom prst="rect">
             <a:avLst/>
@@ -5929,8 +5929,8 @@
         </p:nvSpPr>
         <p:spPr>
           <a:xfrm>
-            <a:off x="11247120" y="329184"/>
-            <a:ext cx="548640" cy="256032"/>
+            <a:off x="11192256" y="320040"/>
+            <a:ext cx="658368" cy="274320"/>
           </a:xfrm>
           <a:prstGeom prst="rect">
             <a:avLst/>
@@ -5951,7 +5951,7 @@
               <a:buNone/>
             </a:pPr>
             <a:r>
-              <a:rPr lang="en-US" sz="1300" b="1" dirty="0">
+              <a:rPr lang="en-US" sz="1400" b="1" dirty="0">
                 <a:solidFill>
                   <a:srgbClr val="102A3A"/>
                 </a:solidFill>
@@ -5961,7 +5961,7 @@
               </a:rPr>
               <a:t>序安</a:t>
             </a:r>
-            <a:endParaRPr lang="en-US" sz="1300" dirty="0"/>
+            <a:endParaRPr lang="en-US" sz="1400" dirty="0"/>
           </a:p>
         </p:txBody>
       </p:sp>
@@ -7207,7 +7207,7 @@
       </p:sp>
       <p:pic>
         <p:nvPicPr>
-          <p:cNvPr id="8" name="Image 0" descr="/Users/rocalight/Desktop/All in one Data/01_PROJECTS/FDE任务/03_产品与解决方案/03_连续化工过程偏移副驾驶/90_构建与分析缓存/序安磷煤化工异常早期预警平台_黑客松路演_v14/assets/序安标志_v04.svg">    </p:cNvPr>
+          <p:cNvPr id="8" name="Image 0" descr="/Users/rocalight/Desktop/All in one Data/01_PROJECTS/FDE任务/03_产品与解决方案/03_连续化工过程偏移副驾驶/apps/web/public/brand/xuanan-anomaly-intercept-v04.svg">    </p:cNvPr>
           <p:cNvPicPr>
             <a:picLocks noChangeAspect="1"/>
           </p:cNvPicPr>
@@ -7227,8 +7227,8 @@
         </p:blipFill>
         <p:spPr>
           <a:xfrm>
-            <a:off x="10835640" y="256032"/>
-            <a:ext cx="457200" cy="457200"/>
+            <a:off x="10661904" y="201168"/>
+            <a:ext cx="566928" cy="566928"/>
           </a:xfrm>
           <a:prstGeom prst="rect">
             <a:avLst/>
@@ -7243,8 +7243,8 @@
         </p:nvSpPr>
         <p:spPr>
           <a:xfrm>
-            <a:off x="11247120" y="329184"/>
-            <a:ext cx="548640" cy="256032"/>
+            <a:off x="11192256" y="320040"/>
+            <a:ext cx="658368" cy="274320"/>
           </a:xfrm>
           <a:prstGeom prst="rect">
             <a:avLst/>
@@ -7265,7 +7265,7 @@
               <a:buNone/>
             </a:pPr>
             <a:r>
-              <a:rPr lang="en-US" sz="1300" b="1" dirty="0">
+              <a:rPr lang="en-US" sz="1400" b="1" dirty="0">
                 <a:solidFill>
                   <a:srgbClr val="102A3A"/>
                 </a:solidFill>
@@ -7275,7 +7275,7 @@
               </a:rPr>
               <a:t>序安</a:t>
             </a:r>
-            <a:endParaRPr lang="en-US" sz="1300" dirty="0"/>
+            <a:endParaRPr lang="en-US" sz="1400" dirty="0"/>
           </a:p>
         </p:txBody>
       </p:sp>
@@ -8182,7 +8182,7 @@
       </p:sp>
       <p:pic>
         <p:nvPicPr>
-          <p:cNvPr id="7" name="Image 0" descr="/Users/rocalight/Desktop/All in one Data/01_PROJECTS/FDE任务/03_产品与解决方案/03_连续化工过程偏移副驾驶/90_构建与分析缓存/序安磷煤化工异常早期预警平台_黑客松路演_v14/assets/序安标志_v04.svg">    </p:cNvPr>
+          <p:cNvPr id="7" name="Image 0" descr="/Users/rocalight/Desktop/All in one Data/01_PROJECTS/FDE任务/03_产品与解决方案/03_连续化工过程偏移副驾驶/apps/web/public/brand/xuanan-anomaly-intercept-v04.svg">    </p:cNvPr>
           <p:cNvPicPr>
             <a:picLocks noChangeAspect="1"/>
           </p:cNvPicPr>
@@ -8202,8 +8202,8 @@
         </p:blipFill>
         <p:spPr>
           <a:xfrm>
-            <a:off x="10835640" y="256032"/>
-            <a:ext cx="457200" cy="457200"/>
+            <a:off x="10661904" y="201168"/>
+            <a:ext cx="566928" cy="566928"/>
           </a:xfrm>
           <a:prstGeom prst="rect">
             <a:avLst/>
@@ -8218,8 +8218,8 @@
         </p:nvSpPr>
         <p:spPr>
           <a:xfrm>
-            <a:off x="11247120" y="329184"/>
-            <a:ext cx="548640" cy="256032"/>
+            <a:off x="11192256" y="320040"/>
+            <a:ext cx="658368" cy="274320"/>
           </a:xfrm>
           <a:prstGeom prst="rect">
             <a:avLst/>
@@ -8240,7 +8240,7 @@
               <a:buNone/>
             </a:pPr>
             <a:r>
-              <a:rPr lang="en-US" sz="1300" b="1" dirty="0">
+              <a:rPr lang="en-US" sz="1400" b="1" dirty="0">
                 <a:solidFill>
                   <a:srgbClr val="102A3A"/>
                 </a:solidFill>
@@ -8250,7 +8250,7 @@
               </a:rPr>
               <a:t>序安</a:t>
             </a:r>
-            <a:endParaRPr lang="en-US" sz="1300" dirty="0"/>
+            <a:endParaRPr lang="en-US" sz="1400" dirty="0"/>
           </a:p>
         </p:txBody>
       </p:sp>
@@ -9283,7 +9283,7 @@
       </p:sp>
       <p:pic>
         <p:nvPicPr>
-          <p:cNvPr id="7" name="Image 0" descr="/Users/rocalight/Desktop/All in one Data/01_PROJECTS/FDE任务/03_产品与解决方案/03_连续化工过程偏移副驾驶/90_构建与分析缓存/序安磷煤化工异常早期预警平台_黑客松路演_v14/assets/序安标志_v04.svg">    </p:cNvPr>
+          <p:cNvPr id="7" name="Image 0" descr="/Users/rocalight/Desktop/All in one Data/01_PROJECTS/FDE任务/03_产品与解决方案/03_连续化工过程偏移副驾驶/apps/web/public/brand/xuanan-anomaly-intercept-v04.svg">    </p:cNvPr>
           <p:cNvPicPr>
             <a:picLocks noChangeAspect="1"/>
           </p:cNvPicPr>
@@ -9303,8 +9303,8 @@
         </p:blipFill>
         <p:spPr>
           <a:xfrm>
-            <a:off x="10835640" y="256032"/>
-            <a:ext cx="457200" cy="457200"/>
+            <a:off x="10661904" y="201168"/>
+            <a:ext cx="566928" cy="566928"/>
           </a:xfrm>
           <a:prstGeom prst="rect">
             <a:avLst/>
@@ -9319,8 +9319,8 @@
         </p:nvSpPr>
         <p:spPr>
           <a:xfrm>
-            <a:off x="11247120" y="329184"/>
-            <a:ext cx="548640" cy="256032"/>
+            <a:off x="11192256" y="320040"/>
+            <a:ext cx="658368" cy="274320"/>
           </a:xfrm>
           <a:prstGeom prst="rect">
             <a:avLst/>
@@ -9341,7 +9341,7 @@
               <a:buNone/>
             </a:pPr>
             <a:r>
-              <a:rPr lang="en-US" sz="1300" b="1" dirty="0">
+              <a:rPr lang="en-US" sz="1400" b="1" dirty="0">
                 <a:solidFill>
                   <a:srgbClr val="102A3A"/>
                 </a:solidFill>
@@ -9351,7 +9351,7 @@
               </a:rPr>
               <a:t>序安</a:t>
             </a:r>
-            <a:endParaRPr lang="en-US" sz="1300" dirty="0"/>
+            <a:endParaRPr lang="en-US" sz="1400" dirty="0"/>
           </a:p>
         </p:txBody>
       </p:sp>
@@ -10633,7 +10633,7 @@
       </p:sp>
       <p:pic>
         <p:nvPicPr>
-          <p:cNvPr id="8" name="Image 0" descr="/Users/rocalight/Desktop/All in one Data/01_PROJECTS/FDE任务/03_产品与解决方案/03_连续化工过程偏移副驾驶/90_构建与分析缓存/序安磷煤化工异常早期预警平台_黑客松路演_v14/assets/序安标志_v04.svg">    </p:cNvPr>
+          <p:cNvPr id="8" name="Image 0" descr="/Users/rocalight/Desktop/All in one Data/01_PROJECTS/FDE任务/03_产品与解决方案/03_连续化工过程偏移副驾驶/apps/web/public/brand/xuanan-anomaly-intercept-v04.svg">    </p:cNvPr>
           <p:cNvPicPr>
             <a:picLocks noChangeAspect="1"/>
           </p:cNvPicPr>
@@ -10653,8 +10653,8 @@
         </p:blipFill>
         <p:spPr>
           <a:xfrm>
-            <a:off x="10835640" y="256032"/>
-            <a:ext cx="457200" cy="457200"/>
+            <a:off x="10661904" y="201168"/>
+            <a:ext cx="566928" cy="566928"/>
           </a:xfrm>
           <a:prstGeom prst="rect">
             <a:avLst/>
@@ -10669,8 +10669,8 @@
         </p:nvSpPr>
         <p:spPr>
           <a:xfrm>
-            <a:off x="11247120" y="329184"/>
-            <a:ext cx="548640" cy="256032"/>
+            <a:off x="11192256" y="320040"/>
+            <a:ext cx="658368" cy="274320"/>
           </a:xfrm>
           <a:prstGeom prst="rect">
             <a:avLst/>
@@ -10691,7 +10691,7 @@
               <a:buNone/>
             </a:pPr>
             <a:r>
-              <a:rPr lang="en-US" sz="1300" b="1" dirty="0">
+              <a:rPr lang="en-US" sz="1400" b="1" dirty="0">
                 <a:solidFill>
                   <a:srgbClr val="102A3A"/>
                 </a:solidFill>
@@ -10701,7 +10701,7 @@
               </a:rPr>
               <a:t>序安</a:t>
             </a:r>
-            <a:endParaRPr lang="en-US" sz="1300" dirty="0"/>
+            <a:endParaRPr lang="en-US" sz="1400" dirty="0"/>
           </a:p>
         </p:txBody>
       </p:sp>

--- a/04_交付成品/序安_磷煤化工异常早期预警平台_黑客松路演_v14_ZH_REVIEW.pptx
+++ b/04_交付成品/序安_磷煤化工异常早期预警平台_黑客松路演_v14_ZH_REVIEW.pptx
@@ -15,9 +15,11 @@
     <p:sldId id="263" r:id="rId9"/>
     <p:sldId id="264" r:id="rId10"/>
     <p:sldId id="265" r:id="rId11"/>
+    <p:sldId id="266" r:id="rId12"/>
+    <p:sldId id="267" r:id="rId13"/>
   </p:sldIdLst>
   <p:notesMasterIdLst>
-    <p:notesMasterId r:id="rId12"/>
+    <p:notesMasterId r:id="rId14"/>
   </p:notesMasterIdLst>
   <p:sldSz cx="12192000" cy="6858000"/>
   <p:notesSz cx="6858000" cy="12192000"/>
@@ -511,7 +513,7 @@
           <a:p>
             <a:r>
               <a:rPr lang="en-US" dirty="0"/>
-              <a:t>大家好，我们带来的是“序安·磷煤化工异常早期预警平台”。它不替代 DCS，也不替代操作员。它只做一件很具体的事：持续读取已经存在的过程数据，在化验结果出来之前、在异常演变成事故之前，指出风险正在形成，并把判断依据和处置建议交给人确认。</a:t>
+              <a:t>作品名是“序安·磷煤化工异常早期预警平台”。一句话介绍：让异常在化验结果前被看见。它不替代 DCS，也不替代操作员；它持续读取已经存在的过程数据，在化验结果出来前指出风险，并把判断依据和处置建议交给人确认。</a:t>
             </a:r>
             <a:endParaRPr lang="en-US" dirty="0"/>
           </a:p>
@@ -599,7 +601,7 @@
           <a:p>
             <a:r>
               <a:rPr lang="en-US" dirty="0"/>
-              <a:t>我们今天提出的下一步，不是接管控制，而是请园区授权我们先看清一个真实问题：选一个装置、一个风险目标、建立一条只读数据链。双方先确认谁能授权数据、最痛的异常是什么，以及怎样定义“有用的提前量”。公开验证数据不等于贵州企业真实数据，公开案例参照也不等于合作关系。</a:t>
+              <a:t>模型方面，污水软测量使用随机森林，TEP 使用 PCA 与梯度提升诊断，语言解释使用 deepseek-v4-flash。工具包括 Next.js、FastAPI、PostgreSQL、Python、Playwright 和 PptxGenJS。数据使用 UCI 公开城市污水数据和 TEP 公开仿真数据。Logo 是序安自有资产，截图由我们的公网 Demo 实拍，主视觉由 AI 生成且没有企业标识，中文字体 Source Han Sans SC 采用 SIL OFL 许可。</a:t>
             </a:r>
             <a:endParaRPr lang="en-US" dirty="0"/>
           </a:p>
@@ -623,6 +625,182 @@
             <a:fld id="{F7021451-1387-4CA6-816F-3879F97B5CBC}" type="slidenum">
               <a:rPr lang="en-US"/>
               <a:t>10</a:t>
+            </a:fld>
+            <a:endParaRPr lang="en-US"/>
+          </a:p>
+        </p:txBody>
+      </p:sp>
+    </p:spTree>
+    <p:extLst>
+      <p:ext uri="{BB962C8B-B14F-4D97-AF65-F5344CB8AC3E}">
+        <p14:creationId xmlns:p14="http://schemas.microsoft.com/office/powerpoint/2010/main" val="1024086991"/>
+      </p:ext>
+    </p:extLst>
+  </p:cSld>
+  <p:clrMapOvr>
+    <a:masterClrMapping/>
+  </p:clrMapOvr>
+</p:notes>
+</file>
+
+<file path=ppt/notesSlides/notesSlide11.xml><?xml version="1.0" encoding="utf-8"?>
+<p:notes xmlns:a="http://schemas.openxmlformats.org/drawingml/2006/main" xmlns:r="http://schemas.openxmlformats.org/officeDocument/2006/relationships" xmlns:p="http://schemas.openxmlformats.org/presentationml/2006/main">
+  <p:cSld>
+    <p:spTree>
+      <p:nvGrpSpPr>
+        <p:cNvPr id="1" name=""/>
+        <p:cNvGrpSpPr/>
+        <p:nvPr/>
+      </p:nvGrpSpPr>
+      <p:grpSpPr>
+        <a:xfrm>
+          <a:off x="0" y="0"/>
+          <a:ext cx="0" cy="0"/>
+          <a:chOff x="0" y="0"/>
+          <a:chExt cx="0" cy="0"/>
+        </a:xfrm>
+      </p:grpSpPr>
+      <p:sp>
+        <p:nvSpPr>
+          <p:cNvPr id="2" name="Slide Image Placeholder 1"/>
+          <p:cNvSpPr>
+            <a:spLocks noGrp="1" noRot="1" noChangeAspect="1"/>
+          </p:cNvSpPr>
+          <p:nvPr>
+            <p:ph type="sldImg"/>
+          </p:nvPr>
+        </p:nvSpPr>
+        <p:spPr/>
+      </p:sp>
+      <p:sp>
+        <p:nvSpPr>
+          <p:cNvPr id="3" name="Notes Placeholder 2"/>
+          <p:cNvSpPr>
+            <a:spLocks noGrp="1"/>
+          </p:cNvSpPr>
+          <p:nvPr>
+            <p:ph type="body" idx="1"/>
+          </p:nvPr>
+        </p:nvSpPr>
+        <p:spPr/>
+        <p:txBody>
+          <a:bodyPr/>
+          <a:lstStyle/>
+          <a:p>
+            <a:r>
+              <a:rPr lang="en-US" dirty="0"/>
+              <a:t>落地不需要一开始覆盖整个园区。我们建议先选一个装置、一个风险目标，确认变量和化验标签；然后做离线历史回放，检查异常窗口和证据；再进行只读影子运行，与班组判断并行对照；最后共同验收提前量、误报和可解释性。四到八周只是建议节奏，实际周期取决于现场数据条件。</a:t>
+            </a:r>
+            <a:endParaRPr lang="en-US" dirty="0"/>
+          </a:p>
+        </p:txBody>
+      </p:sp>
+      <p:sp>
+        <p:nvSpPr>
+          <p:cNvPr id="4" name="Slide Number Placeholder 3"/>
+          <p:cNvSpPr>
+            <a:spLocks noGrp="1"/>
+          </p:cNvSpPr>
+          <p:nvPr>
+            <p:ph type="sldNum" sz="quarter" idx="10"/>
+          </p:nvPr>
+        </p:nvSpPr>
+        <p:spPr/>
+        <p:txBody>
+          <a:bodyPr/>
+          <a:lstStyle/>
+          <a:p>
+            <a:fld id="{F7021451-1387-4CA6-816F-3879F97B5CBC}" type="slidenum">
+              <a:rPr lang="en-US"/>
+              <a:t>11</a:t>
+            </a:fld>
+            <a:endParaRPr lang="en-US"/>
+          </a:p>
+        </p:txBody>
+      </p:sp>
+    </p:spTree>
+    <p:extLst>
+      <p:ext uri="{BB962C8B-B14F-4D97-AF65-F5344CB8AC3E}">
+        <p14:creationId xmlns:p14="http://schemas.microsoft.com/office/powerpoint/2010/main" val="1024086991"/>
+      </p:ext>
+    </p:extLst>
+  </p:cSld>
+  <p:clrMapOvr>
+    <a:masterClrMapping/>
+  </p:clrMapOvr>
+</p:notes>
+</file>
+
+<file path=ppt/notesSlides/notesSlide12.xml><?xml version="1.0" encoding="utf-8"?>
+<p:notes xmlns:a="http://schemas.openxmlformats.org/drawingml/2006/main" xmlns:r="http://schemas.openxmlformats.org/officeDocument/2006/relationships" xmlns:p="http://schemas.openxmlformats.org/presentationml/2006/main">
+  <p:cSld>
+    <p:spTree>
+      <p:nvGrpSpPr>
+        <p:cNvPr id="1" name=""/>
+        <p:cNvGrpSpPr/>
+        <p:nvPr/>
+      </p:nvGrpSpPr>
+      <p:grpSpPr>
+        <a:xfrm>
+          <a:off x="0" y="0"/>
+          <a:ext cx="0" cy="0"/>
+          <a:chOff x="0" y="0"/>
+          <a:chExt cx="0" cy="0"/>
+        </a:xfrm>
+      </p:grpSpPr>
+      <p:sp>
+        <p:nvSpPr>
+          <p:cNvPr id="2" name="Slide Image Placeholder 1"/>
+          <p:cNvSpPr>
+            <a:spLocks noGrp="1" noRot="1" noChangeAspect="1"/>
+          </p:cNvSpPr>
+          <p:nvPr>
+            <p:ph type="sldImg"/>
+          </p:nvPr>
+        </p:nvSpPr>
+        <p:spPr/>
+      </p:sp>
+      <p:sp>
+        <p:nvSpPr>
+          <p:cNvPr id="3" name="Notes Placeholder 2"/>
+          <p:cNvSpPr>
+            <a:spLocks noGrp="1"/>
+          </p:cNvSpPr>
+          <p:nvPr>
+            <p:ph type="body" idx="1"/>
+          </p:nvPr>
+        </p:nvSpPr>
+        <p:spPr/>
+        <p:txBody>
+          <a:bodyPr/>
+          <a:lstStyle/>
+          <a:p>
+            <a:r>
+              <a:rPr lang="en-US" dirty="0"/>
+              <a:t>如果再给我们一百天，第一件事只有一句话：进入一个获授权装置，完成首个目标的只读数据对齐。我们不会一开始就接管控制，而是先选一个装置、一个风险目标和一条只读数据链。公开验证数据不等于贵州企业真实数据，公开案例参照也不等于合作关系。</a:t>
+            </a:r>
+            <a:endParaRPr lang="en-US" dirty="0"/>
+          </a:p>
+        </p:txBody>
+      </p:sp>
+      <p:sp>
+        <p:nvSpPr>
+          <p:cNvPr id="4" name="Slide Number Placeholder 3"/>
+          <p:cNvSpPr>
+            <a:spLocks noGrp="1"/>
+          </p:cNvSpPr>
+          <p:nvPr>
+            <p:ph type="sldNum" sz="quarter" idx="10"/>
+          </p:nvPr>
+        </p:nvSpPr>
+        <p:spPr/>
+        <p:txBody>
+          <a:bodyPr/>
+          <a:lstStyle/>
+          <a:p>
+            <a:fld id="{F7021451-1387-4CA6-816F-3879F97B5CBC}" type="slidenum">
+              <a:rPr lang="en-US"/>
+              <a:t>12</a:t>
             </a:fld>
             <a:endParaRPr lang="en-US"/>
           </a:p>
@@ -687,7 +865,7 @@
           <a:p>
             <a:r>
               <a:rPr lang="en-US" dirty="0"/>
-              <a:t>磷煤化工现场并不缺传感器，DCS 也一直在采集压力、流量、温度、液位和密度。真正的问题是，很多关键判断依赖离线化验、跨装置核对和老师傅经验。等结论出来时，趋势可能已经形成。序安补的是这段“提前判断”的时间差，而且不增加新的控制权。</a:t>
+              <a:t>这不是给“广大用户”的抽象平台。我们先服务一个具体人：中控操作员周师傅。他接班后看 DCS 和交接记录；曲线变怪时来回翻趋势、问上一班；关键结果没出来，还要打电话追化验、跨工段核对。损耗很具体：四处信息反复核对，等待吃掉处置窗口，高经验人员被重复排查占用，事后证据又难还原。</a:t>
             </a:r>
             <a:endParaRPr lang="en-US" dirty="0"/>
           </a:p>
@@ -951,7 +1129,7 @@
           <a:p>
             <a:r>
               <a:rPr lang="en-US" dirty="0"/>
-              <a:t>这里要讲清楚两类模型的分工。过程诊断模型读取实时变量和软测量结果，先发现异常窗口，再给故障候选排序，并计算变量贡献。语言模型拿到这些结构化证据以后，负责把技术判断翻译成人能理解的话，并回答追问。它不能绕过诊断模型，更不能因为一句对话就直接控制设备。</a:t>
+              <a:t>这一页是本轮公网真实截图。过程诊断模型先产生异常窗口、故障候选和变量证据；DeepSeek 只在这些结构化证据上做解释和问答。公网实测返回 llm_enhanced，模型是 deepseek-v4-flash，证据引用为 PH-P、PH-E 和 Q-E，每次调用都有 Trace。这证明解释增强链路已打通，但不代表语言模型可以控制设备。</a:t>
             </a:r>
             <a:endParaRPr lang="en-US" dirty="0"/>
           </a:p>
@@ -1039,7 +1217,7 @@
           <a:p>
             <a:r>
               <a:rPr lang="en-US" dirty="0"/>
-              <a:t>现场演示会走一条完整路径：进入系统，选择公开验证场景，让过程变量开始回放；系统捕获异常窗口，给出候选故障和变量证据；操作员继续追问，并选择确认、驳回或升级。污水场景用来说明如何预测滞后的化验指标，TEP 场景用来说明连续化工过程偏移。它们都是公开技术验证数据，不是贵州企业数据。</a:t>
+              <a:t>评委可以现场复现。第一步，打开 https://huagong.finlaw.cloud/demo，用 operator-01 和口令 demo-op-2026 登录。第二步，选择污水出水风险或 TEP 场景，开始过程回放。第三步，进入捕获到的风险事件，向序安追问并做人工确认。当前 Demo 只读，不会向 PLC 或 DCS 发送指令。</a:t>
             </a:r>
             <a:endParaRPr lang="en-US" dirty="0"/>
           </a:p>
@@ -1303,7 +1481,7 @@
           <a:p>
             <a:r>
               <a:rPr lang="en-US" dirty="0"/>
-              <a:t>落地不需要一开始覆盖整个园区。我们建议先选一个装置、一个风险目标，确认变量和化验标签；然后做离线历史回放，检查异常窗口和证据；再进行只读影子运行，与班组判断并行对照；最后共同验收提前量、误报和可解释性。四到八周只是建议节奏，实际周期取决于现场数据条件。</a:t>
+              <a:t>我们不把开源框架和赛前工作包装成四十八小时内从零完成。赛前和开源基线包括 Next.js、FastAPI、PostgreSQL 工程骨架，TEP 和 UCI 公开数据，基础回放和只读理念。本次四十八小时新增或重构的是：磷煤化工定位、污水与 TEP 双场景旅程、DeepSeek 真实在线解释与 Trace、人工确认和影子闸门，以及公网 Demo 和 Playwright 复现证据。</a:t>
             </a:r>
             <a:endParaRPr lang="en-US" dirty="0"/>
           </a:p>
@@ -2005,7 +2183,7 @@
                 <a:ea typeface="Source Han Sans SC" pitchFamily="34" charset="-122"/>
                 <a:cs typeface="Source Han Sans SC" pitchFamily="34" charset="-120"/>
               </a:rPr>
-              <a:t>让异常在事故之前、在化验结果之前被看见</a:t>
+              <a:t>让异常在化验结果前被看见</a:t>
             </a:r>
             <a:endParaRPr lang="en-US" sz="2200" dirty="0"/>
           </a:p>
@@ -2110,6 +2288,2203 @@
 <file path=ppt/slides/slide10.xml><?xml version="1.0" encoding="utf-8"?>
 <p:sld xmlns:a="http://schemas.openxmlformats.org/drawingml/2006/main" xmlns:r="http://schemas.openxmlformats.org/officeDocument/2006/relationships" xmlns:p="http://schemas.openxmlformats.org/presentationml/2006/main">
   <p:cSld name="Slide 10">
+    <p:bg>
+      <p:bgPr>
+        <a:solidFill>
+          <a:srgbClr val="F7FBFE"/>
+        </a:solidFill>
+      </p:bgPr>
+    </p:bg>
+    <p:spTree>
+      <p:nvGrpSpPr>
+        <p:cNvPr id="1" name=""/>
+        <p:cNvGrpSpPr/>
+        <p:nvPr/>
+      </p:nvGrpSpPr>
+      <p:grpSpPr>
+        <a:xfrm>
+          <a:off x="0" y="0"/>
+          <a:ext cx="0" cy="0"/>
+          <a:chOff x="0" y="0"/>
+          <a:chExt cx="0" cy="0"/>
+        </a:xfrm>
+      </p:grpSpPr>
+      <p:sp>
+        <p:nvSpPr>
+          <p:cNvPr id="2" name="Shape 0"/>
+          <p:cNvSpPr/>
+          <p:nvPr/>
+        </p:nvSpPr>
+        <p:spPr>
+          <a:xfrm>
+            <a:off x="658368" y="6473952"/>
+            <a:ext cx="10881360" cy="0"/>
+          </a:xfrm>
+          <a:prstGeom prst="line">
+            <a:avLst/>
+          </a:prstGeom>
+          <a:noFill/>
+          <a:ln w="12700">
+            <a:solidFill>
+              <a:srgbClr val="DCEAF5"/>
+            </a:solidFill>
+            <a:prstDash val="solid"/>
+          </a:ln>
+        </p:spPr>
+      </p:sp>
+      <p:sp>
+        <p:nvSpPr>
+          <p:cNvPr id="3" name="Text 1"/>
+          <p:cNvSpPr/>
+          <p:nvPr/>
+        </p:nvSpPr>
+        <p:spPr>
+          <a:xfrm>
+            <a:off x="658368" y="6547104"/>
+            <a:ext cx="5120640" cy="164592"/>
+          </a:xfrm>
+          <a:prstGeom prst="rect">
+            <a:avLst/>
+          </a:prstGeom>
+          <a:noFill/>
+          <a:ln/>
+        </p:spPr>
+        <p:txBody>
+          <a:bodyPr wrap="square" lIns="0" tIns="0" rIns="0" bIns="0" rtlCol="0" anchor="ctr">
+            <a:normAutofit/>
+          </a:bodyPr>
+          <a:lstStyle/>
+          <a:p>
+            <a:pPr indent="0" marL="0">
+              <a:lnSpc>
+                <a:spcPct val="100000"/>
+              </a:lnSpc>
+              <a:buNone/>
+            </a:pPr>
+            <a:r>
+              <a:rPr lang="en-US" sz="900" dirty="0">
+                <a:solidFill>
+                  <a:srgbClr val="627987"/>
+                </a:solidFill>
+                <a:latin typeface="Source Han Sans SC" pitchFamily="34" charset="0"/>
+                <a:ea typeface="Source Han Sans SC" pitchFamily="34" charset="-122"/>
+                <a:cs typeface="Source Han Sans SC" pitchFamily="34" charset="-120"/>
+              </a:rPr>
+              <a:t>序安·磷煤化工异常早期预警平台</a:t>
+            </a:r>
+            <a:endParaRPr lang="en-US" sz="900" dirty="0"/>
+          </a:p>
+        </p:txBody>
+      </p:sp>
+      <p:sp>
+        <p:nvSpPr>
+          <p:cNvPr id="4" name="Text 2"/>
+          <p:cNvSpPr/>
+          <p:nvPr/>
+        </p:nvSpPr>
+        <p:spPr>
+          <a:xfrm>
+            <a:off x="11109960" y="6547104"/>
+            <a:ext cx="411480" cy="164592"/>
+          </a:xfrm>
+          <a:prstGeom prst="rect">
+            <a:avLst/>
+          </a:prstGeom>
+          <a:noFill/>
+          <a:ln/>
+        </p:spPr>
+        <p:txBody>
+          <a:bodyPr wrap="square" lIns="0" tIns="0" rIns="0" bIns="0" rtlCol="0" anchor="ctr">
+            <a:normAutofit/>
+          </a:bodyPr>
+          <a:lstStyle/>
+          <a:p>
+            <a:pPr algn="r" indent="0" marL="0">
+              <a:lnSpc>
+                <a:spcPct val="100000"/>
+              </a:lnSpc>
+              <a:buNone/>
+            </a:pPr>
+            <a:r>
+              <a:rPr lang="en-US" sz="900" b="1" dirty="0">
+                <a:solidFill>
+                  <a:srgbClr val="627987"/>
+                </a:solidFill>
+                <a:latin typeface="Source Han Sans SC" pitchFamily="34" charset="0"/>
+                <a:ea typeface="Source Han Sans SC" pitchFamily="34" charset="-122"/>
+                <a:cs typeface="Source Han Sans SC" pitchFamily="34" charset="-120"/>
+              </a:rPr>
+              <a:t>10</a:t>
+            </a:r>
+            <a:endParaRPr lang="en-US" sz="900" dirty="0"/>
+          </a:p>
+        </p:txBody>
+      </p:sp>
+      <p:sp>
+        <p:nvSpPr>
+          <p:cNvPr id="5" name="Text 3"/>
+          <p:cNvSpPr/>
+          <p:nvPr/>
+        </p:nvSpPr>
+        <p:spPr>
+          <a:xfrm>
+            <a:off x="658368" y="310896"/>
+            <a:ext cx="5029200" cy="274320"/>
+          </a:xfrm>
+          <a:prstGeom prst="rect">
+            <a:avLst/>
+          </a:prstGeom>
+          <a:noFill/>
+          <a:ln/>
+        </p:spPr>
+        <p:txBody>
+          <a:bodyPr wrap="square" lIns="0" tIns="0" rIns="0" bIns="0" rtlCol="0" anchor="ctr">
+            <a:normAutofit/>
+          </a:bodyPr>
+          <a:lstStyle/>
+          <a:p>
+            <a:pPr indent="0" marL="0">
+              <a:lnSpc>
+                <a:spcPct val="100000"/>
+              </a:lnSpc>
+              <a:buNone/>
+            </a:pPr>
+            <a:r>
+              <a:rPr lang="en-US" sz="1200" b="1" spc="160" kern="0" dirty="0">
+                <a:solidFill>
+                  <a:srgbClr val="24839B"/>
+                </a:solidFill>
+                <a:latin typeface="Source Han Sans SC" pitchFamily="34" charset="0"/>
+                <a:ea typeface="Source Han Sans SC" pitchFamily="34" charset="-122"/>
+                <a:cs typeface="Source Han Sans SC" pitchFamily="34" charset="-120"/>
+              </a:rPr>
+              <a:t>08 / 技术与来源</a:t>
+            </a:r>
+            <a:endParaRPr lang="en-US" sz="1200" dirty="0"/>
+          </a:p>
+        </p:txBody>
+      </p:sp>
+      <p:sp>
+        <p:nvSpPr>
+          <p:cNvPr id="6" name="Text 4"/>
+          <p:cNvSpPr/>
+          <p:nvPr/>
+        </p:nvSpPr>
+        <p:spPr>
+          <a:xfrm>
+            <a:off x="658368" y="685800"/>
+            <a:ext cx="10698480" cy="566928"/>
+          </a:xfrm>
+          <a:prstGeom prst="rect">
+            <a:avLst/>
+          </a:prstGeom>
+          <a:noFill/>
+          <a:ln/>
+        </p:spPr>
+        <p:txBody>
+          <a:bodyPr wrap="square" lIns="0" tIns="0" rIns="0" bIns="0" rtlCol="0" anchor="ctr">
+            <a:normAutofit/>
+          </a:bodyPr>
+          <a:lstStyle/>
+          <a:p>
+            <a:pPr indent="0" marL="0">
+              <a:lnSpc>
+                <a:spcPct val="100000"/>
+              </a:lnSpc>
+              <a:buNone/>
+            </a:pPr>
+            <a:r>
+              <a:rPr lang="en-US" sz="3000" b="1" dirty="0">
+                <a:solidFill>
+                  <a:srgbClr val="102A3A"/>
+                </a:solidFill>
+                <a:latin typeface="Source Han Sans SC" pitchFamily="34" charset="0"/>
+                <a:ea typeface="Source Han Sans SC" pitchFamily="34" charset="-122"/>
+                <a:cs typeface="Source Han Sans SC" pitchFamily="34" charset="-120"/>
+              </a:rPr>
+              <a:t>模型、工具、数据和素材从哪里来</a:t>
+            </a:r>
+            <a:endParaRPr lang="en-US" sz="3000" dirty="0"/>
+          </a:p>
+        </p:txBody>
+      </p:sp>
+      <p:sp>
+        <p:nvSpPr>
+          <p:cNvPr id="7" name="Text 5"/>
+          <p:cNvSpPr/>
+          <p:nvPr/>
+        </p:nvSpPr>
+        <p:spPr>
+          <a:xfrm>
+            <a:off x="676656" y="1298448"/>
+            <a:ext cx="10515600" cy="329184"/>
+          </a:xfrm>
+          <a:prstGeom prst="rect">
+            <a:avLst/>
+          </a:prstGeom>
+          <a:noFill/>
+          <a:ln/>
+        </p:spPr>
+        <p:txBody>
+          <a:bodyPr wrap="square" lIns="0" tIns="0" rIns="0" bIns="0" rtlCol="0" anchor="ctr">
+            <a:normAutofit/>
+          </a:bodyPr>
+          <a:lstStyle/>
+          <a:p>
+            <a:pPr indent="0" marL="0">
+              <a:lnSpc>
+                <a:spcPct val="100000"/>
+              </a:lnSpc>
+              <a:buNone/>
+            </a:pPr>
+            <a:r>
+              <a:rPr lang="en-US" sz="1600" dirty="0">
+                <a:solidFill>
+                  <a:srgbClr val="627987"/>
+                </a:solidFill>
+                <a:latin typeface="Source Han Sans SC" pitchFamily="34" charset="0"/>
+                <a:ea typeface="Source Han Sans SC" pitchFamily="34" charset="-122"/>
+                <a:cs typeface="Source Han Sans SC" pitchFamily="34" charset="-120"/>
+              </a:rPr>
+              <a:t>可复现，也可追溯</a:t>
+            </a:r>
+            <a:endParaRPr lang="en-US" sz="1600" dirty="0"/>
+          </a:p>
+        </p:txBody>
+      </p:sp>
+      <p:pic>
+        <p:nvPicPr>
+          <p:cNvPr id="8" name="Image 0" descr="/Users/rocalight/Desktop/All in one Data/01_PROJECTS/FDE任务/03_产品与解决方案/03_连续化工过程偏移副驾驶/apps/web/public/brand/xuanan-anomaly-intercept-v04.svg">    </p:cNvPr>
+          <p:cNvPicPr>
+            <a:picLocks noChangeAspect="1"/>
+          </p:cNvPicPr>
+          <p:nvPr/>
+        </p:nvPicPr>
+        <p:blipFill>
+          <a:blip r:embed="rId1">
+            <a:extLst>
+              <a:ext uri="{96DAC541-7B7A-43D3-8B79-37D633B846F1}">
+                <asvg:svgBlip xmlns:asvg="http://schemas.microsoft.com/office/drawing/2016/SVG/main" r:embed="rId2"/>
+              </a:ext>
+            </a:extLst>
+          </a:blip>
+          <a:stretch>
+            <a:fillRect/>
+          </a:stretch>
+        </p:blipFill>
+        <p:spPr>
+          <a:xfrm>
+            <a:off x="10661904" y="201168"/>
+            <a:ext cx="566928" cy="566928"/>
+          </a:xfrm>
+          <a:prstGeom prst="rect">
+            <a:avLst/>
+          </a:prstGeom>
+        </p:spPr>
+      </p:pic>
+      <p:sp>
+        <p:nvSpPr>
+          <p:cNvPr id="9" name="Text 6"/>
+          <p:cNvSpPr/>
+          <p:nvPr/>
+        </p:nvSpPr>
+        <p:spPr>
+          <a:xfrm>
+            <a:off x="11192256" y="320040"/>
+            <a:ext cx="658368" cy="274320"/>
+          </a:xfrm>
+          <a:prstGeom prst="rect">
+            <a:avLst/>
+          </a:prstGeom>
+          <a:noFill/>
+          <a:ln/>
+        </p:spPr>
+        <p:txBody>
+          <a:bodyPr wrap="square" lIns="0" tIns="0" rIns="0" bIns="0" rtlCol="0" anchor="ctr">
+            <a:normAutofit/>
+          </a:bodyPr>
+          <a:lstStyle/>
+          <a:p>
+            <a:pPr indent="0" marL="0">
+              <a:lnSpc>
+                <a:spcPct val="100000"/>
+              </a:lnSpc>
+              <a:buNone/>
+            </a:pPr>
+            <a:r>
+              <a:rPr lang="en-US" sz="1400" b="1" dirty="0">
+                <a:solidFill>
+                  <a:srgbClr val="102A3A"/>
+                </a:solidFill>
+                <a:latin typeface="Source Han Sans SC" pitchFamily="34" charset="0"/>
+                <a:ea typeface="Source Han Sans SC" pitchFamily="34" charset="-122"/>
+                <a:cs typeface="Source Han Sans SC" pitchFamily="34" charset="-120"/>
+              </a:rPr>
+              <a:t>序安</a:t>
+            </a:r>
+            <a:endParaRPr lang="en-US" sz="1400" dirty="0"/>
+          </a:p>
+        </p:txBody>
+      </p:sp>
+      <p:sp>
+        <p:nvSpPr>
+          <p:cNvPr id="10" name="Shape 7"/>
+          <p:cNvSpPr/>
+          <p:nvPr/>
+        </p:nvSpPr>
+        <p:spPr>
+          <a:xfrm>
+            <a:off x="640080" y="1755648"/>
+            <a:ext cx="5230368" cy="1810512"/>
+          </a:xfrm>
+          <a:prstGeom prst="roundRect">
+            <a:avLst>
+              <a:gd name="adj" fmla="val 6061"/>
+            </a:avLst>
+          </a:prstGeom>
+          <a:solidFill>
+            <a:srgbClr val="FFFFFF"/>
+          </a:solidFill>
+          <a:ln w="15240">
+            <a:solidFill>
+              <a:srgbClr val="DCEAF5"/>
+            </a:solidFill>
+            <a:prstDash val="solid"/>
+          </a:ln>
+        </p:spPr>
+      </p:sp>
+      <p:sp>
+        <p:nvSpPr>
+          <p:cNvPr id="11" name="Text 8"/>
+          <p:cNvSpPr/>
+          <p:nvPr/>
+        </p:nvSpPr>
+        <p:spPr>
+          <a:xfrm>
+            <a:off x="896112" y="1965960"/>
+            <a:ext cx="1417320" cy="329184"/>
+          </a:xfrm>
+          <a:prstGeom prst="rect">
+            <a:avLst/>
+          </a:prstGeom>
+          <a:noFill/>
+          <a:ln/>
+        </p:spPr>
+        <p:txBody>
+          <a:bodyPr wrap="square" lIns="0" tIns="0" rIns="0" bIns="0" rtlCol="0" anchor="ctr">
+            <a:normAutofit/>
+          </a:bodyPr>
+          <a:lstStyle/>
+          <a:p>
+            <a:pPr indent="0" marL="0">
+              <a:lnSpc>
+                <a:spcPct val="100000"/>
+              </a:lnSpc>
+              <a:buNone/>
+            </a:pPr>
+            <a:r>
+              <a:rPr lang="en-US" sz="2000" b="1" dirty="0">
+                <a:solidFill>
+                  <a:srgbClr val="24839B"/>
+                </a:solidFill>
+                <a:latin typeface="Source Han Sans SC" pitchFamily="34" charset="0"/>
+                <a:ea typeface="Source Han Sans SC" pitchFamily="34" charset="-122"/>
+                <a:cs typeface="Source Han Sans SC" pitchFamily="34" charset="-120"/>
+              </a:rPr>
+              <a:t>模型</a:t>
+            </a:r>
+            <a:endParaRPr lang="en-US" sz="2000" dirty="0"/>
+          </a:p>
+        </p:txBody>
+      </p:sp>
+      <p:sp>
+        <p:nvSpPr>
+          <p:cNvPr id="12" name="Text 9"/>
+          <p:cNvSpPr/>
+          <p:nvPr/>
+        </p:nvSpPr>
+        <p:spPr>
+          <a:xfrm>
+            <a:off x="2267712" y="1956816"/>
+            <a:ext cx="3273552" cy="1325880"/>
+          </a:xfrm>
+          <a:prstGeom prst="rect">
+            <a:avLst/>
+          </a:prstGeom>
+          <a:noFill/>
+          <a:ln/>
+        </p:spPr>
+        <p:txBody>
+          <a:bodyPr wrap="square" lIns="0" tIns="0" rIns="0" bIns="0" rtlCol="0" anchor="ctr">
+            <a:normAutofit/>
+          </a:bodyPr>
+          <a:lstStyle/>
+          <a:p>
+            <a:pPr indent="0" marL="0">
+              <a:lnSpc>
+                <a:spcPct val="100000"/>
+              </a:lnSpc>
+              <a:buNone/>
+            </a:pPr>
+            <a:r>
+              <a:rPr lang="en-US" sz="1600" b="1" dirty="0">
+                <a:solidFill>
+                  <a:srgbClr val="102A3A"/>
+                </a:solidFill>
+                <a:latin typeface="Source Han Sans SC" pitchFamily="34" charset="0"/>
+                <a:ea typeface="Source Han Sans SC" pitchFamily="34" charset="-122"/>
+                <a:cs typeface="Source Han Sans SC" pitchFamily="34" charset="-120"/>
+              </a:rPr>
+              <a:t>污水软测量：随机森林</a:t>
+            </a:r>
+            <a:endParaRPr lang="en-US" sz="1600" dirty="0"/>
+          </a:p>
+          <a:p>
+            <a:pPr indent="0" marL="0">
+              <a:lnSpc>
+                <a:spcPct val="100000"/>
+              </a:lnSpc>
+              <a:buNone/>
+            </a:pPr>
+            <a:r>
+              <a:rPr lang="en-US" sz="1600" b="1" dirty="0">
+                <a:solidFill>
+                  <a:srgbClr val="102A3A"/>
+                </a:solidFill>
+                <a:latin typeface="Source Han Sans SC" pitchFamily="34" charset="0"/>
+                <a:ea typeface="Source Han Sans SC" pitchFamily="34" charset="-122"/>
+                <a:cs typeface="Source Han Sans SC" pitchFamily="34" charset="-120"/>
+              </a:rPr>
+              <a:t>TEP：PCA / 梯度提升诊断</a:t>
+            </a:r>
+            <a:endParaRPr lang="en-US" sz="1600" dirty="0"/>
+          </a:p>
+          <a:p>
+            <a:pPr indent="0" marL="0">
+              <a:lnSpc>
+                <a:spcPct val="100000"/>
+              </a:lnSpc>
+              <a:buNone/>
+            </a:pPr>
+            <a:r>
+              <a:rPr lang="en-US" sz="1600" b="1" dirty="0">
+                <a:solidFill>
+                  <a:srgbClr val="102A3A"/>
+                </a:solidFill>
+                <a:latin typeface="Source Han Sans SC" pitchFamily="34" charset="0"/>
+                <a:ea typeface="Source Han Sans SC" pitchFamily="34" charset="-122"/>
+                <a:cs typeface="Source Han Sans SC" pitchFamily="34" charset="-120"/>
+              </a:rPr>
+              <a:t>解释：deepseek-v4-flash</a:t>
+            </a:r>
+            <a:endParaRPr lang="en-US" sz="1600" dirty="0"/>
+          </a:p>
+        </p:txBody>
+      </p:sp>
+      <p:sp>
+        <p:nvSpPr>
+          <p:cNvPr id="13" name="Shape 10"/>
+          <p:cNvSpPr/>
+          <p:nvPr/>
+        </p:nvSpPr>
+        <p:spPr>
+          <a:xfrm>
+            <a:off x="6309360" y="1755648"/>
+            <a:ext cx="5230368" cy="1810512"/>
+          </a:xfrm>
+          <a:prstGeom prst="roundRect">
+            <a:avLst>
+              <a:gd name="adj" fmla="val 6061"/>
+            </a:avLst>
+          </a:prstGeom>
+          <a:solidFill>
+            <a:srgbClr val="FFFFFF"/>
+          </a:solidFill>
+          <a:ln w="15240">
+            <a:solidFill>
+              <a:srgbClr val="DCEAF5"/>
+            </a:solidFill>
+            <a:prstDash val="solid"/>
+          </a:ln>
+        </p:spPr>
+      </p:sp>
+      <p:sp>
+        <p:nvSpPr>
+          <p:cNvPr id="14" name="Text 11"/>
+          <p:cNvSpPr/>
+          <p:nvPr/>
+        </p:nvSpPr>
+        <p:spPr>
+          <a:xfrm>
+            <a:off x="6565392" y="1965960"/>
+            <a:ext cx="1417320" cy="329184"/>
+          </a:xfrm>
+          <a:prstGeom prst="rect">
+            <a:avLst/>
+          </a:prstGeom>
+          <a:noFill/>
+          <a:ln/>
+        </p:spPr>
+        <p:txBody>
+          <a:bodyPr wrap="square" lIns="0" tIns="0" rIns="0" bIns="0" rtlCol="0" anchor="ctr">
+            <a:normAutofit/>
+          </a:bodyPr>
+          <a:lstStyle/>
+          <a:p>
+            <a:pPr indent="0" marL="0">
+              <a:lnSpc>
+                <a:spcPct val="100000"/>
+              </a:lnSpc>
+              <a:buNone/>
+            </a:pPr>
+            <a:r>
+              <a:rPr lang="en-US" sz="2000" b="1" dirty="0">
+                <a:solidFill>
+                  <a:srgbClr val="24839B"/>
+                </a:solidFill>
+                <a:latin typeface="Source Han Sans SC" pitchFamily="34" charset="0"/>
+                <a:ea typeface="Source Han Sans SC" pitchFamily="34" charset="-122"/>
+                <a:cs typeface="Source Han Sans SC" pitchFamily="34" charset="-120"/>
+              </a:rPr>
+              <a:t>工具</a:t>
+            </a:r>
+            <a:endParaRPr lang="en-US" sz="2000" dirty="0"/>
+          </a:p>
+        </p:txBody>
+      </p:sp>
+      <p:sp>
+        <p:nvSpPr>
+          <p:cNvPr id="15" name="Text 12"/>
+          <p:cNvSpPr/>
+          <p:nvPr/>
+        </p:nvSpPr>
+        <p:spPr>
+          <a:xfrm>
+            <a:off x="7936992" y="1956816"/>
+            <a:ext cx="3273552" cy="1325880"/>
+          </a:xfrm>
+          <a:prstGeom prst="rect">
+            <a:avLst/>
+          </a:prstGeom>
+          <a:noFill/>
+          <a:ln/>
+        </p:spPr>
+        <p:txBody>
+          <a:bodyPr wrap="square" lIns="0" tIns="0" rIns="0" bIns="0" rtlCol="0" anchor="ctr">
+            <a:normAutofit/>
+          </a:bodyPr>
+          <a:lstStyle/>
+          <a:p>
+            <a:pPr indent="0" marL="0">
+              <a:lnSpc>
+                <a:spcPct val="100000"/>
+              </a:lnSpc>
+              <a:buNone/>
+            </a:pPr>
+            <a:r>
+              <a:rPr lang="en-US" sz="1600" dirty="0">
+                <a:solidFill>
+                  <a:srgbClr val="102A3A"/>
+                </a:solidFill>
+                <a:latin typeface="Source Han Sans SC" pitchFamily="34" charset="0"/>
+                <a:ea typeface="Source Han Sans SC" pitchFamily="34" charset="-122"/>
+                <a:cs typeface="Source Han Sans SC" pitchFamily="34" charset="-120"/>
+              </a:rPr>
+              <a:t>Next.js · FastAPI · PostgreSQL</a:t>
+            </a:r>
+            <a:endParaRPr lang="en-US" sz="1600" dirty="0"/>
+          </a:p>
+          <a:p>
+            <a:pPr indent="0" marL="0">
+              <a:lnSpc>
+                <a:spcPct val="100000"/>
+              </a:lnSpc>
+              <a:buNone/>
+            </a:pPr>
+            <a:r>
+              <a:rPr lang="en-US" sz="1600" dirty="0">
+                <a:solidFill>
+                  <a:srgbClr val="102A3A"/>
+                </a:solidFill>
+                <a:latin typeface="Source Han Sans SC" pitchFamily="34" charset="0"/>
+                <a:ea typeface="Source Han Sans SC" pitchFamily="34" charset="-122"/>
+                <a:cs typeface="Source Han Sans SC" pitchFamily="34" charset="-120"/>
+              </a:rPr>
+              <a:t>Python · Playwright</a:t>
+            </a:r>
+            <a:endParaRPr lang="en-US" sz="1600" dirty="0"/>
+          </a:p>
+          <a:p>
+            <a:pPr indent="0" marL="0">
+              <a:lnSpc>
+                <a:spcPct val="100000"/>
+              </a:lnSpc>
+              <a:buNone/>
+            </a:pPr>
+            <a:r>
+              <a:rPr lang="en-US" sz="1600" dirty="0">
+                <a:solidFill>
+                  <a:srgbClr val="102A3A"/>
+                </a:solidFill>
+                <a:latin typeface="Source Han Sans SC" pitchFamily="34" charset="0"/>
+                <a:ea typeface="Source Han Sans SC" pitchFamily="34" charset="-122"/>
+                <a:cs typeface="Source Han Sans SC" pitchFamily="34" charset="-120"/>
+              </a:rPr>
+              <a:t>PptxGenJS</a:t>
+            </a:r>
+            <a:endParaRPr lang="en-US" sz="1600" dirty="0"/>
+          </a:p>
+        </p:txBody>
+      </p:sp>
+      <p:sp>
+        <p:nvSpPr>
+          <p:cNvPr id="16" name="Shape 13"/>
+          <p:cNvSpPr/>
+          <p:nvPr/>
+        </p:nvSpPr>
+        <p:spPr>
+          <a:xfrm>
+            <a:off x="640080" y="3904488"/>
+            <a:ext cx="5230368" cy="1810512"/>
+          </a:xfrm>
+          <a:prstGeom prst="roundRect">
+            <a:avLst>
+              <a:gd name="adj" fmla="val 6061"/>
+            </a:avLst>
+          </a:prstGeom>
+          <a:solidFill>
+            <a:srgbClr val="FFFFFF"/>
+          </a:solidFill>
+          <a:ln w="15240">
+            <a:solidFill>
+              <a:srgbClr val="DCEAF5"/>
+            </a:solidFill>
+            <a:prstDash val="solid"/>
+          </a:ln>
+        </p:spPr>
+      </p:sp>
+      <p:sp>
+        <p:nvSpPr>
+          <p:cNvPr id="17" name="Text 14"/>
+          <p:cNvSpPr/>
+          <p:nvPr/>
+        </p:nvSpPr>
+        <p:spPr>
+          <a:xfrm>
+            <a:off x="896112" y="4114800"/>
+            <a:ext cx="1417320" cy="329184"/>
+          </a:xfrm>
+          <a:prstGeom prst="rect">
+            <a:avLst/>
+          </a:prstGeom>
+          <a:noFill/>
+          <a:ln/>
+        </p:spPr>
+        <p:txBody>
+          <a:bodyPr wrap="square" lIns="0" tIns="0" rIns="0" bIns="0" rtlCol="0" anchor="ctr">
+            <a:normAutofit/>
+          </a:bodyPr>
+          <a:lstStyle/>
+          <a:p>
+            <a:pPr indent="0" marL="0">
+              <a:lnSpc>
+                <a:spcPct val="100000"/>
+              </a:lnSpc>
+              <a:buNone/>
+            </a:pPr>
+            <a:r>
+              <a:rPr lang="en-US" sz="2000" b="1" dirty="0">
+                <a:solidFill>
+                  <a:srgbClr val="24839B"/>
+                </a:solidFill>
+                <a:latin typeface="Source Han Sans SC" pitchFamily="34" charset="0"/>
+                <a:ea typeface="Source Han Sans SC" pitchFamily="34" charset="-122"/>
+                <a:cs typeface="Source Han Sans SC" pitchFamily="34" charset="-120"/>
+              </a:rPr>
+              <a:t>数据</a:t>
+            </a:r>
+            <a:endParaRPr lang="en-US" sz="2000" dirty="0"/>
+          </a:p>
+        </p:txBody>
+      </p:sp>
+      <p:sp>
+        <p:nvSpPr>
+          <p:cNvPr id="18" name="Text 15"/>
+          <p:cNvSpPr/>
+          <p:nvPr/>
+        </p:nvSpPr>
+        <p:spPr>
+          <a:xfrm>
+            <a:off x="2267712" y="4105656"/>
+            <a:ext cx="3273552" cy="1325880"/>
+          </a:xfrm>
+          <a:prstGeom prst="rect">
+            <a:avLst/>
+          </a:prstGeom>
+          <a:noFill/>
+          <a:ln/>
+        </p:spPr>
+        <p:txBody>
+          <a:bodyPr wrap="square" lIns="0" tIns="0" rIns="0" bIns="0" rtlCol="0" anchor="ctr">
+            <a:normAutofit/>
+          </a:bodyPr>
+          <a:lstStyle/>
+          <a:p>
+            <a:pPr indent="0" marL="0">
+              <a:lnSpc>
+                <a:spcPct val="100000"/>
+              </a:lnSpc>
+              <a:buNone/>
+            </a:pPr>
+            <a:r>
+              <a:rPr lang="en-US" sz="1600" dirty="0">
+                <a:solidFill>
+                  <a:srgbClr val="102A3A"/>
+                </a:solidFill>
+                <a:latin typeface="Source Han Sans SC" pitchFamily="34" charset="0"/>
+                <a:ea typeface="Source Han Sans SC" pitchFamily="34" charset="-122"/>
+                <a:cs typeface="Source Han Sans SC" pitchFamily="34" charset="-120"/>
+              </a:rPr>
+              <a:t>UCI 城市污水：官网 527 条</a:t>
+            </a:r>
+            <a:endParaRPr lang="en-US" sz="1600" dirty="0"/>
+          </a:p>
+          <a:p>
+            <a:pPr indent="0" marL="0">
+              <a:lnSpc>
+                <a:spcPct val="100000"/>
+              </a:lnSpc>
+              <a:buNone/>
+            </a:pPr>
+            <a:r>
+              <a:rPr lang="en-US" sz="1600" dirty="0">
+                <a:solidFill>
+                  <a:srgbClr val="102A3A"/>
+                </a:solidFill>
+                <a:latin typeface="Source Han Sans SC" pitchFamily="34" charset="0"/>
+                <a:ea typeface="Source Han Sans SC" pitchFamily="34" charset="-122"/>
+                <a:cs typeface="Source Han Sans SC" pitchFamily="34" charset="-120"/>
+              </a:rPr>
+              <a:t>本地镜像 520 条</a:t>
+            </a:r>
+            <a:endParaRPr lang="en-US" sz="1600" dirty="0"/>
+          </a:p>
+          <a:p>
+            <a:pPr indent="0" marL="0">
+              <a:lnSpc>
+                <a:spcPct val="100000"/>
+              </a:lnSpc>
+              <a:buNone/>
+            </a:pPr>
+            <a:r>
+              <a:rPr lang="en-US" sz="1600" dirty="0">
+                <a:solidFill>
+                  <a:srgbClr val="102A3A"/>
+                </a:solidFill>
+                <a:latin typeface="Source Han Sans SC" pitchFamily="34" charset="0"/>
+                <a:ea typeface="Source Han Sans SC" pitchFamily="34" charset="-122"/>
+                <a:cs typeface="Source Han Sans SC" pitchFamily="34" charset="-120"/>
+              </a:rPr>
+              <a:t>TEP 公开仿真数据</a:t>
+            </a:r>
+            <a:endParaRPr lang="en-US" sz="1600" dirty="0"/>
+          </a:p>
+        </p:txBody>
+      </p:sp>
+      <p:sp>
+        <p:nvSpPr>
+          <p:cNvPr id="19" name="Shape 16"/>
+          <p:cNvSpPr/>
+          <p:nvPr/>
+        </p:nvSpPr>
+        <p:spPr>
+          <a:xfrm>
+            <a:off x="6309360" y="3904488"/>
+            <a:ext cx="5230368" cy="1810512"/>
+          </a:xfrm>
+          <a:prstGeom prst="roundRect">
+            <a:avLst>
+              <a:gd name="adj" fmla="val 6061"/>
+            </a:avLst>
+          </a:prstGeom>
+          <a:solidFill>
+            <a:srgbClr val="FFF5E4"/>
+          </a:solidFill>
+          <a:ln w="15240">
+            <a:solidFill>
+              <a:srgbClr val="F2A93B"/>
+            </a:solidFill>
+            <a:prstDash val="solid"/>
+          </a:ln>
+        </p:spPr>
+      </p:sp>
+      <p:sp>
+        <p:nvSpPr>
+          <p:cNvPr id="20" name="Text 17"/>
+          <p:cNvSpPr/>
+          <p:nvPr/>
+        </p:nvSpPr>
+        <p:spPr>
+          <a:xfrm>
+            <a:off x="6565392" y="4114800"/>
+            <a:ext cx="1417320" cy="329184"/>
+          </a:xfrm>
+          <a:prstGeom prst="rect">
+            <a:avLst/>
+          </a:prstGeom>
+          <a:noFill/>
+          <a:ln/>
+        </p:spPr>
+        <p:txBody>
+          <a:bodyPr wrap="square" lIns="0" tIns="0" rIns="0" bIns="0" rtlCol="0" anchor="ctr">
+            <a:normAutofit/>
+          </a:bodyPr>
+          <a:lstStyle/>
+          <a:p>
+            <a:pPr indent="0" marL="0">
+              <a:lnSpc>
+                <a:spcPct val="100000"/>
+              </a:lnSpc>
+              <a:buNone/>
+            </a:pPr>
+            <a:r>
+              <a:rPr lang="en-US" sz="2000" b="1" dirty="0">
+                <a:solidFill>
+                  <a:srgbClr val="F2A93B"/>
+                </a:solidFill>
+                <a:latin typeface="Source Han Sans SC" pitchFamily="34" charset="0"/>
+                <a:ea typeface="Source Han Sans SC" pitchFamily="34" charset="-122"/>
+                <a:cs typeface="Source Han Sans SC" pitchFamily="34" charset="-120"/>
+              </a:rPr>
+              <a:t>素材授权</a:t>
+            </a:r>
+            <a:endParaRPr lang="en-US" sz="2000" dirty="0"/>
+          </a:p>
+        </p:txBody>
+      </p:sp>
+      <p:sp>
+        <p:nvSpPr>
+          <p:cNvPr id="21" name="Text 18"/>
+          <p:cNvSpPr/>
+          <p:nvPr/>
+        </p:nvSpPr>
+        <p:spPr>
+          <a:xfrm>
+            <a:off x="7936992" y="4105656"/>
+            <a:ext cx="3273552" cy="1325880"/>
+          </a:xfrm>
+          <a:prstGeom prst="rect">
+            <a:avLst/>
+          </a:prstGeom>
+          <a:noFill/>
+          <a:ln/>
+        </p:spPr>
+        <p:txBody>
+          <a:bodyPr wrap="square" lIns="0" tIns="0" rIns="0" bIns="0" rtlCol="0" anchor="ctr">
+            <a:normAutofit/>
+          </a:bodyPr>
+          <a:lstStyle/>
+          <a:p>
+            <a:pPr indent="0" marL="0">
+              <a:lnSpc>
+                <a:spcPct val="100000"/>
+              </a:lnSpc>
+              <a:buNone/>
+            </a:pPr>
+            <a:r>
+              <a:rPr lang="en-US" sz="1600" dirty="0">
+                <a:solidFill>
+                  <a:srgbClr val="102A3A"/>
+                </a:solidFill>
+                <a:latin typeface="Source Han Sans SC" pitchFamily="34" charset="0"/>
+                <a:ea typeface="Source Han Sans SC" pitchFamily="34" charset="-122"/>
+                <a:cs typeface="Source Han Sans SC" pitchFamily="34" charset="-120"/>
+              </a:rPr>
+              <a:t>Logo：序安自有资产</a:t>
+            </a:r>
+            <a:endParaRPr lang="en-US" sz="1600" dirty="0"/>
+          </a:p>
+          <a:p>
+            <a:pPr indent="0" marL="0">
+              <a:lnSpc>
+                <a:spcPct val="100000"/>
+              </a:lnSpc>
+              <a:buNone/>
+            </a:pPr>
+            <a:r>
+              <a:rPr lang="en-US" sz="1600" dirty="0">
+                <a:solidFill>
+                  <a:srgbClr val="102A3A"/>
+                </a:solidFill>
+                <a:latin typeface="Source Han Sans SC" pitchFamily="34" charset="0"/>
+                <a:ea typeface="Source Han Sans SC" pitchFamily="34" charset="-122"/>
+                <a:cs typeface="Source Han Sans SC" pitchFamily="34" charset="-120"/>
+              </a:rPr>
+              <a:t>截图：自有公网 Demo 实拍</a:t>
+            </a:r>
+            <a:endParaRPr lang="en-US" sz="1600" dirty="0"/>
+          </a:p>
+          <a:p>
+            <a:pPr indent="0" marL="0">
+              <a:lnSpc>
+                <a:spcPct val="100000"/>
+              </a:lnSpc>
+              <a:buNone/>
+            </a:pPr>
+            <a:r>
+              <a:rPr lang="en-US" sz="1600" dirty="0">
+                <a:solidFill>
+                  <a:srgbClr val="102A3A"/>
+                </a:solidFill>
+                <a:latin typeface="Source Han Sans SC" pitchFamily="34" charset="0"/>
+                <a:ea typeface="Source Han Sans SC" pitchFamily="34" charset="-122"/>
+                <a:cs typeface="Source Han Sans SC" pitchFamily="34" charset="-120"/>
+              </a:rPr>
+              <a:t>主视觉：AI 生成，无企业标识</a:t>
+            </a:r>
+            <a:endParaRPr lang="en-US" sz="1600" dirty="0"/>
+          </a:p>
+          <a:p>
+            <a:pPr indent="0" marL="0">
+              <a:lnSpc>
+                <a:spcPct val="100000"/>
+              </a:lnSpc>
+              <a:buNone/>
+            </a:pPr>
+            <a:r>
+              <a:rPr lang="en-US" sz="1600" dirty="0">
+                <a:solidFill>
+                  <a:srgbClr val="102A3A"/>
+                </a:solidFill>
+                <a:latin typeface="Source Han Sans SC" pitchFamily="34" charset="0"/>
+                <a:ea typeface="Source Han Sans SC" pitchFamily="34" charset="-122"/>
+                <a:cs typeface="Source Han Sans SC" pitchFamily="34" charset="-120"/>
+              </a:rPr>
+              <a:t>Source Han Sans SC：SIL OFL</a:t>
+            </a:r>
+            <a:endParaRPr lang="en-US" sz="1600" dirty="0"/>
+          </a:p>
+        </p:txBody>
+      </p:sp>
+      <p:sp>
+        <p:nvSpPr>
+          <p:cNvPr id="22" name="Text 19"/>
+          <p:cNvSpPr/>
+          <p:nvPr/>
+        </p:nvSpPr>
+        <p:spPr>
+          <a:xfrm>
+            <a:off x="1234440" y="6144768"/>
+            <a:ext cx="9738360" cy="274320"/>
+          </a:xfrm>
+          <a:prstGeom prst="rect">
+            <a:avLst/>
+          </a:prstGeom>
+          <a:noFill/>
+          <a:ln/>
+        </p:spPr>
+        <p:txBody>
+          <a:bodyPr wrap="square" lIns="0" tIns="0" rIns="0" bIns="0" rtlCol="0" anchor="ctr">
+            <a:normAutofit/>
+          </a:bodyPr>
+          <a:lstStyle/>
+          <a:p>
+            <a:pPr algn="ctr" indent="0" marL="0">
+              <a:lnSpc>
+                <a:spcPct val="100000"/>
+              </a:lnSpc>
+              <a:buNone/>
+            </a:pPr>
+            <a:r>
+              <a:rPr lang="en-US" sz="1600" b="1" dirty="0">
+                <a:solidFill>
+                  <a:srgbClr val="DE5B6D"/>
+                </a:solidFill>
+                <a:latin typeface="Source Han Sans SC" pitchFamily="34" charset="0"/>
+                <a:ea typeface="Source Han Sans SC" pitchFamily="34" charset="-122"/>
+                <a:cs typeface="Source Han Sans SC" pitchFamily="34" charset="-120"/>
+              </a:rPr>
+              <a:t>公开数据 ≠ 贵州真实生产数据  ·  官方案例引用 ≠ 合作关系</a:t>
+            </a:r>
+            <a:endParaRPr lang="en-US" sz="1600" dirty="0"/>
+          </a:p>
+        </p:txBody>
+      </p:sp>
+    </p:spTree>
+  </p:cSld>
+  <p:clrMapOvr>
+    <a:masterClrMapping/>
+  </p:clrMapOvr>
+</p:sld>
+</file>
+
+<file path=ppt/slides/slide11.xml><?xml version="1.0" encoding="utf-8"?>
+<p:sld xmlns:a="http://schemas.openxmlformats.org/drawingml/2006/main" xmlns:r="http://schemas.openxmlformats.org/officeDocument/2006/relationships" xmlns:p="http://schemas.openxmlformats.org/presentationml/2006/main">
+  <p:cSld name="Slide 11">
+    <p:bg>
+      <p:bgPr>
+        <a:solidFill>
+          <a:srgbClr val="F7FBFE"/>
+        </a:solidFill>
+      </p:bgPr>
+    </p:bg>
+    <p:spTree>
+      <p:nvGrpSpPr>
+        <p:cNvPr id="1" name=""/>
+        <p:cNvGrpSpPr/>
+        <p:nvPr/>
+      </p:nvGrpSpPr>
+      <p:grpSpPr>
+        <a:xfrm>
+          <a:off x="0" y="0"/>
+          <a:ext cx="0" cy="0"/>
+          <a:chOff x="0" y="0"/>
+          <a:chExt cx="0" cy="0"/>
+        </a:xfrm>
+      </p:grpSpPr>
+      <p:sp>
+        <p:nvSpPr>
+          <p:cNvPr id="2" name="Shape 0"/>
+          <p:cNvSpPr/>
+          <p:nvPr/>
+        </p:nvSpPr>
+        <p:spPr>
+          <a:xfrm>
+            <a:off x="658368" y="6473952"/>
+            <a:ext cx="10881360" cy="0"/>
+          </a:xfrm>
+          <a:prstGeom prst="line">
+            <a:avLst/>
+          </a:prstGeom>
+          <a:noFill/>
+          <a:ln w="12700">
+            <a:solidFill>
+              <a:srgbClr val="DCEAF5"/>
+            </a:solidFill>
+            <a:prstDash val="solid"/>
+          </a:ln>
+        </p:spPr>
+      </p:sp>
+      <p:sp>
+        <p:nvSpPr>
+          <p:cNvPr id="3" name="Text 1"/>
+          <p:cNvSpPr/>
+          <p:nvPr/>
+        </p:nvSpPr>
+        <p:spPr>
+          <a:xfrm>
+            <a:off x="658368" y="6547104"/>
+            <a:ext cx="5120640" cy="164592"/>
+          </a:xfrm>
+          <a:prstGeom prst="rect">
+            <a:avLst/>
+          </a:prstGeom>
+          <a:noFill/>
+          <a:ln/>
+        </p:spPr>
+        <p:txBody>
+          <a:bodyPr wrap="square" lIns="0" tIns="0" rIns="0" bIns="0" rtlCol="0" anchor="ctr">
+            <a:normAutofit/>
+          </a:bodyPr>
+          <a:lstStyle/>
+          <a:p>
+            <a:pPr indent="0" marL="0">
+              <a:lnSpc>
+                <a:spcPct val="100000"/>
+              </a:lnSpc>
+              <a:buNone/>
+            </a:pPr>
+            <a:r>
+              <a:rPr lang="en-US" sz="900" dirty="0">
+                <a:solidFill>
+                  <a:srgbClr val="627987"/>
+                </a:solidFill>
+                <a:latin typeface="Source Han Sans SC" pitchFamily="34" charset="0"/>
+                <a:ea typeface="Source Han Sans SC" pitchFamily="34" charset="-122"/>
+                <a:cs typeface="Source Han Sans SC" pitchFamily="34" charset="-120"/>
+              </a:rPr>
+              <a:t>序安·磷煤化工异常早期预警平台</a:t>
+            </a:r>
+            <a:endParaRPr lang="en-US" sz="900" dirty="0"/>
+          </a:p>
+        </p:txBody>
+      </p:sp>
+      <p:sp>
+        <p:nvSpPr>
+          <p:cNvPr id="4" name="Text 2"/>
+          <p:cNvSpPr/>
+          <p:nvPr/>
+        </p:nvSpPr>
+        <p:spPr>
+          <a:xfrm>
+            <a:off x="11109960" y="6547104"/>
+            <a:ext cx="411480" cy="164592"/>
+          </a:xfrm>
+          <a:prstGeom prst="rect">
+            <a:avLst/>
+          </a:prstGeom>
+          <a:noFill/>
+          <a:ln/>
+        </p:spPr>
+        <p:txBody>
+          <a:bodyPr wrap="square" lIns="0" tIns="0" rIns="0" bIns="0" rtlCol="0" anchor="ctr">
+            <a:normAutofit/>
+          </a:bodyPr>
+          <a:lstStyle/>
+          <a:p>
+            <a:pPr algn="r" indent="0" marL="0">
+              <a:lnSpc>
+                <a:spcPct val="100000"/>
+              </a:lnSpc>
+              <a:buNone/>
+            </a:pPr>
+            <a:r>
+              <a:rPr lang="en-US" sz="900" b="1" dirty="0">
+                <a:solidFill>
+                  <a:srgbClr val="627987"/>
+                </a:solidFill>
+                <a:latin typeface="Source Han Sans SC" pitchFamily="34" charset="0"/>
+                <a:ea typeface="Source Han Sans SC" pitchFamily="34" charset="-122"/>
+                <a:cs typeface="Source Han Sans SC" pitchFamily="34" charset="-120"/>
+              </a:rPr>
+              <a:t>11</a:t>
+            </a:r>
+            <a:endParaRPr lang="en-US" sz="900" dirty="0"/>
+          </a:p>
+        </p:txBody>
+      </p:sp>
+      <p:sp>
+        <p:nvSpPr>
+          <p:cNvPr id="5" name="Text 3"/>
+          <p:cNvSpPr/>
+          <p:nvPr/>
+        </p:nvSpPr>
+        <p:spPr>
+          <a:xfrm>
+            <a:off x="658368" y="310896"/>
+            <a:ext cx="5029200" cy="274320"/>
+          </a:xfrm>
+          <a:prstGeom prst="rect">
+            <a:avLst/>
+          </a:prstGeom>
+          <a:noFill/>
+          <a:ln/>
+        </p:spPr>
+        <p:txBody>
+          <a:bodyPr wrap="square" lIns="0" tIns="0" rIns="0" bIns="0" rtlCol="0" anchor="ctr">
+            <a:normAutofit/>
+          </a:bodyPr>
+          <a:lstStyle/>
+          <a:p>
+            <a:pPr indent="0" marL="0">
+              <a:lnSpc>
+                <a:spcPct val="100000"/>
+              </a:lnSpc>
+              <a:buNone/>
+            </a:pPr>
+            <a:r>
+              <a:rPr lang="en-US" sz="1200" b="1" spc="160" kern="0" dirty="0">
+                <a:solidFill>
+                  <a:srgbClr val="24839B"/>
+                </a:solidFill>
+                <a:latin typeface="Source Han Sans SC" pitchFamily="34" charset="0"/>
+                <a:ea typeface="Source Han Sans SC" pitchFamily="34" charset="-122"/>
+                <a:cs typeface="Source Han Sans SC" pitchFamily="34" charset="-120"/>
+              </a:rPr>
+              <a:t>09 / 落地方式</a:t>
+            </a:r>
+            <a:endParaRPr lang="en-US" sz="1200" dirty="0"/>
+          </a:p>
+        </p:txBody>
+      </p:sp>
+      <p:sp>
+        <p:nvSpPr>
+          <p:cNvPr id="6" name="Text 4"/>
+          <p:cNvSpPr/>
+          <p:nvPr/>
+        </p:nvSpPr>
+        <p:spPr>
+          <a:xfrm>
+            <a:off x="658368" y="685800"/>
+            <a:ext cx="10698480" cy="566928"/>
+          </a:xfrm>
+          <a:prstGeom prst="rect">
+            <a:avLst/>
+          </a:prstGeom>
+          <a:noFill/>
+          <a:ln/>
+        </p:spPr>
+        <p:txBody>
+          <a:bodyPr wrap="square" lIns="0" tIns="0" rIns="0" bIns="0" rtlCol="0" anchor="ctr">
+            <a:normAutofit/>
+          </a:bodyPr>
+          <a:lstStyle/>
+          <a:p>
+            <a:pPr indent="0" marL="0">
+              <a:lnSpc>
+                <a:spcPct val="100000"/>
+              </a:lnSpc>
+              <a:buNone/>
+            </a:pPr>
+            <a:r>
+              <a:rPr lang="en-US" sz="3000" b="1" dirty="0">
+                <a:solidFill>
+                  <a:srgbClr val="102A3A"/>
+                </a:solidFill>
+                <a:latin typeface="Source Han Sans SC" pitchFamily="34" charset="0"/>
+                <a:ea typeface="Source Han Sans SC" pitchFamily="34" charset="-122"/>
+                <a:cs typeface="Source Han Sans SC" pitchFamily="34" charset="-120"/>
+              </a:rPr>
+              <a:t>先用一个装置，证明一个预警闭环</a:t>
+            </a:r>
+            <a:endParaRPr lang="en-US" sz="3000" dirty="0"/>
+          </a:p>
+        </p:txBody>
+      </p:sp>
+      <p:sp>
+        <p:nvSpPr>
+          <p:cNvPr id="7" name="Text 5"/>
+          <p:cNvSpPr/>
+          <p:nvPr/>
+        </p:nvSpPr>
+        <p:spPr>
+          <a:xfrm>
+            <a:off x="676656" y="1298448"/>
+            <a:ext cx="10515600" cy="329184"/>
+          </a:xfrm>
+          <a:prstGeom prst="rect">
+            <a:avLst/>
+          </a:prstGeom>
+          <a:noFill/>
+          <a:ln/>
+        </p:spPr>
+        <p:txBody>
+          <a:bodyPr wrap="square" lIns="0" tIns="0" rIns="0" bIns="0" rtlCol="0" anchor="ctr">
+            <a:normAutofit/>
+          </a:bodyPr>
+          <a:lstStyle/>
+          <a:p>
+            <a:pPr indent="0" marL="0">
+              <a:lnSpc>
+                <a:spcPct val="100000"/>
+              </a:lnSpc>
+              <a:buNone/>
+            </a:pPr>
+            <a:r>
+              <a:rPr lang="en-US" sz="1600" dirty="0">
+                <a:solidFill>
+                  <a:srgbClr val="627987"/>
+                </a:solidFill>
+                <a:latin typeface="Source Han Sans SC" pitchFamily="34" charset="0"/>
+                <a:ea typeface="Source Han Sans SC" pitchFamily="34" charset="-122"/>
+                <a:cs typeface="Source Han Sans SC" pitchFamily="34" charset="-120"/>
+              </a:rPr>
+              <a:t>4–8 周只读 PoC；周期以现场数据条件为准</a:t>
+            </a:r>
+            <a:endParaRPr lang="en-US" sz="1600" dirty="0"/>
+          </a:p>
+        </p:txBody>
+      </p:sp>
+      <p:pic>
+        <p:nvPicPr>
+          <p:cNvPr id="8" name="Image 0" descr="/Users/rocalight/Desktop/All in one Data/01_PROJECTS/FDE任务/03_产品与解决方案/03_连续化工过程偏移副驾驶/apps/web/public/brand/xuanan-anomaly-intercept-v04.svg">    </p:cNvPr>
+          <p:cNvPicPr>
+            <a:picLocks noChangeAspect="1"/>
+          </p:cNvPicPr>
+          <p:nvPr/>
+        </p:nvPicPr>
+        <p:blipFill>
+          <a:blip r:embed="rId1">
+            <a:extLst>
+              <a:ext uri="{96DAC541-7B7A-43D3-8B79-37D633B846F1}">
+                <asvg:svgBlip xmlns:asvg="http://schemas.microsoft.com/office/drawing/2016/SVG/main" r:embed="rId2"/>
+              </a:ext>
+            </a:extLst>
+          </a:blip>
+          <a:stretch>
+            <a:fillRect/>
+          </a:stretch>
+        </p:blipFill>
+        <p:spPr>
+          <a:xfrm>
+            <a:off x="10661904" y="201168"/>
+            <a:ext cx="566928" cy="566928"/>
+          </a:xfrm>
+          <a:prstGeom prst="rect">
+            <a:avLst/>
+          </a:prstGeom>
+        </p:spPr>
+      </p:pic>
+      <p:sp>
+        <p:nvSpPr>
+          <p:cNvPr id="9" name="Text 6"/>
+          <p:cNvSpPr/>
+          <p:nvPr/>
+        </p:nvSpPr>
+        <p:spPr>
+          <a:xfrm>
+            <a:off x="11192256" y="320040"/>
+            <a:ext cx="658368" cy="274320"/>
+          </a:xfrm>
+          <a:prstGeom prst="rect">
+            <a:avLst/>
+          </a:prstGeom>
+          <a:noFill/>
+          <a:ln/>
+        </p:spPr>
+        <p:txBody>
+          <a:bodyPr wrap="square" lIns="0" tIns="0" rIns="0" bIns="0" rtlCol="0" anchor="ctr">
+            <a:normAutofit/>
+          </a:bodyPr>
+          <a:lstStyle/>
+          <a:p>
+            <a:pPr indent="0" marL="0">
+              <a:lnSpc>
+                <a:spcPct val="100000"/>
+              </a:lnSpc>
+              <a:buNone/>
+            </a:pPr>
+            <a:r>
+              <a:rPr lang="en-US" sz="1400" b="1" dirty="0">
+                <a:solidFill>
+                  <a:srgbClr val="102A3A"/>
+                </a:solidFill>
+                <a:latin typeface="Source Han Sans SC" pitchFamily="34" charset="0"/>
+                <a:ea typeface="Source Han Sans SC" pitchFamily="34" charset="-122"/>
+                <a:cs typeface="Source Han Sans SC" pitchFamily="34" charset="-120"/>
+              </a:rPr>
+              <a:t>序安</a:t>
+            </a:r>
+            <a:endParaRPr lang="en-US" sz="1400" dirty="0"/>
+          </a:p>
+        </p:txBody>
+      </p:sp>
+      <p:sp>
+        <p:nvSpPr>
+          <p:cNvPr id="10" name="Text 7"/>
+          <p:cNvSpPr/>
+          <p:nvPr/>
+        </p:nvSpPr>
+        <p:spPr>
+          <a:xfrm>
+            <a:off x="576072" y="1810512"/>
+            <a:ext cx="2286000" cy="256032"/>
+          </a:xfrm>
+          <a:prstGeom prst="rect">
+            <a:avLst/>
+          </a:prstGeom>
+          <a:noFill/>
+          <a:ln/>
+        </p:spPr>
+        <p:txBody>
+          <a:bodyPr wrap="square" lIns="0" tIns="0" rIns="0" bIns="0" rtlCol="0" anchor="ctr">
+            <a:normAutofit/>
+          </a:bodyPr>
+          <a:lstStyle/>
+          <a:p>
+            <a:pPr indent="0" marL="0">
+              <a:lnSpc>
+                <a:spcPct val="100000"/>
+              </a:lnSpc>
+              <a:buNone/>
+            </a:pPr>
+            <a:r>
+              <a:rPr lang="en-US" sz="1200" b="1" dirty="0">
+                <a:solidFill>
+                  <a:srgbClr val="13C2C2"/>
+                </a:solidFill>
+                <a:latin typeface="Source Han Sans SC" pitchFamily="34" charset="0"/>
+                <a:ea typeface="Source Han Sans SC" pitchFamily="34" charset="-122"/>
+                <a:cs typeface="Source Han Sans SC" pitchFamily="34" charset="-120"/>
+              </a:rPr>
+              <a:t>第 1–2 周</a:t>
+            </a:r>
+            <a:endParaRPr lang="en-US" sz="1200" dirty="0"/>
+          </a:p>
+        </p:txBody>
+      </p:sp>
+      <p:sp>
+        <p:nvSpPr>
+          <p:cNvPr id="11" name="Shape 8"/>
+          <p:cNvSpPr/>
+          <p:nvPr/>
+        </p:nvSpPr>
+        <p:spPr>
+          <a:xfrm>
+            <a:off x="576072" y="2194560"/>
+            <a:ext cx="2304288" cy="0"/>
+          </a:xfrm>
+          <a:prstGeom prst="line">
+            <a:avLst/>
+          </a:prstGeom>
+          <a:noFill/>
+          <a:ln w="63500">
+            <a:solidFill>
+              <a:srgbClr val="13C2C2"/>
+            </a:solidFill>
+            <a:prstDash val="solid"/>
+          </a:ln>
+        </p:spPr>
+      </p:sp>
+      <p:sp>
+        <p:nvSpPr>
+          <p:cNvPr id="12" name="Text 9"/>
+          <p:cNvSpPr/>
+          <p:nvPr/>
+        </p:nvSpPr>
+        <p:spPr>
+          <a:xfrm>
+            <a:off x="576072" y="2487168"/>
+            <a:ext cx="2304288" cy="402336"/>
+          </a:xfrm>
+          <a:prstGeom prst="rect">
+            <a:avLst/>
+          </a:prstGeom>
+          <a:noFill/>
+          <a:ln/>
+        </p:spPr>
+        <p:txBody>
+          <a:bodyPr wrap="square" lIns="0" tIns="0" rIns="0" bIns="0" rtlCol="0" anchor="ctr">
+            <a:normAutofit/>
+          </a:bodyPr>
+          <a:lstStyle/>
+          <a:p>
+            <a:pPr indent="0" marL="0">
+              <a:lnSpc>
+                <a:spcPct val="100000"/>
+              </a:lnSpc>
+              <a:buNone/>
+            </a:pPr>
+            <a:r>
+              <a:rPr lang="en-US" sz="2300" b="1" dirty="0">
+                <a:solidFill>
+                  <a:srgbClr val="102A3A"/>
+                </a:solidFill>
+                <a:latin typeface="Source Han Sans SC" pitchFamily="34" charset="0"/>
+                <a:ea typeface="Source Han Sans SC" pitchFamily="34" charset="-122"/>
+                <a:cs typeface="Source Han Sans SC" pitchFamily="34" charset="-120"/>
+              </a:rPr>
+              <a:t>定义问题</a:t>
+            </a:r>
+            <a:endParaRPr lang="en-US" sz="2300" dirty="0"/>
+          </a:p>
+        </p:txBody>
+      </p:sp>
+      <p:sp>
+        <p:nvSpPr>
+          <p:cNvPr id="13" name="Text 10"/>
+          <p:cNvSpPr/>
+          <p:nvPr/>
+        </p:nvSpPr>
+        <p:spPr>
+          <a:xfrm>
+            <a:off x="576072" y="3145536"/>
+            <a:ext cx="2304288" cy="914400"/>
+          </a:xfrm>
+          <a:prstGeom prst="rect">
+            <a:avLst/>
+          </a:prstGeom>
+          <a:noFill/>
+          <a:ln/>
+        </p:spPr>
+        <p:txBody>
+          <a:bodyPr wrap="square" lIns="0" tIns="0" rIns="0" bIns="0" rtlCol="0" anchor="ctr">
+            <a:normAutofit/>
+          </a:bodyPr>
+          <a:lstStyle/>
+          <a:p>
+            <a:pPr indent="0" marL="0">
+              <a:lnSpc>
+                <a:spcPct val="100000"/>
+              </a:lnSpc>
+              <a:buNone/>
+            </a:pPr>
+            <a:r>
+              <a:rPr lang="en-US" sz="1600" dirty="0">
+                <a:solidFill>
+                  <a:srgbClr val="627987"/>
+                </a:solidFill>
+                <a:latin typeface="Source Han Sans SC" pitchFamily="34" charset="0"/>
+                <a:ea typeface="Source Han Sans SC" pitchFamily="34" charset="-122"/>
+                <a:cs typeface="Source Han Sans SC" pitchFamily="34" charset="-120"/>
+              </a:rPr>
+              <a:t>选一个装置、一个风险目标</a:t>
+            </a:r>
+            <a:endParaRPr lang="en-US" sz="1600" dirty="0"/>
+          </a:p>
+          <a:p>
+            <a:pPr indent="0" marL="0">
+              <a:lnSpc>
+                <a:spcPct val="100000"/>
+              </a:lnSpc>
+              <a:buNone/>
+            </a:pPr>
+            <a:r>
+              <a:rPr lang="en-US" sz="1600" dirty="0">
+                <a:solidFill>
+                  <a:srgbClr val="627987"/>
+                </a:solidFill>
+                <a:latin typeface="Source Han Sans SC" pitchFamily="34" charset="0"/>
+                <a:ea typeface="Source Han Sans SC" pitchFamily="34" charset="-122"/>
+                <a:cs typeface="Source Han Sans SC" pitchFamily="34" charset="-120"/>
+              </a:rPr>
+              <a:t>确认变量与化验标签</a:t>
+            </a:r>
+            <a:endParaRPr lang="en-US" sz="1600" dirty="0"/>
+          </a:p>
+        </p:txBody>
+      </p:sp>
+      <p:sp>
+        <p:nvSpPr>
+          <p:cNvPr id="14" name="Text 11"/>
+          <p:cNvSpPr/>
+          <p:nvPr/>
+        </p:nvSpPr>
+        <p:spPr>
+          <a:xfrm>
+            <a:off x="3429000" y="1810512"/>
+            <a:ext cx="2286000" cy="256032"/>
+          </a:xfrm>
+          <a:prstGeom prst="rect">
+            <a:avLst/>
+          </a:prstGeom>
+          <a:noFill/>
+          <a:ln/>
+        </p:spPr>
+        <p:txBody>
+          <a:bodyPr wrap="square" lIns="0" tIns="0" rIns="0" bIns="0" rtlCol="0" anchor="ctr">
+            <a:normAutofit/>
+          </a:bodyPr>
+          <a:lstStyle/>
+          <a:p>
+            <a:pPr indent="0" marL="0">
+              <a:lnSpc>
+                <a:spcPct val="100000"/>
+              </a:lnSpc>
+              <a:buNone/>
+            </a:pPr>
+            <a:r>
+              <a:rPr lang="en-US" sz="1200" b="1" dirty="0">
+                <a:solidFill>
+                  <a:srgbClr val="13C2C2"/>
+                </a:solidFill>
+                <a:latin typeface="Source Han Sans SC" pitchFamily="34" charset="0"/>
+                <a:ea typeface="Source Han Sans SC" pitchFamily="34" charset="-122"/>
+                <a:cs typeface="Source Han Sans SC" pitchFamily="34" charset="-120"/>
+              </a:rPr>
+              <a:t>第 3–4 周</a:t>
+            </a:r>
+            <a:endParaRPr lang="en-US" sz="1200" dirty="0"/>
+          </a:p>
+        </p:txBody>
+      </p:sp>
+      <p:sp>
+        <p:nvSpPr>
+          <p:cNvPr id="15" name="Shape 12"/>
+          <p:cNvSpPr/>
+          <p:nvPr/>
+        </p:nvSpPr>
+        <p:spPr>
+          <a:xfrm>
+            <a:off x="3429000" y="2194560"/>
+            <a:ext cx="2304288" cy="0"/>
+          </a:xfrm>
+          <a:prstGeom prst="line">
+            <a:avLst/>
+          </a:prstGeom>
+          <a:noFill/>
+          <a:ln w="63500">
+            <a:solidFill>
+              <a:srgbClr val="13C2C2"/>
+            </a:solidFill>
+            <a:prstDash val="solid"/>
+          </a:ln>
+        </p:spPr>
+      </p:sp>
+      <p:sp>
+        <p:nvSpPr>
+          <p:cNvPr id="16" name="Text 13"/>
+          <p:cNvSpPr/>
+          <p:nvPr/>
+        </p:nvSpPr>
+        <p:spPr>
+          <a:xfrm>
+            <a:off x="3429000" y="2487168"/>
+            <a:ext cx="2304288" cy="402336"/>
+          </a:xfrm>
+          <a:prstGeom prst="rect">
+            <a:avLst/>
+          </a:prstGeom>
+          <a:noFill/>
+          <a:ln/>
+        </p:spPr>
+        <p:txBody>
+          <a:bodyPr wrap="square" lIns="0" tIns="0" rIns="0" bIns="0" rtlCol="0" anchor="ctr">
+            <a:normAutofit/>
+          </a:bodyPr>
+          <a:lstStyle/>
+          <a:p>
+            <a:pPr indent="0" marL="0">
+              <a:lnSpc>
+                <a:spcPct val="100000"/>
+              </a:lnSpc>
+              <a:buNone/>
+            </a:pPr>
+            <a:r>
+              <a:rPr lang="en-US" sz="2300" b="1" dirty="0">
+                <a:solidFill>
+                  <a:srgbClr val="102A3A"/>
+                </a:solidFill>
+                <a:latin typeface="Source Han Sans SC" pitchFamily="34" charset="0"/>
+                <a:ea typeface="Source Han Sans SC" pitchFamily="34" charset="-122"/>
+                <a:cs typeface="Source Han Sans SC" pitchFamily="34" charset="-120"/>
+              </a:rPr>
+              <a:t>离线验证</a:t>
+            </a:r>
+            <a:endParaRPr lang="en-US" sz="2300" dirty="0"/>
+          </a:p>
+        </p:txBody>
+      </p:sp>
+      <p:sp>
+        <p:nvSpPr>
+          <p:cNvPr id="17" name="Text 14"/>
+          <p:cNvSpPr/>
+          <p:nvPr/>
+        </p:nvSpPr>
+        <p:spPr>
+          <a:xfrm>
+            <a:off x="3429000" y="3145536"/>
+            <a:ext cx="2304288" cy="914400"/>
+          </a:xfrm>
+          <a:prstGeom prst="rect">
+            <a:avLst/>
+          </a:prstGeom>
+          <a:noFill/>
+          <a:ln/>
+        </p:spPr>
+        <p:txBody>
+          <a:bodyPr wrap="square" lIns="0" tIns="0" rIns="0" bIns="0" rtlCol="0" anchor="ctr">
+            <a:normAutofit/>
+          </a:bodyPr>
+          <a:lstStyle/>
+          <a:p>
+            <a:pPr indent="0" marL="0">
+              <a:lnSpc>
+                <a:spcPct val="100000"/>
+              </a:lnSpc>
+              <a:buNone/>
+            </a:pPr>
+            <a:r>
+              <a:rPr lang="en-US" sz="1600" dirty="0">
+                <a:solidFill>
+                  <a:srgbClr val="627987"/>
+                </a:solidFill>
+                <a:latin typeface="Source Han Sans SC" pitchFamily="34" charset="0"/>
+                <a:ea typeface="Source Han Sans SC" pitchFamily="34" charset="-122"/>
+                <a:cs typeface="Source Han Sans SC" pitchFamily="34" charset="-120"/>
+              </a:rPr>
+              <a:t>清洗历史数据</a:t>
+            </a:r>
+            <a:endParaRPr lang="en-US" sz="1600" dirty="0"/>
+          </a:p>
+          <a:p>
+            <a:pPr indent="0" marL="0">
+              <a:lnSpc>
+                <a:spcPct val="100000"/>
+              </a:lnSpc>
+              <a:buNone/>
+            </a:pPr>
+            <a:r>
+              <a:rPr lang="en-US" sz="1600" dirty="0">
+                <a:solidFill>
+                  <a:srgbClr val="627987"/>
+                </a:solidFill>
+                <a:latin typeface="Source Han Sans SC" pitchFamily="34" charset="0"/>
+                <a:ea typeface="Source Han Sans SC" pitchFamily="34" charset="-122"/>
+                <a:cs typeface="Source Han Sans SC" pitchFamily="34" charset="-120"/>
+              </a:rPr>
+              <a:t>回放异常窗口和证据</a:t>
+            </a:r>
+            <a:endParaRPr lang="en-US" sz="1600" dirty="0"/>
+          </a:p>
+        </p:txBody>
+      </p:sp>
+      <p:sp>
+        <p:nvSpPr>
+          <p:cNvPr id="18" name="Text 15"/>
+          <p:cNvSpPr/>
+          <p:nvPr/>
+        </p:nvSpPr>
+        <p:spPr>
+          <a:xfrm>
+            <a:off x="6281928" y="1810512"/>
+            <a:ext cx="2286000" cy="256032"/>
+          </a:xfrm>
+          <a:prstGeom prst="rect">
+            <a:avLst/>
+          </a:prstGeom>
+          <a:noFill/>
+          <a:ln/>
+        </p:spPr>
+        <p:txBody>
+          <a:bodyPr wrap="square" lIns="0" tIns="0" rIns="0" bIns="0" rtlCol="0" anchor="ctr">
+            <a:normAutofit/>
+          </a:bodyPr>
+          <a:lstStyle/>
+          <a:p>
+            <a:pPr indent="0" marL="0">
+              <a:lnSpc>
+                <a:spcPct val="100000"/>
+              </a:lnSpc>
+              <a:buNone/>
+            </a:pPr>
+            <a:r>
+              <a:rPr lang="en-US" sz="1200" b="1" dirty="0">
+                <a:solidFill>
+                  <a:srgbClr val="13C2C2"/>
+                </a:solidFill>
+                <a:latin typeface="Source Han Sans SC" pitchFamily="34" charset="0"/>
+                <a:ea typeface="Source Han Sans SC" pitchFamily="34" charset="-122"/>
+                <a:cs typeface="Source Han Sans SC" pitchFamily="34" charset="-120"/>
+              </a:rPr>
+              <a:t>第 5–6 周</a:t>
+            </a:r>
+            <a:endParaRPr lang="en-US" sz="1200" dirty="0"/>
+          </a:p>
+        </p:txBody>
+      </p:sp>
+      <p:sp>
+        <p:nvSpPr>
+          <p:cNvPr id="19" name="Shape 16"/>
+          <p:cNvSpPr/>
+          <p:nvPr/>
+        </p:nvSpPr>
+        <p:spPr>
+          <a:xfrm>
+            <a:off x="6281928" y="2194560"/>
+            <a:ext cx="2304288" cy="0"/>
+          </a:xfrm>
+          <a:prstGeom prst="line">
+            <a:avLst/>
+          </a:prstGeom>
+          <a:noFill/>
+          <a:ln w="63500">
+            <a:solidFill>
+              <a:srgbClr val="13C2C2"/>
+            </a:solidFill>
+            <a:prstDash val="solid"/>
+          </a:ln>
+        </p:spPr>
+      </p:sp>
+      <p:sp>
+        <p:nvSpPr>
+          <p:cNvPr id="20" name="Text 17"/>
+          <p:cNvSpPr/>
+          <p:nvPr/>
+        </p:nvSpPr>
+        <p:spPr>
+          <a:xfrm>
+            <a:off x="6281928" y="2487168"/>
+            <a:ext cx="2304288" cy="402336"/>
+          </a:xfrm>
+          <a:prstGeom prst="rect">
+            <a:avLst/>
+          </a:prstGeom>
+          <a:noFill/>
+          <a:ln/>
+        </p:spPr>
+        <p:txBody>
+          <a:bodyPr wrap="square" lIns="0" tIns="0" rIns="0" bIns="0" rtlCol="0" anchor="ctr">
+            <a:normAutofit/>
+          </a:bodyPr>
+          <a:lstStyle/>
+          <a:p>
+            <a:pPr indent="0" marL="0">
+              <a:lnSpc>
+                <a:spcPct val="100000"/>
+              </a:lnSpc>
+              <a:buNone/>
+            </a:pPr>
+            <a:r>
+              <a:rPr lang="en-US" sz="2300" b="1" dirty="0">
+                <a:solidFill>
+                  <a:srgbClr val="102A3A"/>
+                </a:solidFill>
+                <a:latin typeface="Source Han Sans SC" pitchFamily="34" charset="0"/>
+                <a:ea typeface="Source Han Sans SC" pitchFamily="34" charset="-122"/>
+                <a:cs typeface="Source Han Sans SC" pitchFamily="34" charset="-120"/>
+              </a:rPr>
+              <a:t>影子运行</a:t>
+            </a:r>
+            <a:endParaRPr lang="en-US" sz="2300" dirty="0"/>
+          </a:p>
+        </p:txBody>
+      </p:sp>
+      <p:sp>
+        <p:nvSpPr>
+          <p:cNvPr id="21" name="Text 18"/>
+          <p:cNvSpPr/>
+          <p:nvPr/>
+        </p:nvSpPr>
+        <p:spPr>
+          <a:xfrm>
+            <a:off x="6281928" y="3145536"/>
+            <a:ext cx="2304288" cy="914400"/>
+          </a:xfrm>
+          <a:prstGeom prst="rect">
+            <a:avLst/>
+          </a:prstGeom>
+          <a:noFill/>
+          <a:ln/>
+        </p:spPr>
+        <p:txBody>
+          <a:bodyPr wrap="square" lIns="0" tIns="0" rIns="0" bIns="0" rtlCol="0" anchor="ctr">
+            <a:normAutofit/>
+          </a:bodyPr>
+          <a:lstStyle/>
+          <a:p>
+            <a:pPr indent="0" marL="0">
+              <a:lnSpc>
+                <a:spcPct val="100000"/>
+              </a:lnSpc>
+              <a:buNone/>
+            </a:pPr>
+            <a:r>
+              <a:rPr lang="en-US" sz="1600" dirty="0">
+                <a:solidFill>
+                  <a:srgbClr val="627987"/>
+                </a:solidFill>
+                <a:latin typeface="Source Han Sans SC" pitchFamily="34" charset="0"/>
+                <a:ea typeface="Source Han Sans SC" pitchFamily="34" charset="-122"/>
+                <a:cs typeface="Source Han Sans SC" pitchFamily="34" charset="-120"/>
+              </a:rPr>
+              <a:t>只读接入 / 文件同步</a:t>
+            </a:r>
+            <a:endParaRPr lang="en-US" sz="1600" dirty="0"/>
+          </a:p>
+          <a:p>
+            <a:pPr indent="0" marL="0">
+              <a:lnSpc>
+                <a:spcPct val="100000"/>
+              </a:lnSpc>
+              <a:buNone/>
+            </a:pPr>
+            <a:r>
+              <a:rPr lang="en-US" sz="1600" dirty="0">
+                <a:solidFill>
+                  <a:srgbClr val="627987"/>
+                </a:solidFill>
+                <a:latin typeface="Source Han Sans SC" pitchFamily="34" charset="0"/>
+                <a:ea typeface="Source Han Sans SC" pitchFamily="34" charset="-122"/>
+                <a:cs typeface="Source Han Sans SC" pitchFamily="34" charset="-120"/>
+              </a:rPr>
+              <a:t>与班组判断并行对照</a:t>
+            </a:r>
+            <a:endParaRPr lang="en-US" sz="1600" dirty="0"/>
+          </a:p>
+        </p:txBody>
+      </p:sp>
+      <p:sp>
+        <p:nvSpPr>
+          <p:cNvPr id="22" name="Text 19"/>
+          <p:cNvSpPr/>
+          <p:nvPr/>
+        </p:nvSpPr>
+        <p:spPr>
+          <a:xfrm>
+            <a:off x="9134856" y="1810512"/>
+            <a:ext cx="2286000" cy="256032"/>
+          </a:xfrm>
+          <a:prstGeom prst="rect">
+            <a:avLst/>
+          </a:prstGeom>
+          <a:noFill/>
+          <a:ln/>
+        </p:spPr>
+        <p:txBody>
+          <a:bodyPr wrap="square" lIns="0" tIns="0" rIns="0" bIns="0" rtlCol="0" anchor="ctr">
+            <a:normAutofit/>
+          </a:bodyPr>
+          <a:lstStyle/>
+          <a:p>
+            <a:pPr indent="0" marL="0">
+              <a:lnSpc>
+                <a:spcPct val="100000"/>
+              </a:lnSpc>
+              <a:buNone/>
+            </a:pPr>
+            <a:r>
+              <a:rPr lang="en-US" sz="1200" b="1" dirty="0">
+                <a:solidFill>
+                  <a:srgbClr val="13C2C2"/>
+                </a:solidFill>
+                <a:latin typeface="Source Han Sans SC" pitchFamily="34" charset="0"/>
+                <a:ea typeface="Source Han Sans SC" pitchFamily="34" charset="-122"/>
+                <a:cs typeface="Source Han Sans SC" pitchFamily="34" charset="-120"/>
+              </a:rPr>
+              <a:t>第 7–8 周</a:t>
+            </a:r>
+            <a:endParaRPr lang="en-US" sz="1200" dirty="0"/>
+          </a:p>
+        </p:txBody>
+      </p:sp>
+      <p:sp>
+        <p:nvSpPr>
+          <p:cNvPr id="23" name="Shape 20"/>
+          <p:cNvSpPr/>
+          <p:nvPr/>
+        </p:nvSpPr>
+        <p:spPr>
+          <a:xfrm>
+            <a:off x="9134856" y="2194560"/>
+            <a:ext cx="2304288" cy="0"/>
+          </a:xfrm>
+          <a:prstGeom prst="line">
+            <a:avLst/>
+          </a:prstGeom>
+          <a:noFill/>
+          <a:ln w="63500">
+            <a:solidFill>
+              <a:srgbClr val="F2A93B"/>
+            </a:solidFill>
+            <a:prstDash val="solid"/>
+          </a:ln>
+        </p:spPr>
+      </p:sp>
+      <p:sp>
+        <p:nvSpPr>
+          <p:cNvPr id="24" name="Text 21"/>
+          <p:cNvSpPr/>
+          <p:nvPr/>
+        </p:nvSpPr>
+        <p:spPr>
+          <a:xfrm>
+            <a:off x="9134856" y="2487168"/>
+            <a:ext cx="2304288" cy="402336"/>
+          </a:xfrm>
+          <a:prstGeom prst="rect">
+            <a:avLst/>
+          </a:prstGeom>
+          <a:noFill/>
+          <a:ln/>
+        </p:spPr>
+        <p:txBody>
+          <a:bodyPr wrap="square" lIns="0" tIns="0" rIns="0" bIns="0" rtlCol="0" anchor="ctr">
+            <a:normAutofit/>
+          </a:bodyPr>
+          <a:lstStyle/>
+          <a:p>
+            <a:pPr indent="0" marL="0">
+              <a:lnSpc>
+                <a:spcPct val="100000"/>
+              </a:lnSpc>
+              <a:buNone/>
+            </a:pPr>
+            <a:r>
+              <a:rPr lang="en-US" sz="2300" b="1" dirty="0">
+                <a:solidFill>
+                  <a:srgbClr val="102A3A"/>
+                </a:solidFill>
+                <a:latin typeface="Source Han Sans SC" pitchFamily="34" charset="0"/>
+                <a:ea typeface="Source Han Sans SC" pitchFamily="34" charset="-122"/>
+                <a:cs typeface="Source Han Sans SC" pitchFamily="34" charset="-120"/>
+              </a:rPr>
+              <a:t>共同验收</a:t>
+            </a:r>
+            <a:endParaRPr lang="en-US" sz="2300" dirty="0"/>
+          </a:p>
+        </p:txBody>
+      </p:sp>
+      <p:sp>
+        <p:nvSpPr>
+          <p:cNvPr id="25" name="Text 22"/>
+          <p:cNvSpPr/>
+          <p:nvPr/>
+        </p:nvSpPr>
+        <p:spPr>
+          <a:xfrm>
+            <a:off x="9134856" y="3145536"/>
+            <a:ext cx="2304288" cy="914400"/>
+          </a:xfrm>
+          <a:prstGeom prst="rect">
+            <a:avLst/>
+          </a:prstGeom>
+          <a:noFill/>
+          <a:ln/>
+        </p:spPr>
+        <p:txBody>
+          <a:bodyPr wrap="square" lIns="0" tIns="0" rIns="0" bIns="0" rtlCol="0" anchor="ctr">
+            <a:normAutofit/>
+          </a:bodyPr>
+          <a:lstStyle/>
+          <a:p>
+            <a:pPr indent="0" marL="0">
+              <a:lnSpc>
+                <a:spcPct val="100000"/>
+              </a:lnSpc>
+              <a:buNone/>
+            </a:pPr>
+            <a:r>
+              <a:rPr lang="en-US" sz="1600" dirty="0">
+                <a:solidFill>
+                  <a:srgbClr val="627987"/>
+                </a:solidFill>
+                <a:latin typeface="Source Han Sans SC" pitchFamily="34" charset="0"/>
+                <a:ea typeface="Source Han Sans SC" pitchFamily="34" charset="-122"/>
+                <a:cs typeface="Source Han Sans SC" pitchFamily="34" charset="-120"/>
+              </a:rPr>
+              <a:t>看提前量、误报、可解释性</a:t>
+            </a:r>
+            <a:endParaRPr lang="en-US" sz="1600" dirty="0"/>
+          </a:p>
+          <a:p>
+            <a:pPr indent="0" marL="0">
+              <a:lnSpc>
+                <a:spcPct val="100000"/>
+              </a:lnSpc>
+              <a:buNone/>
+            </a:pPr>
+            <a:r>
+              <a:rPr lang="en-US" sz="1600" dirty="0">
+                <a:solidFill>
+                  <a:srgbClr val="627987"/>
+                </a:solidFill>
+                <a:latin typeface="Source Han Sans SC" pitchFamily="34" charset="0"/>
+                <a:ea typeface="Source Han Sans SC" pitchFamily="34" charset="-122"/>
+                <a:cs typeface="Source Han Sans SC" pitchFamily="34" charset="-120"/>
+              </a:rPr>
+              <a:t>决定是否扩大范围</a:t>
+            </a:r>
+            <a:endParaRPr lang="en-US" sz="1600" dirty="0"/>
+          </a:p>
+        </p:txBody>
+      </p:sp>
+      <p:sp>
+        <p:nvSpPr>
+          <p:cNvPr id="26" name="Shape 23"/>
+          <p:cNvSpPr/>
+          <p:nvPr/>
+        </p:nvSpPr>
+        <p:spPr>
+          <a:xfrm>
+            <a:off x="685800" y="4709160"/>
+            <a:ext cx="10789920" cy="868680"/>
+          </a:xfrm>
+          <a:prstGeom prst="roundRect">
+            <a:avLst>
+              <a:gd name="adj" fmla="val 12632"/>
+            </a:avLst>
+          </a:prstGeom>
+          <a:solidFill>
+            <a:srgbClr val="EAF7FA"/>
+          </a:solidFill>
+          <a:ln w="15240">
+            <a:solidFill>
+              <a:srgbClr val="13C2C2"/>
+            </a:solidFill>
+            <a:prstDash val="solid"/>
+          </a:ln>
+        </p:spPr>
+      </p:sp>
+      <p:sp>
+        <p:nvSpPr>
+          <p:cNvPr id="27" name="Text 24"/>
+          <p:cNvSpPr/>
+          <p:nvPr/>
+        </p:nvSpPr>
+        <p:spPr>
+          <a:xfrm>
+            <a:off x="987552" y="4937760"/>
+            <a:ext cx="10186416" cy="365760"/>
+          </a:xfrm>
+          <a:prstGeom prst="rect">
+            <a:avLst/>
+          </a:prstGeom>
+          <a:noFill/>
+          <a:ln/>
+        </p:spPr>
+        <p:txBody>
+          <a:bodyPr wrap="square" lIns="0" tIns="0" rIns="0" bIns="0" rtlCol="0" anchor="ctr">
+            <a:normAutofit/>
+          </a:bodyPr>
+          <a:lstStyle/>
+          <a:p>
+            <a:pPr algn="ctr" indent="0" marL="0">
+              <a:lnSpc>
+                <a:spcPct val="100000"/>
+              </a:lnSpc>
+              <a:buNone/>
+            </a:pPr>
+            <a:r>
+              <a:rPr lang="en-US" sz="1800" b="1" dirty="0">
+                <a:solidFill>
+                  <a:srgbClr val="102A3A"/>
+                </a:solidFill>
+                <a:latin typeface="Source Han Sans SC" pitchFamily="34" charset="0"/>
+                <a:ea typeface="Source Han Sans SC" pitchFamily="34" charset="-122"/>
+                <a:cs typeface="Source Han Sans SC" pitchFamily="34" charset="-120"/>
+              </a:rPr>
+              <a:t>最低数据清单：时间戳一致的过程变量、有限化验/事件标签、设备与工艺上下文、明确访问授权。</a:t>
+            </a:r>
+            <a:endParaRPr lang="en-US" sz="1800" dirty="0"/>
+          </a:p>
+        </p:txBody>
+      </p:sp>
+      <p:sp>
+        <p:nvSpPr>
+          <p:cNvPr id="28" name="Text 25"/>
+          <p:cNvSpPr/>
+          <p:nvPr/>
+        </p:nvSpPr>
+        <p:spPr>
+          <a:xfrm>
+            <a:off x="1847088" y="5852160"/>
+            <a:ext cx="8458200" cy="292608"/>
+          </a:xfrm>
+          <a:prstGeom prst="rect">
+            <a:avLst/>
+          </a:prstGeom>
+          <a:noFill/>
+          <a:ln/>
+        </p:spPr>
+        <p:txBody>
+          <a:bodyPr wrap="square" lIns="0" tIns="0" rIns="0" bIns="0" rtlCol="0" anchor="ctr">
+            <a:normAutofit/>
+          </a:bodyPr>
+          <a:lstStyle/>
+          <a:p>
+            <a:pPr algn="ctr" indent="0" marL="0">
+              <a:lnSpc>
+                <a:spcPct val="100000"/>
+              </a:lnSpc>
+              <a:buNone/>
+            </a:pPr>
+            <a:r>
+              <a:rPr lang="en-US" sz="1500" b="1" dirty="0">
+                <a:solidFill>
+                  <a:srgbClr val="627987"/>
+                </a:solidFill>
+                <a:latin typeface="Source Han Sans SC" pitchFamily="34" charset="0"/>
+                <a:ea typeface="Source Han Sans SC" pitchFamily="34" charset="-122"/>
+                <a:cs typeface="Source Han Sans SC" pitchFamily="34" charset="-120"/>
+              </a:rPr>
+              <a:t>PoC 不承诺虚构效果；用共同认可的回放与影子运行结果决定下一步。</a:t>
+            </a:r>
+            <a:endParaRPr lang="en-US" sz="1500" dirty="0"/>
+          </a:p>
+        </p:txBody>
+      </p:sp>
+    </p:spTree>
+  </p:cSld>
+  <p:clrMapOvr>
+    <a:masterClrMapping/>
+  </p:clrMapOvr>
+</p:sld>
+</file>
+
+<file path=ppt/slides/slide12.xml><?xml version="1.0" encoding="utf-8"?>
+<p:sld xmlns:a="http://schemas.openxmlformats.org/drawingml/2006/main" xmlns:r="http://schemas.openxmlformats.org/officeDocument/2006/relationships" xmlns:p="http://schemas.openxmlformats.org/presentationml/2006/main">
+  <p:cSld name="Slide 12">
     <p:bg>
       <p:bgPr>
         <a:solidFill>
@@ -2243,7 +4618,7 @@
                 <a:ea typeface="Source Han Sans SC" pitchFamily="34" charset="-122"/>
                 <a:cs typeface="Source Han Sans SC" pitchFamily="34" charset="-120"/>
               </a:rPr>
-              <a:t>下一步，不是“接管控制”</a:t>
+              <a:t>再给 100 天，我们先做什么？</a:t>
             </a:r>
             <a:endParaRPr lang="en-US" sz="2000" dirty="0"/>
           </a:p>
@@ -2279,7 +4654,7 @@
               <a:buNone/>
             </a:pPr>
             <a:r>
-              <a:rPr lang="en-US" sz="3800" b="1" dirty="0">
+              <a:rPr lang="en-US" sz="3600" b="1" dirty="0">
                 <a:solidFill>
                   <a:srgbClr val="FFFFFF"/>
                 </a:solidFill>
@@ -2287,19 +4662,19 @@
                 <a:ea typeface="Source Han Sans SC" pitchFamily="34" charset="-122"/>
                 <a:cs typeface="Source Han Sans SC" pitchFamily="34" charset="-120"/>
               </a:rPr>
-              <a:t>而是授权我们先看清</a:t>
-            </a:r>
-            <a:endParaRPr lang="en-US" sz="3800" dirty="0"/>
-          </a:p>
-          <a:p>
-            <a:pPr indent="0" marL="0">
-              <a:lnSpc>
-                <a:spcPct val="100000"/>
-              </a:lnSpc>
-              <a:buNone/>
-            </a:pPr>
-            <a:r>
-              <a:rPr lang="en-US" sz="3800" b="1" dirty="0">
+              <a:t>进入一个获授权装置，</a:t>
+            </a:r>
+            <a:endParaRPr lang="en-US" sz="3600" dirty="0"/>
+          </a:p>
+          <a:p>
+            <a:pPr indent="0" marL="0">
+              <a:lnSpc>
+                <a:spcPct val="100000"/>
+              </a:lnSpc>
+              <a:buNone/>
+            </a:pPr>
+            <a:r>
+              <a:rPr lang="en-US" sz="3600" b="1" dirty="0">
                 <a:solidFill>
                   <a:srgbClr val="FFFFFF"/>
                 </a:solidFill>
@@ -2307,9 +4682,9 @@
                 <a:ea typeface="Source Han Sans SC" pitchFamily="34" charset="-122"/>
                 <a:cs typeface="Source Han Sans SC" pitchFamily="34" charset="-120"/>
               </a:rPr>
-              <a:t>一个真实问题</a:t>
-            </a:r>
-            <a:endParaRPr lang="en-US" sz="3800" dirty="0"/>
+              <a:t>完成首个目标的只读数据对齐。</a:t>
+            </a:r>
+            <a:endParaRPr lang="en-US" sz="3600" dirty="0"/>
           </a:p>
         </p:txBody>
       </p:sp>
@@ -2904,7 +5279,7 @@
                 <a:ea typeface="Source Han Sans SC" pitchFamily="34" charset="-122"/>
                 <a:cs typeface="Source Han Sans SC" pitchFamily="34" charset="-120"/>
               </a:rPr>
-              <a:t>01 / 园区问题</a:t>
+              <a:t>01 / 谁在用</a:t>
             </a:r>
             <a:endParaRPr lang="en-US" sz="1200" dirty="0"/>
           </a:p>
@@ -2948,15 +5323,59 @@
                 <a:ea typeface="Source Han Sans SC" pitchFamily="34" charset="-122"/>
                 <a:cs typeface="Source Han Sans SC" pitchFamily="34" charset="-120"/>
               </a:rPr>
-              <a:t>真正的时间差，不在传感器，在判断</a:t>
+              <a:t>中控操作员周师傅的一个白班</a:t>
             </a:r>
             <a:endParaRPr lang="en-US" sz="3000" dirty="0"/>
+          </a:p>
+        </p:txBody>
+      </p:sp>
+      <p:sp>
+        <p:nvSpPr>
+          <p:cNvPr id="7" name="Text 5"/>
+          <p:cNvSpPr/>
+          <p:nvPr/>
+        </p:nvSpPr>
+        <p:spPr>
+          <a:xfrm>
+            <a:off x="676656" y="1298448"/>
+            <a:ext cx="10515600" cy="329184"/>
+          </a:xfrm>
+          <a:prstGeom prst="rect">
+            <a:avLst/>
+          </a:prstGeom>
+          <a:noFill/>
+          <a:ln/>
+        </p:spPr>
+        <p:txBody>
+          <a:bodyPr wrap="square" lIns="0" tIns="0" rIns="0" bIns="0" rtlCol="0" anchor="ctr">
+            <a:normAutofit/>
+          </a:bodyPr>
+          <a:lstStyle/>
+          <a:p>
+            <a:pPr indent="0" marL="0">
+              <a:lnSpc>
+                <a:spcPct val="100000"/>
+              </a:lnSpc>
+              <a:buNone/>
+            </a:pPr>
+            <a:r>
+              <a:rPr lang="en-US" sz="1600" dirty="0">
+                <a:solidFill>
+                  <a:srgbClr val="627987"/>
+                </a:solidFill>
+                <a:latin typeface="Source Han Sans SC" pitchFamily="34" charset="0"/>
+                <a:ea typeface="Source Han Sans SC" pitchFamily="34" charset="-122"/>
+                <a:cs typeface="Source Han Sans SC" pitchFamily="34" charset="-120"/>
+              </a:rPr>
+              <a:t>不讲“广大用户”，只看一个人如何判断</a:t>
+            </a:r>
+            <a:endParaRPr lang="en-US" sz="1600" dirty="0"/>
           </a:p>
         </p:txBody>
       </p:sp>
       <p:pic>
         <p:nvPicPr>
-          <p:cNvPr id="7" name="Image 0" descr="/Users/rocalight/Desktop/All in one Data/01_PROJECTS/FDE任务/03_产品与解决方案/03_连续化工过程偏移副驾驶/apps/web/public/brand/xuanan-anomaly-intercept-v04.svg">    </p:cNvPr>
+          <p:cNvPr id="8" name="Image 0" descr="/Users/rocalight/Desktop/All in one Data/01_PROJECTS/FDE任务/03_产品与解决方案/03_连续化工过程偏移副驾驶/apps/web/public/brand/xuanan-anomaly-intercept-v04.svg">    </p:cNvPr>
           <p:cNvPicPr>
             <a:picLocks noChangeAspect="1"/>
           </p:cNvPicPr>
@@ -2986,7 +5405,7 @@
       </p:pic>
       <p:sp>
         <p:nvSpPr>
-          <p:cNvPr id="8" name="Text 5"/>
+          <p:cNvPr id="9" name="Text 6"/>
           <p:cNvSpPr/>
           <p:nvPr/>
         </p:nvSpPr>
@@ -3030,35 +5449,106 @@
       </p:sp>
       <p:sp>
         <p:nvSpPr>
-          <p:cNvPr id="9" name="Text 6"/>
-          <p:cNvSpPr/>
-          <p:nvPr/>
-        </p:nvSpPr>
-        <p:spPr>
-          <a:xfrm>
-            <a:off x="713232" y="1874520"/>
-            <a:ext cx="2926080" cy="457200"/>
-          </a:xfrm>
-          <a:prstGeom prst="rect">
-            <a:avLst/>
-          </a:prstGeom>
-          <a:noFill/>
-          <a:ln/>
-        </p:spPr>
-        <p:txBody>
-          <a:bodyPr wrap="square" lIns="0" tIns="0" rIns="0" bIns="0" rtlCol="0" anchor="ctr">
-            <a:normAutofit/>
-          </a:bodyPr>
-          <a:lstStyle/>
-          <a:p>
-            <a:pPr indent="0" marL="0">
-              <a:lnSpc>
-                <a:spcPct val="100000"/>
-              </a:lnSpc>
-              <a:buNone/>
-            </a:pPr>
-            <a:r>
-              <a:rPr lang="en-US" sz="2700" b="1" dirty="0">
+          <p:cNvPr id="10" name="Shape 7"/>
+          <p:cNvSpPr/>
+          <p:nvPr/>
+        </p:nvSpPr>
+        <p:spPr>
+          <a:xfrm>
+            <a:off x="621792" y="1874520"/>
+            <a:ext cx="2542032" cy="2176272"/>
+          </a:xfrm>
+          <a:prstGeom prst="roundRect">
+            <a:avLst>
+              <a:gd name="adj" fmla="val 5042"/>
+            </a:avLst>
+          </a:prstGeom>
+          <a:solidFill>
+            <a:srgbClr val="FFFFFF"/>
+          </a:solidFill>
+          <a:ln w="15240">
+            <a:solidFill>
+              <a:srgbClr val="DCEAF5"/>
+            </a:solidFill>
+            <a:prstDash val="solid"/>
+          </a:ln>
+        </p:spPr>
+      </p:sp>
+      <p:sp>
+        <p:nvSpPr>
+          <p:cNvPr id="11" name="Text 8"/>
+          <p:cNvSpPr/>
+          <p:nvPr/>
+        </p:nvSpPr>
+        <p:spPr>
+          <a:xfrm>
+            <a:off x="822960" y="2084832"/>
+            <a:ext cx="731520" cy="274320"/>
+          </a:xfrm>
+          <a:prstGeom prst="rect">
+            <a:avLst/>
+          </a:prstGeom>
+          <a:noFill/>
+          <a:ln/>
+        </p:spPr>
+        <p:txBody>
+          <a:bodyPr wrap="square" lIns="0" tIns="0" rIns="0" bIns="0" rtlCol="0" anchor="ctr">
+            <a:normAutofit/>
+          </a:bodyPr>
+          <a:lstStyle/>
+          <a:p>
+            <a:pPr indent="0" marL="0">
+              <a:lnSpc>
+                <a:spcPct val="100000"/>
+              </a:lnSpc>
+              <a:buNone/>
+            </a:pPr>
+            <a:r>
+              <a:rPr lang="en-US" sz="1400" b="1" dirty="0">
+                <a:solidFill>
+                  <a:srgbClr val="13C2C2"/>
+                </a:solidFill>
+                <a:latin typeface="Source Han Sans SC" pitchFamily="34" charset="0"/>
+                <a:ea typeface="Source Han Sans SC" pitchFamily="34" charset="-122"/>
+                <a:cs typeface="Source Han Sans SC" pitchFamily="34" charset="-120"/>
+              </a:rPr>
+              <a:t>08:00</a:t>
+            </a:r>
+            <a:endParaRPr lang="en-US" sz="1400" dirty="0"/>
+          </a:p>
+        </p:txBody>
+      </p:sp>
+      <p:sp>
+        <p:nvSpPr>
+          <p:cNvPr id="12" name="Text 9"/>
+          <p:cNvSpPr/>
+          <p:nvPr/>
+        </p:nvSpPr>
+        <p:spPr>
+          <a:xfrm>
+            <a:off x="822960" y="2578608"/>
+            <a:ext cx="2121408" cy="365760"/>
+          </a:xfrm>
+          <a:prstGeom prst="rect">
+            <a:avLst/>
+          </a:prstGeom>
+          <a:noFill/>
+          <a:ln/>
+        </p:spPr>
+        <p:txBody>
+          <a:bodyPr wrap="square" lIns="0" tIns="0" rIns="0" bIns="0" rtlCol="0" anchor="ctr">
+            <a:normAutofit/>
+          </a:bodyPr>
+          <a:lstStyle/>
+          <a:p>
+            <a:pPr indent="0" marL="0">
+              <a:lnSpc>
+                <a:spcPct val="100000"/>
+              </a:lnSpc>
+              <a:buNone/>
+            </a:pPr>
+            <a:r>
+              <a:rPr lang="en-US" sz="2300" b="1" dirty="0">
                 <a:solidFill>
                   <a:srgbClr val="102A3A"/>
                 </a:solidFill>
@@ -3066,43 +5556,43 @@
                 <a:ea typeface="Source Han Sans SC" pitchFamily="34" charset="-122"/>
                 <a:cs typeface="Source Han Sans SC" pitchFamily="34" charset="-120"/>
               </a:rPr>
-              <a:t>DCS 一直有数据</a:t>
-            </a:r>
-            <a:endParaRPr lang="en-US" sz="2700" dirty="0"/>
-          </a:p>
-        </p:txBody>
-      </p:sp>
-      <p:sp>
-        <p:nvSpPr>
-          <p:cNvPr id="10" name="Text 7"/>
-          <p:cNvSpPr/>
-          <p:nvPr/>
-        </p:nvSpPr>
-        <p:spPr>
-          <a:xfrm>
-            <a:off x="731520" y="2487168"/>
-            <a:ext cx="3063240" cy="822960"/>
-          </a:xfrm>
-          <a:prstGeom prst="rect">
-            <a:avLst/>
-          </a:prstGeom>
-          <a:noFill/>
-          <a:ln/>
-        </p:spPr>
-        <p:txBody>
-          <a:bodyPr wrap="square" lIns="0" tIns="0" rIns="0" bIns="0" rtlCol="0" anchor="ctr">
-            <a:normAutofit/>
-          </a:bodyPr>
-          <a:lstStyle/>
-          <a:p>
-            <a:pPr indent="0" marL="0">
-              <a:lnSpc>
-                <a:spcPct val="100000"/>
-              </a:lnSpc>
-              <a:buNone/>
-            </a:pPr>
-            <a:r>
-              <a:rPr lang="en-US" sz="1900" dirty="0">
+              <a:t>接班</a:t>
+            </a:r>
+            <a:endParaRPr lang="en-US" sz="2300" dirty="0"/>
+          </a:p>
+        </p:txBody>
+      </p:sp>
+      <p:sp>
+        <p:nvSpPr>
+          <p:cNvPr id="13" name="Text 10"/>
+          <p:cNvSpPr/>
+          <p:nvPr/>
+        </p:nvSpPr>
+        <p:spPr>
+          <a:xfrm>
+            <a:off x="822960" y="3154680"/>
+            <a:ext cx="2121408" cy="640080"/>
+          </a:xfrm>
+          <a:prstGeom prst="rect">
+            <a:avLst/>
+          </a:prstGeom>
+          <a:noFill/>
+          <a:ln/>
+        </p:spPr>
+        <p:txBody>
+          <a:bodyPr wrap="square" lIns="0" tIns="0" rIns="0" bIns="0" rtlCol="0" anchor="ctr">
+            <a:normAutofit/>
+          </a:bodyPr>
+          <a:lstStyle/>
+          <a:p>
+            <a:pPr indent="0" marL="0">
+              <a:lnSpc>
+                <a:spcPct val="100000"/>
+              </a:lnSpc>
+              <a:buNone/>
+            </a:pPr>
+            <a:r>
+              <a:rPr lang="en-US" sz="1600" dirty="0">
                 <a:solidFill>
                   <a:srgbClr val="627987"/>
                 </a:solidFill>
@@ -3110,42 +5600,22 @@
                 <a:ea typeface="Source Han Sans SC" pitchFamily="34" charset="-122"/>
                 <a:cs typeface="Source Han Sans SC" pitchFamily="34" charset="-120"/>
               </a:rPr>
-              <a:t>压力、流量、温度、液位、密度……</a:t>
-            </a:r>
-            <a:endParaRPr lang="en-US" sz="1900" dirty="0"/>
-          </a:p>
-          <a:p>
-            <a:pPr indent="0" marL="0">
-              <a:lnSpc>
-                <a:spcPct val="100000"/>
-              </a:lnSpc>
-              <a:buNone/>
-            </a:pPr>
-            <a:r>
-              <a:rPr lang="en-US" sz="1900" dirty="0">
-                <a:solidFill>
-                  <a:srgbClr val="627987"/>
-                </a:solidFill>
-                <a:latin typeface="Source Han Sans SC" pitchFamily="34" charset="0"/>
-                <a:ea typeface="Source Han Sans SC" pitchFamily="34" charset="-122"/>
-                <a:cs typeface="Source Han Sans SC" pitchFamily="34" charset="-120"/>
-              </a:rPr>
-              <a:t>现场变量持续在线。</a:t>
-            </a:r>
-            <a:endParaRPr lang="en-US" sz="1900" dirty="0"/>
-          </a:p>
-        </p:txBody>
-      </p:sp>
-      <p:sp>
-        <p:nvSpPr>
-          <p:cNvPr id="11" name="Shape 8"/>
-          <p:cNvSpPr/>
-          <p:nvPr/>
-        </p:nvSpPr>
-        <p:spPr>
-          <a:xfrm>
-            <a:off x="3794760" y="2816352"/>
-            <a:ext cx="914400" cy="0"/>
+              <a:t>看 DCS 趋势与交接记录</a:t>
+            </a:r>
+            <a:endParaRPr lang="en-US" sz="1600" dirty="0"/>
+          </a:p>
+        </p:txBody>
+      </p:sp>
+      <p:sp>
+        <p:nvSpPr>
+          <p:cNvPr id="14" name="Shape 11"/>
+          <p:cNvSpPr/>
+          <p:nvPr/>
+        </p:nvSpPr>
+        <p:spPr>
+          <a:xfrm>
+            <a:off x="3200400" y="2889504"/>
+            <a:ext cx="256032" cy="0"/>
           </a:xfrm>
           <a:prstGeom prst="line">
             <a:avLst/>
@@ -3162,79 +5632,150 @@
       </p:sp>
       <p:sp>
         <p:nvSpPr>
-          <p:cNvPr id="12" name="Text 9"/>
-          <p:cNvSpPr/>
-          <p:nvPr/>
-        </p:nvSpPr>
-        <p:spPr>
-          <a:xfrm>
-            <a:off x="4919472" y="1874520"/>
-            <a:ext cx="3246120" cy="457200"/>
-          </a:xfrm>
-          <a:prstGeom prst="rect">
-            <a:avLst/>
-          </a:prstGeom>
-          <a:noFill/>
-          <a:ln/>
-        </p:spPr>
-        <p:txBody>
-          <a:bodyPr wrap="square" lIns="0" tIns="0" rIns="0" bIns="0" rtlCol="0" anchor="ctr">
-            <a:normAutofit/>
-          </a:bodyPr>
-          <a:lstStyle/>
-          <a:p>
-            <a:pPr indent="0" marL="0">
-              <a:lnSpc>
-                <a:spcPct val="100000"/>
-              </a:lnSpc>
-              <a:buNone/>
-            </a:pPr>
-            <a:r>
-              <a:rPr lang="en-US" sz="2700" b="1" dirty="0">
-                <a:solidFill>
-                  <a:srgbClr val="DE5B6D"/>
-                </a:solidFill>
-                <a:latin typeface="Source Han Sans SC" pitchFamily="34" charset="0"/>
-                <a:ea typeface="Source Han Sans SC" pitchFamily="34" charset="-122"/>
-                <a:cs typeface="Source Han Sans SC" pitchFamily="34" charset="-120"/>
-              </a:rPr>
-              <a:t>但关键结论会迟到</a:t>
-            </a:r>
-            <a:endParaRPr lang="en-US" sz="2700" dirty="0"/>
-          </a:p>
-        </p:txBody>
-      </p:sp>
-      <p:sp>
-        <p:nvSpPr>
-          <p:cNvPr id="13" name="Text 10"/>
-          <p:cNvSpPr/>
-          <p:nvPr/>
-        </p:nvSpPr>
-        <p:spPr>
-          <a:xfrm>
-            <a:off x="4937760" y="2487168"/>
-            <a:ext cx="3273552" cy="822960"/>
-          </a:xfrm>
-          <a:prstGeom prst="rect">
-            <a:avLst/>
-          </a:prstGeom>
-          <a:noFill/>
-          <a:ln/>
-        </p:spPr>
-        <p:txBody>
-          <a:bodyPr wrap="square" lIns="0" tIns="0" rIns="0" bIns="0" rtlCol="0" anchor="ctr">
-            <a:normAutofit/>
-          </a:bodyPr>
-          <a:lstStyle/>
-          <a:p>
-            <a:pPr indent="0" marL="0">
-              <a:lnSpc>
-                <a:spcPct val="100000"/>
-              </a:lnSpc>
-              <a:buNone/>
-            </a:pPr>
-            <a:r>
-              <a:rPr lang="en-US" sz="1900" dirty="0">
+          <p:cNvPr id="15" name="Shape 12"/>
+          <p:cNvSpPr/>
+          <p:nvPr/>
+        </p:nvSpPr>
+        <p:spPr>
+          <a:xfrm>
+            <a:off x="3474720" y="1874520"/>
+            <a:ext cx="2542032" cy="2176272"/>
+          </a:xfrm>
+          <a:prstGeom prst="roundRect">
+            <a:avLst>
+              <a:gd name="adj" fmla="val 5042"/>
+            </a:avLst>
+          </a:prstGeom>
+          <a:solidFill>
+            <a:srgbClr val="FFFFFF"/>
+          </a:solidFill>
+          <a:ln w="15240">
+            <a:solidFill>
+              <a:srgbClr val="DCEAF5"/>
+            </a:solidFill>
+            <a:prstDash val="solid"/>
+          </a:ln>
+        </p:spPr>
+      </p:sp>
+      <p:sp>
+        <p:nvSpPr>
+          <p:cNvPr id="16" name="Text 13"/>
+          <p:cNvSpPr/>
+          <p:nvPr/>
+        </p:nvSpPr>
+        <p:spPr>
+          <a:xfrm>
+            <a:off x="3675888" y="2084832"/>
+            <a:ext cx="731520" cy="274320"/>
+          </a:xfrm>
+          <a:prstGeom prst="rect">
+            <a:avLst/>
+          </a:prstGeom>
+          <a:noFill/>
+          <a:ln/>
+        </p:spPr>
+        <p:txBody>
+          <a:bodyPr wrap="square" lIns="0" tIns="0" rIns="0" bIns="0" rtlCol="0" anchor="ctr">
+            <a:normAutofit/>
+          </a:bodyPr>
+          <a:lstStyle/>
+          <a:p>
+            <a:pPr indent="0" marL="0">
+              <a:lnSpc>
+                <a:spcPct val="100000"/>
+              </a:lnSpc>
+              <a:buNone/>
+            </a:pPr>
+            <a:r>
+              <a:rPr lang="en-US" sz="1400" b="1" dirty="0">
+                <a:solidFill>
+                  <a:srgbClr val="13C2C2"/>
+                </a:solidFill>
+                <a:latin typeface="Source Han Sans SC" pitchFamily="34" charset="0"/>
+                <a:ea typeface="Source Han Sans SC" pitchFamily="34" charset="-122"/>
+                <a:cs typeface="Source Han Sans SC" pitchFamily="34" charset="-120"/>
+              </a:rPr>
+              <a:t>10:20</a:t>
+            </a:r>
+            <a:endParaRPr lang="en-US" sz="1400" dirty="0"/>
+          </a:p>
+        </p:txBody>
+      </p:sp>
+      <p:sp>
+        <p:nvSpPr>
+          <p:cNvPr id="17" name="Text 14"/>
+          <p:cNvSpPr/>
+          <p:nvPr/>
+        </p:nvSpPr>
+        <p:spPr>
+          <a:xfrm>
+            <a:off x="3675888" y="2578608"/>
+            <a:ext cx="2121408" cy="365760"/>
+          </a:xfrm>
+          <a:prstGeom prst="rect">
+            <a:avLst/>
+          </a:prstGeom>
+          <a:noFill/>
+          <a:ln/>
+        </p:spPr>
+        <p:txBody>
+          <a:bodyPr wrap="square" lIns="0" tIns="0" rIns="0" bIns="0" rtlCol="0" anchor="ctr">
+            <a:normAutofit/>
+          </a:bodyPr>
+          <a:lstStyle/>
+          <a:p>
+            <a:pPr indent="0" marL="0">
+              <a:lnSpc>
+                <a:spcPct val="100000"/>
+              </a:lnSpc>
+              <a:buNone/>
+            </a:pPr>
+            <a:r>
+              <a:rPr lang="en-US" sz="2300" b="1" dirty="0">
+                <a:solidFill>
+                  <a:srgbClr val="102A3A"/>
+                </a:solidFill>
+                <a:latin typeface="Source Han Sans SC" pitchFamily="34" charset="0"/>
+                <a:ea typeface="Source Han Sans SC" pitchFamily="34" charset="-122"/>
+                <a:cs typeface="Source Han Sans SC" pitchFamily="34" charset="-120"/>
+              </a:rPr>
+              <a:t>曲线变怪</a:t>
+            </a:r>
+            <a:endParaRPr lang="en-US" sz="2300" dirty="0"/>
+          </a:p>
+        </p:txBody>
+      </p:sp>
+      <p:sp>
+        <p:nvSpPr>
+          <p:cNvPr id="18" name="Text 15"/>
+          <p:cNvSpPr/>
+          <p:nvPr/>
+        </p:nvSpPr>
+        <p:spPr>
+          <a:xfrm>
+            <a:off x="3675888" y="3154680"/>
+            <a:ext cx="2121408" cy="640080"/>
+          </a:xfrm>
+          <a:prstGeom prst="rect">
+            <a:avLst/>
+          </a:prstGeom>
+          <a:noFill/>
+          <a:ln/>
+        </p:spPr>
+        <p:txBody>
+          <a:bodyPr wrap="square" lIns="0" tIns="0" rIns="0" bIns="0" rtlCol="0" anchor="ctr">
+            <a:normAutofit/>
+          </a:bodyPr>
+          <a:lstStyle/>
+          <a:p>
+            <a:pPr indent="0" marL="0">
+              <a:lnSpc>
+                <a:spcPct val="100000"/>
+              </a:lnSpc>
+              <a:buNone/>
+            </a:pPr>
+            <a:r>
+              <a:rPr lang="en-US" sz="1600" dirty="0">
                 <a:solidFill>
                   <a:srgbClr val="627987"/>
                 </a:solidFill>
@@ -3242,42 +5783,22 @@
                 <a:ea typeface="Source Han Sans SC" pitchFamily="34" charset="-122"/>
                 <a:cs typeface="Source Han Sans SC" pitchFamily="34" charset="-120"/>
               </a:rPr>
-              <a:t>离线化验、跨装置核对、班组经验判断，</a:t>
-            </a:r>
-            <a:endParaRPr lang="en-US" sz="1900" dirty="0"/>
-          </a:p>
-          <a:p>
-            <a:pPr indent="0" marL="0">
-              <a:lnSpc>
-                <a:spcPct val="100000"/>
-              </a:lnSpc>
-              <a:buNone/>
-            </a:pPr>
-            <a:r>
-              <a:rPr lang="en-US" sz="1900" dirty="0">
-                <a:solidFill>
-                  <a:srgbClr val="627987"/>
-                </a:solidFill>
-                <a:latin typeface="Source Han Sans SC" pitchFamily="34" charset="0"/>
-                <a:ea typeface="Source Han Sans SC" pitchFamily="34" charset="-122"/>
-                <a:cs typeface="Source Han Sans SC" pitchFamily="34" charset="-120"/>
-              </a:rPr>
-              <a:t>往往发生在趋势已经形成之后。</a:t>
-            </a:r>
-            <a:endParaRPr lang="en-US" sz="1900" dirty="0"/>
-          </a:p>
-        </p:txBody>
-      </p:sp>
-      <p:sp>
-        <p:nvSpPr>
-          <p:cNvPr id="14" name="Shape 11"/>
-          <p:cNvSpPr/>
-          <p:nvPr/>
-        </p:nvSpPr>
-        <p:spPr>
-          <a:xfrm>
-            <a:off x="8229600" y="2816352"/>
-            <a:ext cx="822960" cy="0"/>
+              <a:t>来回翻趋势、问上一班</a:t>
+            </a:r>
+            <a:endParaRPr lang="en-US" sz="1600" dirty="0"/>
+          </a:p>
+        </p:txBody>
+      </p:sp>
+      <p:sp>
+        <p:nvSpPr>
+          <p:cNvPr id="19" name="Shape 16"/>
+          <p:cNvSpPr/>
+          <p:nvPr/>
+        </p:nvSpPr>
+        <p:spPr>
+          <a:xfrm>
+            <a:off x="6053328" y="2889504"/>
+            <a:ext cx="256032" cy="0"/>
           </a:xfrm>
           <a:prstGeom prst="line">
             <a:avLst/>
@@ -3285,7 +5806,7 @@
           <a:noFill/>
           <a:ln w="30480">
             <a:solidFill>
-              <a:srgbClr val="F2A93B"/>
+              <a:srgbClr val="13C2C2"/>
             </a:solidFill>
             <a:prstDash val="solid"/>
             <a:tailEnd type="triangle"/>
@@ -3294,18 +5815,18 @@
       </p:sp>
       <p:sp>
         <p:nvSpPr>
-          <p:cNvPr id="15" name="Shape 12"/>
-          <p:cNvSpPr/>
-          <p:nvPr/>
-        </p:nvSpPr>
-        <p:spPr>
-          <a:xfrm>
-            <a:off x="9253728" y="1783080"/>
-            <a:ext cx="2194560" cy="1920240"/>
+          <p:cNvPr id="20" name="Shape 17"/>
+          <p:cNvSpPr/>
+          <p:nvPr/>
+        </p:nvSpPr>
+        <p:spPr>
+          <a:xfrm>
+            <a:off x="6327648" y="1874520"/>
+            <a:ext cx="2542032" cy="2176272"/>
           </a:xfrm>
           <a:prstGeom prst="roundRect">
             <a:avLst>
-              <a:gd name="adj" fmla="val 5714"/>
+              <a:gd name="adj" fmla="val 5042"/>
             </a:avLst>
           </a:prstGeom>
           <a:solidFill>
@@ -3321,35 +5842,79 @@
       </p:sp>
       <p:sp>
         <p:nvSpPr>
-          <p:cNvPr id="16" name="Text 13"/>
-          <p:cNvSpPr/>
-          <p:nvPr/>
-        </p:nvSpPr>
-        <p:spPr>
-          <a:xfrm>
-            <a:off x="9491472" y="2075688"/>
-            <a:ext cx="1737360" cy="822960"/>
-          </a:xfrm>
-          <a:prstGeom prst="rect">
-            <a:avLst/>
-          </a:prstGeom>
-          <a:noFill/>
-          <a:ln/>
-        </p:spPr>
-        <p:txBody>
-          <a:bodyPr wrap="square" lIns="0" tIns="0" rIns="0" bIns="0" rtlCol="0" anchor="ctr">
-            <a:normAutofit/>
-          </a:bodyPr>
-          <a:lstStyle/>
-          <a:p>
-            <a:pPr algn="ctr" indent="0" marL="0">
-              <a:lnSpc>
-                <a:spcPct val="100000"/>
-              </a:lnSpc>
-              <a:buNone/>
-            </a:pPr>
-            <a:r>
-              <a:rPr lang="en-US" sz="2400" b="1" dirty="0">
+          <p:cNvPr id="21" name="Text 18"/>
+          <p:cNvSpPr/>
+          <p:nvPr/>
+        </p:nvSpPr>
+        <p:spPr>
+          <a:xfrm>
+            <a:off x="6528816" y="2084832"/>
+            <a:ext cx="731520" cy="274320"/>
+          </a:xfrm>
+          <a:prstGeom prst="rect">
+            <a:avLst/>
+          </a:prstGeom>
+          <a:noFill/>
+          <a:ln/>
+        </p:spPr>
+        <p:txBody>
+          <a:bodyPr wrap="square" lIns="0" tIns="0" rIns="0" bIns="0" rtlCol="0" anchor="ctr">
+            <a:normAutofit/>
+          </a:bodyPr>
+          <a:lstStyle/>
+          <a:p>
+            <a:pPr indent="0" marL="0">
+              <a:lnSpc>
+                <a:spcPct val="100000"/>
+              </a:lnSpc>
+              <a:buNone/>
+            </a:pPr>
+            <a:r>
+              <a:rPr lang="en-US" sz="1400" b="1" dirty="0">
+                <a:solidFill>
+                  <a:srgbClr val="F2A93B"/>
+                </a:solidFill>
+                <a:latin typeface="Source Han Sans SC" pitchFamily="34" charset="0"/>
+                <a:ea typeface="Source Han Sans SC" pitchFamily="34" charset="-122"/>
+                <a:cs typeface="Source Han Sans SC" pitchFamily="34" charset="-120"/>
+              </a:rPr>
+              <a:t>11:00</a:t>
+            </a:r>
+            <a:endParaRPr lang="en-US" sz="1400" dirty="0"/>
+          </a:p>
+        </p:txBody>
+      </p:sp>
+      <p:sp>
+        <p:nvSpPr>
+          <p:cNvPr id="22" name="Text 19"/>
+          <p:cNvSpPr/>
+          <p:nvPr/>
+        </p:nvSpPr>
+        <p:spPr>
+          <a:xfrm>
+            <a:off x="6528816" y="2578608"/>
+            <a:ext cx="2121408" cy="365760"/>
+          </a:xfrm>
+          <a:prstGeom prst="rect">
+            <a:avLst/>
+          </a:prstGeom>
+          <a:noFill/>
+          <a:ln/>
+        </p:spPr>
+        <p:txBody>
+          <a:bodyPr wrap="square" lIns="0" tIns="0" rIns="0" bIns="0" rtlCol="0" anchor="ctr">
+            <a:normAutofit/>
+          </a:bodyPr>
+          <a:lstStyle/>
+          <a:p>
+            <a:pPr indent="0" marL="0">
+              <a:lnSpc>
+                <a:spcPct val="100000"/>
+              </a:lnSpc>
+              <a:buNone/>
+            </a:pPr>
+            <a:r>
+              <a:rPr lang="en-US" sz="2300" b="1" dirty="0">
                 <a:solidFill>
                   <a:srgbClr val="102A3A"/>
                 </a:solidFill>
@@ -3357,63 +5922,43 @@
                 <a:ea typeface="Source Han Sans SC" pitchFamily="34" charset="-122"/>
                 <a:cs typeface="Source Han Sans SC" pitchFamily="34" charset="-120"/>
               </a:rPr>
-              <a:t>序安补上</a:t>
-            </a:r>
-            <a:endParaRPr lang="en-US" sz="2400" dirty="0"/>
-          </a:p>
-          <a:p>
-            <a:pPr algn="ctr" indent="0" marL="0">
-              <a:lnSpc>
-                <a:spcPct val="100000"/>
-              </a:lnSpc>
-              <a:buNone/>
-            </a:pPr>
-            <a:r>
-              <a:rPr lang="en-US" sz="2400" b="1" dirty="0">
-                <a:solidFill>
-                  <a:srgbClr val="102A3A"/>
-                </a:solidFill>
-                <a:latin typeface="Source Han Sans SC" pitchFamily="34" charset="0"/>
-                <a:ea typeface="Source Han Sans SC" pitchFamily="34" charset="-122"/>
-                <a:cs typeface="Source Han Sans SC" pitchFamily="34" charset="-120"/>
-              </a:rPr>
-              <a:t>“提前判断”</a:t>
-            </a:r>
-            <a:endParaRPr lang="en-US" sz="2400" dirty="0"/>
-          </a:p>
-        </p:txBody>
-      </p:sp>
-      <p:sp>
-        <p:nvSpPr>
-          <p:cNvPr id="17" name="Text 14"/>
-          <p:cNvSpPr/>
-          <p:nvPr/>
-        </p:nvSpPr>
-        <p:spPr>
-          <a:xfrm>
-            <a:off x="9582912" y="3127248"/>
-            <a:ext cx="1554480" cy="256032"/>
-          </a:xfrm>
-          <a:prstGeom prst="rect">
-            <a:avLst/>
-          </a:prstGeom>
-          <a:noFill/>
-          <a:ln/>
-        </p:spPr>
-        <p:txBody>
-          <a:bodyPr wrap="square" lIns="0" tIns="0" rIns="0" bIns="0" rtlCol="0" anchor="ctr">
-            <a:normAutofit/>
-          </a:bodyPr>
-          <a:lstStyle/>
-          <a:p>
-            <a:pPr algn="ctr" indent="0" marL="0">
-              <a:lnSpc>
-                <a:spcPct val="100000"/>
-              </a:lnSpc>
-              <a:buNone/>
-            </a:pPr>
-            <a:r>
-              <a:rPr lang="en-US" sz="1400" b="1" dirty="0">
+              <a:t>等化验</a:t>
+            </a:r>
+            <a:endParaRPr lang="en-US" sz="2300" dirty="0"/>
+          </a:p>
+        </p:txBody>
+      </p:sp>
+      <p:sp>
+        <p:nvSpPr>
+          <p:cNvPr id="23" name="Text 20"/>
+          <p:cNvSpPr/>
+          <p:nvPr/>
+        </p:nvSpPr>
+        <p:spPr>
+          <a:xfrm>
+            <a:off x="6528816" y="3154680"/>
+            <a:ext cx="2121408" cy="640080"/>
+          </a:xfrm>
+          <a:prstGeom prst="rect">
+            <a:avLst/>
+          </a:prstGeom>
+          <a:noFill/>
+          <a:ln/>
+        </p:spPr>
+        <p:txBody>
+          <a:bodyPr wrap="square" lIns="0" tIns="0" rIns="0" bIns="0" rtlCol="0" anchor="ctr">
+            <a:normAutofit/>
+          </a:bodyPr>
+          <a:lstStyle/>
+          <a:p>
+            <a:pPr indent="0" marL="0">
+              <a:lnSpc>
+                <a:spcPct val="100000"/>
+              </a:lnSpc>
+              <a:buNone/>
+            </a:pPr>
+            <a:r>
+              <a:rPr lang="en-US" sz="1600" dirty="0">
                 <a:solidFill>
                   <a:srgbClr val="627987"/>
                 </a:solidFill>
@@ -3421,28 +5966,56 @@
                 <a:ea typeface="Source Han Sans SC" pitchFamily="34" charset="-122"/>
                 <a:cs typeface="Source Han Sans SC" pitchFamily="34" charset="-120"/>
               </a:rPr>
-              <a:t>不新增控制权</a:t>
-            </a:r>
-            <a:endParaRPr lang="en-US" sz="1400" dirty="0"/>
-          </a:p>
-        </p:txBody>
-      </p:sp>
-      <p:sp>
-        <p:nvSpPr>
-          <p:cNvPr id="18" name="Shape 15"/>
-          <p:cNvSpPr/>
-          <p:nvPr/>
-        </p:nvSpPr>
-        <p:spPr>
-          <a:xfrm>
-            <a:off x="777240" y="4617720"/>
-            <a:ext cx="10652760" cy="0"/>
+              <a:t>打电话追结果、跨工段核对</a:t>
+            </a:r>
+            <a:endParaRPr lang="en-US" sz="1600" dirty="0"/>
+          </a:p>
+        </p:txBody>
+      </p:sp>
+      <p:sp>
+        <p:nvSpPr>
+          <p:cNvPr id="24" name="Shape 21"/>
+          <p:cNvSpPr/>
+          <p:nvPr/>
+        </p:nvSpPr>
+        <p:spPr>
+          <a:xfrm>
+            <a:off x="8906256" y="2889504"/>
+            <a:ext cx="256032" cy="0"/>
           </a:xfrm>
           <a:prstGeom prst="line">
             <a:avLst/>
           </a:prstGeom>
           <a:noFill/>
-          <a:ln w="25400">
+          <a:ln w="30480">
+            <a:solidFill>
+              <a:srgbClr val="13C2C2"/>
+            </a:solidFill>
+            <a:prstDash val="solid"/>
+            <a:tailEnd type="triangle"/>
+          </a:ln>
+        </p:spPr>
+      </p:sp>
+      <p:sp>
+        <p:nvSpPr>
+          <p:cNvPr id="25" name="Shape 22"/>
+          <p:cNvSpPr/>
+          <p:nvPr/>
+        </p:nvSpPr>
+        <p:spPr>
+          <a:xfrm>
+            <a:off x="9180576" y="1874520"/>
+            <a:ext cx="2542032" cy="2176272"/>
+          </a:xfrm>
+          <a:prstGeom prst="roundRect">
+            <a:avLst>
+              <a:gd name="adj" fmla="val 5042"/>
+            </a:avLst>
+          </a:prstGeom>
+          <a:solidFill>
+            <a:srgbClr val="FFFFFF"/>
+          </a:solidFill>
+          <a:ln w="15240">
             <a:solidFill>
               <a:srgbClr val="DCEAF5"/>
             </a:solidFill>
@@ -3452,24 +6025,158 @@
       </p:sp>
       <p:sp>
         <p:nvSpPr>
-          <p:cNvPr id="19" name="Shape 16"/>
-          <p:cNvSpPr/>
-          <p:nvPr/>
-        </p:nvSpPr>
-        <p:spPr>
-          <a:xfrm>
-            <a:off x="1188720" y="4480560"/>
-            <a:ext cx="274320" cy="274320"/>
-          </a:xfrm>
-          <a:prstGeom prst="ellipse">
-            <a:avLst/>
+          <p:cNvPr id="26" name="Text 23"/>
+          <p:cNvSpPr/>
+          <p:nvPr/>
+        </p:nvSpPr>
+        <p:spPr>
+          <a:xfrm>
+            <a:off x="9381744" y="2084832"/>
+            <a:ext cx="731520" cy="274320"/>
+          </a:xfrm>
+          <a:prstGeom prst="rect">
+            <a:avLst/>
+          </a:prstGeom>
+          <a:noFill/>
+          <a:ln/>
+        </p:spPr>
+        <p:txBody>
+          <a:bodyPr wrap="square" lIns="0" tIns="0" rIns="0" bIns="0" rtlCol="0" anchor="ctr">
+            <a:normAutofit/>
+          </a:bodyPr>
+          <a:lstStyle/>
+          <a:p>
+            <a:pPr indent="0" marL="0">
+              <a:lnSpc>
+                <a:spcPct val="100000"/>
+              </a:lnSpc>
+              <a:buNone/>
+            </a:pPr>
+            <a:r>
+              <a:rPr lang="en-US" sz="1400" b="1" dirty="0">
+                <a:solidFill>
+                  <a:srgbClr val="13C2C2"/>
+                </a:solidFill>
+                <a:latin typeface="Source Han Sans SC" pitchFamily="34" charset="0"/>
+                <a:ea typeface="Source Han Sans SC" pitchFamily="34" charset="-122"/>
+                <a:cs typeface="Source Han Sans SC" pitchFamily="34" charset="-120"/>
+              </a:rPr>
+              <a:t>11:30</a:t>
+            </a:r>
+            <a:endParaRPr lang="en-US" sz="1400" dirty="0"/>
+          </a:p>
+        </p:txBody>
+      </p:sp>
+      <p:sp>
+        <p:nvSpPr>
+          <p:cNvPr id="27" name="Text 24"/>
+          <p:cNvSpPr/>
+          <p:nvPr/>
+        </p:nvSpPr>
+        <p:spPr>
+          <a:xfrm>
+            <a:off x="9381744" y="2578608"/>
+            <a:ext cx="2121408" cy="365760"/>
+          </a:xfrm>
+          <a:prstGeom prst="rect">
+            <a:avLst/>
+          </a:prstGeom>
+          <a:noFill/>
+          <a:ln/>
+        </p:spPr>
+        <p:txBody>
+          <a:bodyPr wrap="square" lIns="0" tIns="0" rIns="0" bIns="0" rtlCol="0" anchor="ctr">
+            <a:normAutofit/>
+          </a:bodyPr>
+          <a:lstStyle/>
+          <a:p>
+            <a:pPr indent="0" marL="0">
+              <a:lnSpc>
+                <a:spcPct val="100000"/>
+              </a:lnSpc>
+              <a:buNone/>
+            </a:pPr>
+            <a:r>
+              <a:rPr lang="en-US" sz="2300" b="1" dirty="0">
+                <a:solidFill>
+                  <a:srgbClr val="102A3A"/>
+                </a:solidFill>
+                <a:latin typeface="Source Han Sans SC" pitchFamily="34" charset="0"/>
+                <a:ea typeface="Source Han Sans SC" pitchFamily="34" charset="-122"/>
+                <a:cs typeface="Source Han Sans SC" pitchFamily="34" charset="-120"/>
+              </a:rPr>
+              <a:t>决定处置</a:t>
+            </a:r>
+            <a:endParaRPr lang="en-US" sz="2300" dirty="0"/>
+          </a:p>
+        </p:txBody>
+      </p:sp>
+      <p:sp>
+        <p:nvSpPr>
+          <p:cNvPr id="28" name="Text 25"/>
+          <p:cNvSpPr/>
+          <p:nvPr/>
+        </p:nvSpPr>
+        <p:spPr>
+          <a:xfrm>
+            <a:off x="9381744" y="3154680"/>
+            <a:ext cx="2121408" cy="640080"/>
+          </a:xfrm>
+          <a:prstGeom prst="rect">
+            <a:avLst/>
+          </a:prstGeom>
+          <a:noFill/>
+          <a:ln/>
+        </p:spPr>
+        <p:txBody>
+          <a:bodyPr wrap="square" lIns="0" tIns="0" rIns="0" bIns="0" rtlCol="0" anchor="ctr">
+            <a:normAutofit/>
+          </a:bodyPr>
+          <a:lstStyle/>
+          <a:p>
+            <a:pPr indent="0" marL="0">
+              <a:lnSpc>
+                <a:spcPct val="100000"/>
+              </a:lnSpc>
+              <a:buNone/>
+            </a:pPr>
+            <a:r>
+              <a:rPr lang="en-US" sz="1600" dirty="0">
+                <a:solidFill>
+                  <a:srgbClr val="627987"/>
+                </a:solidFill>
+                <a:latin typeface="Source Han Sans SC" pitchFamily="34" charset="0"/>
+                <a:ea typeface="Source Han Sans SC" pitchFamily="34" charset="-122"/>
+                <a:cs typeface="Source Han Sans SC" pitchFamily="34" charset="-120"/>
+              </a:rPr>
+              <a:t>靠经验排查，再写交接记录</a:t>
+            </a:r>
+            <a:endParaRPr lang="en-US" sz="1600" dirty="0"/>
+          </a:p>
+        </p:txBody>
+      </p:sp>
+      <p:sp>
+        <p:nvSpPr>
+          <p:cNvPr id="29" name="Shape 26"/>
+          <p:cNvSpPr/>
+          <p:nvPr/>
+        </p:nvSpPr>
+        <p:spPr>
+          <a:xfrm>
+            <a:off x="713232" y="4590288"/>
+            <a:ext cx="10744200" cy="1170432"/>
+          </a:xfrm>
+          <a:prstGeom prst="roundRect">
+            <a:avLst>
+              <a:gd name="adj" fmla="val 9375"/>
+            </a:avLst>
           </a:prstGeom>
           <a:solidFill>
-            <a:srgbClr val="13C2C2"/>
+            <a:srgbClr val="061B2A"/>
           </a:solidFill>
-          <a:ln w="12700">
+          <a:ln w="15240">
             <a:solidFill>
-              <a:srgbClr val="13C2C2"/>
+              <a:srgbClr val="061B2A"/>
             </a:solidFill>
             <a:prstDash val="solid"/>
           </a:ln>
@@ -3477,14 +6184,58 @@
       </p:sp>
       <p:sp>
         <p:nvSpPr>
-          <p:cNvPr id="20" name="Text 17"/>
-          <p:cNvSpPr/>
-          <p:nvPr/>
-        </p:nvSpPr>
-        <p:spPr>
-          <a:xfrm>
-            <a:off x="594360" y="4882896"/>
-            <a:ext cx="1481328" cy="310896"/>
+          <p:cNvPr id="30" name="Text 27"/>
+          <p:cNvSpPr/>
+          <p:nvPr/>
+        </p:nvSpPr>
+        <p:spPr>
+          <a:xfrm>
+            <a:off x="960120" y="4773168"/>
+            <a:ext cx="2743200" cy="310896"/>
+          </a:xfrm>
+          <a:prstGeom prst="rect">
+            <a:avLst/>
+          </a:prstGeom>
+          <a:noFill/>
+          <a:ln/>
+        </p:spPr>
+        <p:txBody>
+          <a:bodyPr wrap="square" lIns="0" tIns="0" rIns="0" bIns="0" rtlCol="0" anchor="ctr">
+            <a:normAutofit/>
+          </a:bodyPr>
+          <a:lstStyle/>
+          <a:p>
+            <a:pPr indent="0" marL="0">
+              <a:lnSpc>
+                <a:spcPct val="100000"/>
+              </a:lnSpc>
+              <a:buNone/>
+            </a:pPr>
+            <a:r>
+              <a:rPr lang="en-US" sz="1800" b="1" dirty="0">
+                <a:solidFill>
+                  <a:srgbClr val="13C2C2"/>
+                </a:solidFill>
+                <a:latin typeface="Source Han Sans SC" pitchFamily="34" charset="0"/>
+                <a:ea typeface="Source Han Sans SC" pitchFamily="34" charset="-122"/>
+                <a:cs typeface="Source Han Sans SC" pitchFamily="34" charset="-120"/>
+              </a:rPr>
+              <a:t>没有序安时的具体损耗</a:t>
+            </a:r>
+            <a:endParaRPr lang="en-US" sz="1800" dirty="0"/>
+          </a:p>
+        </p:txBody>
+      </p:sp>
+      <p:sp>
+        <p:nvSpPr>
+          <p:cNvPr id="31" name="Text 28"/>
+          <p:cNvSpPr/>
+          <p:nvPr/>
+        </p:nvSpPr>
+        <p:spPr>
+          <a:xfrm>
+            <a:off x="3675888" y="4700016"/>
+            <a:ext cx="7150608" cy="658368"/>
           </a:xfrm>
           <a:prstGeom prst="rect">
             <a:avLst/>
@@ -3505,67 +6256,18 @@
               <a:buNone/>
             </a:pPr>
             <a:r>
-              <a:rPr lang="en-US" sz="1700" b="1" dirty="0">
-                <a:solidFill>
-                  <a:srgbClr val="102A3A"/>
-                </a:solidFill>
-                <a:latin typeface="Source Han Sans SC" pitchFamily="34" charset="0"/>
-                <a:ea typeface="Source Han Sans SC" pitchFamily="34" charset="-122"/>
-                <a:cs typeface="Source Han Sans SC" pitchFamily="34" charset="-120"/>
-              </a:rPr>
-              <a:t>磷酸生产</a:t>
-            </a:r>
-            <a:endParaRPr lang="en-US" sz="1700" dirty="0"/>
-          </a:p>
-        </p:txBody>
-      </p:sp>
-      <p:sp>
-        <p:nvSpPr>
-          <p:cNvPr id="21" name="Shape 18"/>
-          <p:cNvSpPr/>
-          <p:nvPr/>
-        </p:nvSpPr>
-        <p:spPr>
-          <a:xfrm>
-            <a:off x="3950208" y="4480560"/>
-            <a:ext cx="274320" cy="274320"/>
-          </a:xfrm>
-          <a:prstGeom prst="ellipse">
-            <a:avLst/>
-          </a:prstGeom>
-          <a:solidFill>
-            <a:srgbClr val="13C2C2"/>
-          </a:solidFill>
-          <a:ln w="12700">
-            <a:solidFill>
-              <a:srgbClr val="13C2C2"/>
-            </a:solidFill>
-            <a:prstDash val="solid"/>
-          </a:ln>
-        </p:spPr>
-      </p:sp>
-      <p:sp>
-        <p:nvSpPr>
-          <p:cNvPr id="22" name="Text 19"/>
-          <p:cNvSpPr/>
-          <p:nvPr/>
-        </p:nvSpPr>
-        <p:spPr>
-          <a:xfrm>
-            <a:off x="3355848" y="4882896"/>
-            <a:ext cx="1481328" cy="310896"/>
-          </a:xfrm>
-          <a:prstGeom prst="rect">
-            <a:avLst/>
-          </a:prstGeom>
-          <a:noFill/>
-          <a:ln/>
-        </p:spPr>
-        <p:txBody>
-          <a:bodyPr wrap="square" lIns="0" tIns="0" rIns="0" bIns="0" rtlCol="0" anchor="ctr">
-            <a:normAutofit/>
-          </a:bodyPr>
-          <a:lstStyle/>
+              <a:rPr lang="en-US" sz="1600" b="1" dirty="0">
+                <a:solidFill>
+                  <a:srgbClr val="FFFFFF"/>
+                </a:solidFill>
+                <a:latin typeface="Source Han Sans SC" pitchFamily="34" charset="0"/>
+                <a:ea typeface="Source Han Sans SC" pitchFamily="34" charset="-122"/>
+                <a:cs typeface="Source Han Sans SC" pitchFamily="34" charset="-120"/>
+              </a:rPr>
+              <a:t>4 处信息反复核对  ·  等待吃掉处置窗口</a:t>
+            </a:r>
+            <a:endParaRPr lang="en-US" sz="1600" dirty="0"/>
+          </a:p>
           <a:p>
             <a:pPr algn="ctr" indent="0" marL="0">
               <a:lnSpc>
@@ -3574,199 +6276,17 @@
               <a:buNone/>
             </a:pPr>
             <a:r>
-              <a:rPr lang="en-US" sz="1700" b="1" dirty="0">
-                <a:solidFill>
-                  <a:srgbClr val="102A3A"/>
-                </a:solidFill>
-                <a:latin typeface="Source Han Sans SC" pitchFamily="34" charset="0"/>
-                <a:ea typeface="Source Han Sans SC" pitchFamily="34" charset="-122"/>
-                <a:cs typeface="Source Han Sans SC" pitchFamily="34" charset="-120"/>
-              </a:rPr>
-              <a:t>煤化工公辅</a:t>
-            </a:r>
-            <a:endParaRPr lang="en-US" sz="1700" dirty="0"/>
-          </a:p>
-        </p:txBody>
-      </p:sp>
-      <p:sp>
-        <p:nvSpPr>
-          <p:cNvPr id="23" name="Shape 20"/>
-          <p:cNvSpPr/>
-          <p:nvPr/>
-        </p:nvSpPr>
-        <p:spPr>
-          <a:xfrm>
-            <a:off x="6711696" y="4480560"/>
-            <a:ext cx="274320" cy="274320"/>
-          </a:xfrm>
-          <a:prstGeom prst="ellipse">
-            <a:avLst/>
-          </a:prstGeom>
-          <a:solidFill>
-            <a:srgbClr val="F2A93B"/>
-          </a:solidFill>
-          <a:ln w="12700">
-            <a:solidFill>
-              <a:srgbClr val="F2A93B"/>
-            </a:solidFill>
-            <a:prstDash val="solid"/>
-          </a:ln>
-        </p:spPr>
-      </p:sp>
-      <p:sp>
-        <p:nvSpPr>
-          <p:cNvPr id="24" name="Text 21"/>
-          <p:cNvSpPr/>
-          <p:nvPr/>
-        </p:nvSpPr>
-        <p:spPr>
-          <a:xfrm>
-            <a:off x="6117336" y="4882896"/>
-            <a:ext cx="1481328" cy="310896"/>
-          </a:xfrm>
-          <a:prstGeom prst="rect">
-            <a:avLst/>
-          </a:prstGeom>
-          <a:noFill/>
-          <a:ln/>
-        </p:spPr>
-        <p:txBody>
-          <a:bodyPr wrap="square" lIns="0" tIns="0" rIns="0" bIns="0" rtlCol="0" anchor="ctr">
-            <a:normAutofit/>
-          </a:bodyPr>
-          <a:lstStyle/>
-          <a:p>
-            <a:pPr algn="ctr" indent="0" marL="0">
-              <a:lnSpc>
-                <a:spcPct val="100000"/>
-              </a:lnSpc>
-              <a:buNone/>
-            </a:pPr>
-            <a:r>
-              <a:rPr lang="en-US" sz="1700" b="1" dirty="0">
-                <a:solidFill>
-                  <a:srgbClr val="102A3A"/>
-                </a:solidFill>
-                <a:latin typeface="Source Han Sans SC" pitchFamily="34" charset="0"/>
-                <a:ea typeface="Source Han Sans SC" pitchFamily="34" charset="-122"/>
-                <a:cs typeface="Source Han Sans SC" pitchFamily="34" charset="-120"/>
-              </a:rPr>
-              <a:t>固废与水系统</a:t>
-            </a:r>
-            <a:endParaRPr lang="en-US" sz="1700" dirty="0"/>
-          </a:p>
-        </p:txBody>
-      </p:sp>
-      <p:sp>
-        <p:nvSpPr>
-          <p:cNvPr id="25" name="Shape 22"/>
-          <p:cNvSpPr/>
-          <p:nvPr/>
-        </p:nvSpPr>
-        <p:spPr>
-          <a:xfrm>
-            <a:off x="9473184" y="4480560"/>
-            <a:ext cx="274320" cy="274320"/>
-          </a:xfrm>
-          <a:prstGeom prst="ellipse">
-            <a:avLst/>
-          </a:prstGeom>
-          <a:solidFill>
-            <a:srgbClr val="13C2C2"/>
-          </a:solidFill>
-          <a:ln w="12700">
-            <a:solidFill>
-              <a:srgbClr val="13C2C2"/>
-            </a:solidFill>
-            <a:prstDash val="solid"/>
-          </a:ln>
-        </p:spPr>
-      </p:sp>
-      <p:sp>
-        <p:nvSpPr>
-          <p:cNvPr id="26" name="Text 23"/>
-          <p:cNvSpPr/>
-          <p:nvPr/>
-        </p:nvSpPr>
-        <p:spPr>
-          <a:xfrm>
-            <a:off x="8878824" y="4882896"/>
-            <a:ext cx="1481328" cy="310896"/>
-          </a:xfrm>
-          <a:prstGeom prst="rect">
-            <a:avLst/>
-          </a:prstGeom>
-          <a:noFill/>
-          <a:ln/>
-        </p:spPr>
-        <p:txBody>
-          <a:bodyPr wrap="square" lIns="0" tIns="0" rIns="0" bIns="0" rtlCol="0" anchor="ctr">
-            <a:normAutofit/>
-          </a:bodyPr>
-          <a:lstStyle/>
-          <a:p>
-            <a:pPr algn="ctr" indent="0" marL="0">
-              <a:lnSpc>
-                <a:spcPct val="100000"/>
-              </a:lnSpc>
-              <a:buNone/>
-            </a:pPr>
-            <a:r>
-              <a:rPr lang="en-US" sz="1700" b="1" dirty="0">
-                <a:solidFill>
-                  <a:srgbClr val="102A3A"/>
-                </a:solidFill>
-                <a:latin typeface="Source Han Sans SC" pitchFamily="34" charset="0"/>
-                <a:ea typeface="Source Han Sans SC" pitchFamily="34" charset="-122"/>
-                <a:cs typeface="Source Han Sans SC" pitchFamily="34" charset="-120"/>
-              </a:rPr>
-              <a:t>下游产品</a:t>
-            </a:r>
-            <a:endParaRPr lang="en-US" sz="1700" dirty="0"/>
-          </a:p>
-        </p:txBody>
-      </p:sp>
-      <p:sp>
-        <p:nvSpPr>
-          <p:cNvPr id="27" name="Text 24"/>
-          <p:cNvSpPr/>
-          <p:nvPr/>
-        </p:nvSpPr>
-        <p:spPr>
-          <a:xfrm>
-            <a:off x="1005840" y="5650992"/>
-            <a:ext cx="10149840" cy="393192"/>
-          </a:xfrm>
-          <a:prstGeom prst="rect">
-            <a:avLst/>
-          </a:prstGeom>
-          <a:noFill/>
-          <a:ln/>
-        </p:spPr>
-        <p:txBody>
-          <a:bodyPr wrap="square" lIns="0" tIns="0" rIns="0" bIns="0" rtlCol="0" anchor="ctr">
-            <a:normAutofit/>
-          </a:bodyPr>
-          <a:lstStyle/>
-          <a:p>
-            <a:pPr algn="ctr" indent="0" marL="0">
-              <a:lnSpc>
-                <a:spcPct val="100000"/>
-              </a:lnSpc>
-              <a:buNone/>
-            </a:pPr>
-            <a:r>
-              <a:rPr lang="en-US" sz="2000" b="1" dirty="0">
-                <a:solidFill>
-                  <a:srgbClr val="102A3A"/>
-                </a:solidFill>
-                <a:latin typeface="Source Han Sans SC" pitchFamily="34" charset="0"/>
-                <a:ea typeface="Source Han Sans SC" pitchFamily="34" charset="-122"/>
-                <a:cs typeface="Source Han Sans SC" pitchFamily="34" charset="-120"/>
-              </a:rPr>
-              <a:t>园区不是四个孤岛：一个环节的偏移，会沿物料、能源和环境链向后传递。</a:t>
-            </a:r>
-            <a:endParaRPr lang="en-US" sz="2000" dirty="0"/>
+              <a:rPr lang="en-US" sz="1600" b="1" dirty="0">
+                <a:solidFill>
+                  <a:srgbClr val="FFFFFF"/>
+                </a:solidFill>
+                <a:latin typeface="Source Han Sans SC" pitchFamily="34" charset="0"/>
+                <a:ea typeface="Source Han Sans SC" pitchFamily="34" charset="-122"/>
+                <a:cs typeface="Source Han Sans SC" pitchFamily="34" charset="-120"/>
+              </a:rPr>
+              <a:t>高经验人员被重复排查占用  ·  事后证据难还原</a:t>
+            </a:r>
+            <a:endParaRPr lang="en-US" sz="1600" dirty="0"/>
           </a:p>
         </p:txBody>
       </p:sp>
@@ -5797,7 +8317,7 @@
                 <a:ea typeface="Source Han Sans SC" pitchFamily="34" charset="-122"/>
                 <a:cs typeface="Source Han Sans SC" pitchFamily="34" charset="-120"/>
               </a:rPr>
-              <a:t>03 / AI 架构</a:t>
+              <a:t>03 / 真实 AI 链路</a:t>
             </a:r>
             <a:endParaRPr lang="en-US" sz="1200" dirty="0"/>
           </a:p>
@@ -5841,7 +8361,7 @@
                 <a:ea typeface="Source Han Sans SC" pitchFamily="34" charset="-122"/>
                 <a:cs typeface="Source Han Sans SC" pitchFamily="34" charset="-120"/>
               </a:rPr>
-              <a:t>诊断模型做判断，语言模型负责讲明白</a:t>
+              <a:t>诊断模型做判断，DeepSeek 把证据讲明白</a:t>
             </a:r>
             <a:endParaRPr lang="en-US" sz="3000" dirty="0"/>
           </a:p>
@@ -5885,7 +8405,7 @@
                 <a:ea typeface="Source Han Sans SC" pitchFamily="34" charset="-122"/>
                 <a:cs typeface="Source Han Sans SC" pitchFamily="34" charset="-120"/>
               </a:rPr>
-              <a:t>语言模型不直接替代过程诊断</a:t>
+              <a:t>公网实测：llm_enhanced / deepseek-v4-flash</a:t>
             </a:r>
             <a:endParaRPr lang="en-US" sz="1600" dirty="0"/>
           </a:p>
@@ -5973,12 +8493,12 @@
         </p:nvSpPr>
         <p:spPr>
           <a:xfrm>
-            <a:off x="438912" y="1938528"/>
-            <a:ext cx="1600200" cy="2029968"/>
+            <a:off x="658368" y="1755648"/>
+            <a:ext cx="3858768" cy="621792"/>
           </a:xfrm>
           <a:prstGeom prst="roundRect">
             <a:avLst>
-              <a:gd name="adj" fmla="val 6857"/>
+              <a:gd name="adj" fmla="val 17647"/>
             </a:avLst>
           </a:prstGeom>
           <a:solidFill>
@@ -6000,29 +8520,29 @@
         </p:nvSpPr>
         <p:spPr>
           <a:xfrm>
-            <a:off x="557784" y="2286000"/>
-            <a:ext cx="1362456" cy="530352"/>
-          </a:xfrm>
-          <a:prstGeom prst="rect">
-            <a:avLst/>
-          </a:prstGeom>
-          <a:noFill/>
-          <a:ln/>
-        </p:spPr>
-        <p:txBody>
-          <a:bodyPr wrap="square" lIns="0" tIns="0" rIns="0" bIns="0" rtlCol="0" anchor="ctr">
-            <a:normAutofit/>
-          </a:bodyPr>
-          <a:lstStyle/>
-          <a:p>
-            <a:pPr algn="ctr" indent="0" marL="0">
-              <a:lnSpc>
-                <a:spcPct val="100000"/>
-              </a:lnSpc>
-              <a:buNone/>
-            </a:pPr>
-            <a:r>
-              <a:rPr lang="en-US" sz="1800" b="1" dirty="0">
+            <a:off x="859536" y="1874520"/>
+            <a:ext cx="1417320" cy="274320"/>
+          </a:xfrm>
+          <a:prstGeom prst="rect">
+            <a:avLst/>
+          </a:prstGeom>
+          <a:noFill/>
+          <a:ln/>
+        </p:spPr>
+        <p:txBody>
+          <a:bodyPr wrap="square" lIns="0" tIns="0" rIns="0" bIns="0" rtlCol="0" anchor="ctr">
+            <a:normAutofit/>
+          </a:bodyPr>
+          <a:lstStyle/>
+          <a:p>
+            <a:pPr indent="0" marL="0">
+              <a:lnSpc>
+                <a:spcPct val="100000"/>
+              </a:lnSpc>
+              <a:buNone/>
+            </a:pPr>
+            <a:r>
+              <a:rPr lang="en-US" sz="1600" b="1" dirty="0">
                 <a:solidFill>
                   <a:srgbClr val="102A3A"/>
                 </a:solidFill>
@@ -6030,9 +8550,9 @@
                 <a:ea typeface="Source Han Sans SC" pitchFamily="34" charset="-122"/>
                 <a:cs typeface="Source Han Sans SC" pitchFamily="34" charset="-120"/>
               </a:rPr>
-              <a:t>实时变量 / 软测量</a:t>
-            </a:r>
-            <a:endParaRPr lang="en-US" sz="1800" dirty="0"/>
+              <a:t>实时变量</a:t>
+            </a:r>
+            <a:endParaRPr lang="en-US" sz="1600" dirty="0"/>
           </a:p>
         </p:txBody>
       </p:sp>
@@ -6044,29 +8564,29 @@
         </p:nvSpPr>
         <p:spPr>
           <a:xfrm>
-            <a:off x="566928" y="3044952"/>
-            <a:ext cx="1344168" cy="594360"/>
-          </a:xfrm>
-          <a:prstGeom prst="rect">
-            <a:avLst/>
-          </a:prstGeom>
-          <a:noFill/>
-          <a:ln/>
-        </p:spPr>
-        <p:txBody>
-          <a:bodyPr wrap="square" lIns="0" tIns="0" rIns="0" bIns="0" rtlCol="0" anchor="ctr">
-            <a:normAutofit/>
-          </a:bodyPr>
-          <a:lstStyle/>
-          <a:p>
-            <a:pPr algn="ctr" indent="0" marL="0">
-              <a:lnSpc>
-                <a:spcPct val="100000"/>
-              </a:lnSpc>
-              <a:buNone/>
-            </a:pPr>
-            <a:r>
-              <a:rPr lang="en-US" sz="1300" dirty="0">
+            <a:off x="2212848" y="1874520"/>
+            <a:ext cx="2011680" cy="274320"/>
+          </a:xfrm>
+          <a:prstGeom prst="rect">
+            <a:avLst/>
+          </a:prstGeom>
+          <a:noFill/>
+          <a:ln/>
+        </p:spPr>
+        <p:txBody>
+          <a:bodyPr wrap="square" lIns="0" tIns="0" rIns="0" bIns="0" rtlCol="0" anchor="ctr">
+            <a:normAutofit/>
+          </a:bodyPr>
+          <a:lstStyle/>
+          <a:p>
+            <a:pPr algn="r" indent="0" marL="0">
+              <a:lnSpc>
+                <a:spcPct val="100000"/>
+              </a:lnSpc>
+              <a:buNone/>
+            </a:pPr>
+            <a:r>
+              <a:rPr lang="en-US" sz="1400" dirty="0">
                 <a:solidFill>
                   <a:srgbClr val="627987"/>
                 </a:solidFill>
@@ -6074,9 +8594,9 @@
                 <a:ea typeface="Source Han Sans SC" pitchFamily="34" charset="-122"/>
                 <a:cs typeface="Source Han Sans SC" pitchFamily="34" charset="-120"/>
               </a:rPr>
-              <a:t>DCS、传感器、化验历史</a:t>
-            </a:r>
-            <a:endParaRPr lang="en-US" sz="1300" dirty="0"/>
+              <a:t>DCS / 传感器</a:t>
+            </a:r>
+            <a:endParaRPr lang="en-US" sz="1400" dirty="0"/>
           </a:p>
         </p:txBody>
       </p:sp>
@@ -6088,8 +8608,8 @@
         </p:nvSpPr>
         <p:spPr>
           <a:xfrm>
-            <a:off x="2057400" y="2962656"/>
-            <a:ext cx="256032" cy="0"/>
+            <a:off x="2441448" y="2414016"/>
+            <a:ext cx="9144" cy="0"/>
           </a:xfrm>
           <a:prstGeom prst="line">
             <a:avLst/>
@@ -6112,12 +8632,12 @@
         </p:nvSpPr>
         <p:spPr>
           <a:xfrm>
-            <a:off x="2359152" y="1938528"/>
-            <a:ext cx="1600200" cy="2029968"/>
+            <a:off x="658368" y="2596896"/>
+            <a:ext cx="3858768" cy="621792"/>
           </a:xfrm>
           <a:prstGeom prst="roundRect">
             <a:avLst>
-              <a:gd name="adj" fmla="val 6857"/>
+              <a:gd name="adj" fmla="val 17647"/>
             </a:avLst>
           </a:prstGeom>
           <a:solidFill>
@@ -6139,29 +8659,29 @@
         </p:nvSpPr>
         <p:spPr>
           <a:xfrm>
-            <a:off x="2478024" y="2286000"/>
-            <a:ext cx="1362456" cy="530352"/>
-          </a:xfrm>
-          <a:prstGeom prst="rect">
-            <a:avLst/>
-          </a:prstGeom>
-          <a:noFill/>
-          <a:ln/>
-        </p:spPr>
-        <p:txBody>
-          <a:bodyPr wrap="square" lIns="0" tIns="0" rIns="0" bIns="0" rtlCol="0" anchor="ctr">
-            <a:normAutofit/>
-          </a:bodyPr>
-          <a:lstStyle/>
-          <a:p>
-            <a:pPr algn="ctr" indent="0" marL="0">
-              <a:lnSpc>
-                <a:spcPct val="100000"/>
-              </a:lnSpc>
-              <a:buNone/>
-            </a:pPr>
-            <a:r>
-              <a:rPr lang="en-US" sz="1800" b="1" dirty="0">
+            <a:off x="859536" y="2715768"/>
+            <a:ext cx="1417320" cy="274320"/>
+          </a:xfrm>
+          <a:prstGeom prst="rect">
+            <a:avLst/>
+          </a:prstGeom>
+          <a:noFill/>
+          <a:ln/>
+        </p:spPr>
+        <p:txBody>
+          <a:bodyPr wrap="square" lIns="0" tIns="0" rIns="0" bIns="0" rtlCol="0" anchor="ctr">
+            <a:normAutofit/>
+          </a:bodyPr>
+          <a:lstStyle/>
+          <a:p>
+            <a:pPr indent="0" marL="0">
+              <a:lnSpc>
+                <a:spcPct val="100000"/>
+              </a:lnSpc>
+              <a:buNone/>
+            </a:pPr>
+            <a:r>
+              <a:rPr lang="en-US" sz="1600" b="1" dirty="0">
                 <a:solidFill>
                   <a:srgbClr val="102A3A"/>
                 </a:solidFill>
@@ -6169,9 +8689,9 @@
                 <a:ea typeface="Source Han Sans SC" pitchFamily="34" charset="-122"/>
                 <a:cs typeface="Source Han Sans SC" pitchFamily="34" charset="-120"/>
               </a:rPr>
-              <a:t>异常窗口</a:t>
-            </a:r>
-            <a:endParaRPr lang="en-US" sz="1800" dirty="0"/>
+              <a:t>诊断模型</a:t>
+            </a:r>
+            <a:endParaRPr lang="en-US" sz="1600" dirty="0"/>
           </a:p>
         </p:txBody>
       </p:sp>
@@ -6183,29 +8703,29 @@
         </p:nvSpPr>
         <p:spPr>
           <a:xfrm>
-            <a:off x="2487168" y="3044952"/>
-            <a:ext cx="1344168" cy="594360"/>
-          </a:xfrm>
-          <a:prstGeom prst="rect">
-            <a:avLst/>
-          </a:prstGeom>
-          <a:noFill/>
-          <a:ln/>
-        </p:spPr>
-        <p:txBody>
-          <a:bodyPr wrap="square" lIns="0" tIns="0" rIns="0" bIns="0" rtlCol="0" anchor="ctr">
-            <a:normAutofit/>
-          </a:bodyPr>
-          <a:lstStyle/>
-          <a:p>
-            <a:pPr algn="ctr" indent="0" marL="0">
-              <a:lnSpc>
-                <a:spcPct val="100000"/>
-              </a:lnSpc>
-              <a:buNone/>
-            </a:pPr>
-            <a:r>
-              <a:rPr lang="en-US" sz="1300" dirty="0">
+            <a:off x="2212848" y="2715768"/>
+            <a:ext cx="2011680" cy="274320"/>
+          </a:xfrm>
+          <a:prstGeom prst="rect">
+            <a:avLst/>
+          </a:prstGeom>
+          <a:noFill/>
+          <a:ln/>
+        </p:spPr>
+        <p:txBody>
+          <a:bodyPr wrap="square" lIns="0" tIns="0" rIns="0" bIns="0" rtlCol="0" anchor="ctr">
+            <a:normAutofit/>
+          </a:bodyPr>
+          <a:lstStyle/>
+          <a:p>
+            <a:pPr algn="r" indent="0" marL="0">
+              <a:lnSpc>
+                <a:spcPct val="100000"/>
+              </a:lnSpc>
+              <a:buNone/>
+            </a:pPr>
+            <a:r>
+              <a:rPr lang="en-US" sz="1400" dirty="0">
                 <a:solidFill>
                   <a:srgbClr val="627987"/>
                 </a:solidFill>
@@ -6213,9 +8733,9 @@
                 <a:ea typeface="Source Han Sans SC" pitchFamily="34" charset="-122"/>
                 <a:cs typeface="Source Han Sans SC" pitchFamily="34" charset="-120"/>
               </a:rPr>
-              <a:t>预测未来风险区间</a:t>
-            </a:r>
-            <a:endParaRPr lang="en-US" sz="1300" dirty="0"/>
+              <a:t>异常窗口与候选</a:t>
+            </a:r>
+            <a:endParaRPr lang="en-US" sz="1400" dirty="0"/>
           </a:p>
         </p:txBody>
       </p:sp>
@@ -6227,8 +8747,8 @@
         </p:nvSpPr>
         <p:spPr>
           <a:xfrm>
-            <a:off x="3977640" y="2962656"/>
-            <a:ext cx="256032" cy="0"/>
+            <a:off x="2441448" y="3255264"/>
+            <a:ext cx="9144" cy="0"/>
           </a:xfrm>
           <a:prstGeom prst="line">
             <a:avLst/>
@@ -6251,12 +8771,151 @@
         </p:nvSpPr>
         <p:spPr>
           <a:xfrm>
-            <a:off x="4279392" y="1938528"/>
-            <a:ext cx="1600200" cy="2029968"/>
+            <a:off x="658368" y="3438144"/>
+            <a:ext cx="3858768" cy="621792"/>
           </a:xfrm>
           <a:prstGeom prst="roundRect">
             <a:avLst>
-              <a:gd name="adj" fmla="val 6857"/>
+              <a:gd name="adj" fmla="val 17647"/>
+            </a:avLst>
+          </a:prstGeom>
+          <a:solidFill>
+            <a:srgbClr val="FFFFFF"/>
+          </a:solidFill>
+          <a:ln w="15240">
+            <a:solidFill>
+              <a:srgbClr val="DCEAF5"/>
+            </a:solidFill>
+            <a:prstDash val="solid"/>
+          </a:ln>
+        </p:spPr>
+      </p:sp>
+      <p:sp>
+        <p:nvSpPr>
+          <p:cNvPr id="19" name="Text 16"/>
+          <p:cNvSpPr/>
+          <p:nvPr/>
+        </p:nvSpPr>
+        <p:spPr>
+          <a:xfrm>
+            <a:off x="859536" y="3557016"/>
+            <a:ext cx="1417320" cy="274320"/>
+          </a:xfrm>
+          <a:prstGeom prst="rect">
+            <a:avLst/>
+          </a:prstGeom>
+          <a:noFill/>
+          <a:ln/>
+        </p:spPr>
+        <p:txBody>
+          <a:bodyPr wrap="square" lIns="0" tIns="0" rIns="0" bIns="0" rtlCol="0" anchor="ctr">
+            <a:normAutofit/>
+          </a:bodyPr>
+          <a:lstStyle/>
+          <a:p>
+            <a:pPr indent="0" marL="0">
+              <a:lnSpc>
+                <a:spcPct val="100000"/>
+              </a:lnSpc>
+              <a:buNone/>
+            </a:pPr>
+            <a:r>
+              <a:rPr lang="en-US" sz="1600" b="1" dirty="0">
+                <a:solidFill>
+                  <a:srgbClr val="102A3A"/>
+                </a:solidFill>
+                <a:latin typeface="Source Han Sans SC" pitchFamily="34" charset="0"/>
+                <a:ea typeface="Source Han Sans SC" pitchFamily="34" charset="-122"/>
+                <a:cs typeface="Source Han Sans SC" pitchFamily="34" charset="-120"/>
+              </a:rPr>
+              <a:t>结构化证据</a:t>
+            </a:r>
+            <a:endParaRPr lang="en-US" sz="1600" dirty="0"/>
+          </a:p>
+        </p:txBody>
+      </p:sp>
+      <p:sp>
+        <p:nvSpPr>
+          <p:cNvPr id="20" name="Text 17"/>
+          <p:cNvSpPr/>
+          <p:nvPr/>
+        </p:nvSpPr>
+        <p:spPr>
+          <a:xfrm>
+            <a:off x="2212848" y="3557016"/>
+            <a:ext cx="2011680" cy="274320"/>
+          </a:xfrm>
+          <a:prstGeom prst="rect">
+            <a:avLst/>
+          </a:prstGeom>
+          <a:noFill/>
+          <a:ln/>
+        </p:spPr>
+        <p:txBody>
+          <a:bodyPr wrap="square" lIns="0" tIns="0" rIns="0" bIns="0" rtlCol="0" anchor="ctr">
+            <a:normAutofit/>
+          </a:bodyPr>
+          <a:lstStyle/>
+          <a:p>
+            <a:pPr algn="r" indent="0" marL="0">
+              <a:lnSpc>
+                <a:spcPct val="100000"/>
+              </a:lnSpc>
+              <a:buNone/>
+            </a:pPr>
+            <a:r>
+              <a:rPr lang="en-US" sz="1400" dirty="0">
+                <a:solidFill>
+                  <a:srgbClr val="627987"/>
+                </a:solidFill>
+                <a:latin typeface="Source Han Sans SC" pitchFamily="34" charset="0"/>
+                <a:ea typeface="Source Han Sans SC" pitchFamily="34" charset="-122"/>
+                <a:cs typeface="Source Han Sans SC" pitchFamily="34" charset="-120"/>
+              </a:rPr>
+              <a:t>PH-P / PH-E / Q-E</a:t>
+            </a:r>
+            <a:endParaRPr lang="en-US" sz="1400" dirty="0"/>
+          </a:p>
+        </p:txBody>
+      </p:sp>
+      <p:sp>
+        <p:nvSpPr>
+          <p:cNvPr id="21" name="Shape 18"/>
+          <p:cNvSpPr/>
+          <p:nvPr/>
+        </p:nvSpPr>
+        <p:spPr>
+          <a:xfrm>
+            <a:off x="2441448" y="4096512"/>
+            <a:ext cx="9144" cy="0"/>
+          </a:xfrm>
+          <a:prstGeom prst="line">
+            <a:avLst/>
+          </a:prstGeom>
+          <a:noFill/>
+          <a:ln w="30480">
+            <a:solidFill>
+              <a:srgbClr val="13C2C2"/>
+            </a:solidFill>
+            <a:prstDash val="solid"/>
+            <a:tailEnd type="triangle"/>
+          </a:ln>
+        </p:spPr>
+      </p:sp>
+      <p:sp>
+        <p:nvSpPr>
+          <p:cNvPr id="22" name="Shape 19"/>
+          <p:cNvSpPr/>
+          <p:nvPr/>
+        </p:nvSpPr>
+        <p:spPr>
+          <a:xfrm>
+            <a:off x="658368" y="4279392"/>
+            <a:ext cx="3858768" cy="621792"/>
+          </a:xfrm>
+          <a:prstGeom prst="roundRect">
+            <a:avLst>
+              <a:gd name="adj" fmla="val 17647"/>
             </a:avLst>
           </a:prstGeom>
           <a:solidFill>
@@ -6272,35 +8931,35 @@
       </p:sp>
       <p:sp>
         <p:nvSpPr>
-          <p:cNvPr id="19" name="Text 16"/>
-          <p:cNvSpPr/>
-          <p:nvPr/>
-        </p:nvSpPr>
-        <p:spPr>
-          <a:xfrm>
-            <a:off x="4398264" y="2286000"/>
-            <a:ext cx="1362456" cy="530352"/>
-          </a:xfrm>
-          <a:prstGeom prst="rect">
-            <a:avLst/>
-          </a:prstGeom>
-          <a:noFill/>
-          <a:ln/>
-        </p:spPr>
-        <p:txBody>
-          <a:bodyPr wrap="square" lIns="0" tIns="0" rIns="0" bIns="0" rtlCol="0" anchor="ctr">
-            <a:normAutofit/>
-          </a:bodyPr>
-          <a:lstStyle/>
-          <a:p>
-            <a:pPr algn="ctr" indent="0" marL="0">
-              <a:lnSpc>
-                <a:spcPct val="100000"/>
-              </a:lnSpc>
-              <a:buNone/>
-            </a:pPr>
-            <a:r>
-              <a:rPr lang="en-US" sz="1800" b="1" dirty="0">
+          <p:cNvPr id="23" name="Text 20"/>
+          <p:cNvSpPr/>
+          <p:nvPr/>
+        </p:nvSpPr>
+        <p:spPr>
+          <a:xfrm>
+            <a:off x="859536" y="4398264"/>
+            <a:ext cx="1417320" cy="274320"/>
+          </a:xfrm>
+          <a:prstGeom prst="rect">
+            <a:avLst/>
+          </a:prstGeom>
+          <a:noFill/>
+          <a:ln/>
+        </p:spPr>
+        <p:txBody>
+          <a:bodyPr wrap="square" lIns="0" tIns="0" rIns="0" bIns="0" rtlCol="0" anchor="ctr">
+            <a:normAutofit/>
+          </a:bodyPr>
+          <a:lstStyle/>
+          <a:p>
+            <a:pPr indent="0" marL="0">
+              <a:lnSpc>
+                <a:spcPct val="100000"/>
+              </a:lnSpc>
+              <a:buNone/>
+            </a:pPr>
+            <a:r>
+              <a:rPr lang="en-US" sz="1600" b="1" dirty="0">
                 <a:solidFill>
                   <a:srgbClr val="FFFFFF"/>
                 </a:solidFill>
@@ -6308,86 +8967,66 @@
                 <a:ea typeface="Source Han Sans SC" pitchFamily="34" charset="-122"/>
                 <a:cs typeface="Source Han Sans SC" pitchFamily="34" charset="-120"/>
               </a:rPr>
-              <a:t>诊断模型</a:t>
-            </a:r>
-            <a:endParaRPr lang="en-US" sz="1800" dirty="0"/>
-          </a:p>
-        </p:txBody>
-      </p:sp>
-      <p:sp>
-        <p:nvSpPr>
-          <p:cNvPr id="20" name="Text 17"/>
-          <p:cNvSpPr/>
-          <p:nvPr/>
-        </p:nvSpPr>
-        <p:spPr>
-          <a:xfrm>
-            <a:off x="4407408" y="3044952"/>
-            <a:ext cx="1344168" cy="594360"/>
-          </a:xfrm>
-          <a:prstGeom prst="rect">
-            <a:avLst/>
-          </a:prstGeom>
-          <a:noFill/>
-          <a:ln/>
-        </p:spPr>
-        <p:txBody>
-          <a:bodyPr wrap="square" lIns="0" tIns="0" rIns="0" bIns="0" rtlCol="0" anchor="ctr">
-            <a:normAutofit/>
-          </a:bodyPr>
-          <a:lstStyle/>
-          <a:p>
-            <a:pPr algn="ctr" indent="0" marL="0">
-              <a:lnSpc>
-                <a:spcPct val="100000"/>
-              </a:lnSpc>
-              <a:buNone/>
-            </a:pPr>
-            <a:r>
-              <a:rPr lang="en-US" sz="1300" dirty="0">
-                <a:solidFill>
-                  <a:srgbClr val="CBE9EF"/>
-                </a:solidFill>
-                <a:latin typeface="Source Han Sans SC" pitchFamily="34" charset="0"/>
-                <a:ea typeface="Source Han Sans SC" pitchFamily="34" charset="-122"/>
-                <a:cs typeface="Source Han Sans SC" pitchFamily="34" charset="-120"/>
-              </a:rPr>
-              <a:t>候选故障排序</a:t>
-            </a:r>
-            <a:endParaRPr lang="en-US" sz="1300" dirty="0"/>
-          </a:p>
-          <a:p>
-            <a:pPr algn="ctr" indent="0" marL="0">
-              <a:lnSpc>
-                <a:spcPct val="100000"/>
-              </a:lnSpc>
-              <a:buNone/>
-            </a:pPr>
-            <a:r>
-              <a:rPr lang="en-US" sz="1300" dirty="0">
-                <a:solidFill>
-                  <a:srgbClr val="CBE9EF"/>
-                </a:solidFill>
-                <a:latin typeface="Source Han Sans SC" pitchFamily="34" charset="0"/>
-                <a:ea typeface="Source Han Sans SC" pitchFamily="34" charset="-122"/>
-                <a:cs typeface="Source Han Sans SC" pitchFamily="34" charset="-120"/>
-              </a:rPr>
-              <a:t>变量贡献</a:t>
-            </a:r>
-            <a:endParaRPr lang="en-US" sz="1300" dirty="0"/>
-          </a:p>
-        </p:txBody>
-      </p:sp>
-      <p:sp>
-        <p:nvSpPr>
-          <p:cNvPr id="21" name="Shape 18"/>
-          <p:cNvSpPr/>
-          <p:nvPr/>
-        </p:nvSpPr>
-        <p:spPr>
-          <a:xfrm>
-            <a:off x="5897880" y="2962656"/>
-            <a:ext cx="256032" cy="0"/>
+              <a:t>DeepSeek</a:t>
+            </a:r>
+            <a:endParaRPr lang="en-US" sz="1600" dirty="0"/>
+          </a:p>
+        </p:txBody>
+      </p:sp>
+      <p:sp>
+        <p:nvSpPr>
+          <p:cNvPr id="24" name="Text 21"/>
+          <p:cNvSpPr/>
+          <p:nvPr/>
+        </p:nvSpPr>
+        <p:spPr>
+          <a:xfrm>
+            <a:off x="2212848" y="4398264"/>
+            <a:ext cx="2011680" cy="274320"/>
+          </a:xfrm>
+          <a:prstGeom prst="rect">
+            <a:avLst/>
+          </a:prstGeom>
+          <a:noFill/>
+          <a:ln/>
+        </p:spPr>
+        <p:txBody>
+          <a:bodyPr wrap="square" lIns="0" tIns="0" rIns="0" bIns="0" rtlCol="0" anchor="ctr">
+            <a:normAutofit/>
+          </a:bodyPr>
+          <a:lstStyle/>
+          <a:p>
+            <a:pPr algn="r" indent="0" marL="0">
+              <a:lnSpc>
+                <a:spcPct val="100000"/>
+              </a:lnSpc>
+              <a:buNone/>
+            </a:pPr>
+            <a:r>
+              <a:rPr lang="en-US" sz="1400" dirty="0">
+                <a:solidFill>
+                  <a:srgbClr val="13C2C2"/>
+                </a:solidFill>
+                <a:latin typeface="Source Han Sans SC" pitchFamily="34" charset="0"/>
+                <a:ea typeface="Source Han Sans SC" pitchFamily="34" charset="-122"/>
+                <a:cs typeface="Source Han Sans SC" pitchFamily="34" charset="-120"/>
+              </a:rPr>
+              <a:t>解释、问答、Trace</a:t>
+            </a:r>
+            <a:endParaRPr lang="en-US" sz="1400" dirty="0"/>
+          </a:p>
+        </p:txBody>
+      </p:sp>
+      <p:sp>
+        <p:nvSpPr>
+          <p:cNvPr id="25" name="Shape 22"/>
+          <p:cNvSpPr/>
+          <p:nvPr/>
+        </p:nvSpPr>
+        <p:spPr>
+          <a:xfrm>
+            <a:off x="2441448" y="4937760"/>
+            <a:ext cx="9144" cy="0"/>
           </a:xfrm>
           <a:prstGeom prst="line">
             <a:avLst/>
@@ -6404,18 +9043,133 @@
       </p:sp>
       <p:sp>
         <p:nvSpPr>
-          <p:cNvPr id="22" name="Shape 19"/>
-          <p:cNvSpPr/>
-          <p:nvPr/>
-        </p:nvSpPr>
-        <p:spPr>
-          <a:xfrm>
-            <a:off x="6199632" y="1938528"/>
-            <a:ext cx="1600200" cy="2029968"/>
+          <p:cNvPr id="26" name="Shape 23"/>
+          <p:cNvSpPr/>
+          <p:nvPr/>
+        </p:nvSpPr>
+        <p:spPr>
+          <a:xfrm>
+            <a:off x="658368" y="5120640"/>
+            <a:ext cx="3858768" cy="621792"/>
           </a:xfrm>
           <a:prstGeom prst="roundRect">
             <a:avLst>
-              <a:gd name="adj" fmla="val 6857"/>
+              <a:gd name="adj" fmla="val 17647"/>
+            </a:avLst>
+          </a:prstGeom>
+          <a:solidFill>
+            <a:srgbClr val="FFF5E4"/>
+          </a:solidFill>
+          <a:ln w="15240">
+            <a:solidFill>
+              <a:srgbClr val="F2A93B"/>
+            </a:solidFill>
+            <a:prstDash val="solid"/>
+          </a:ln>
+        </p:spPr>
+      </p:sp>
+      <p:sp>
+        <p:nvSpPr>
+          <p:cNvPr id="27" name="Text 24"/>
+          <p:cNvSpPr/>
+          <p:nvPr/>
+        </p:nvSpPr>
+        <p:spPr>
+          <a:xfrm>
+            <a:off x="859536" y="5239512"/>
+            <a:ext cx="1417320" cy="274320"/>
+          </a:xfrm>
+          <a:prstGeom prst="rect">
+            <a:avLst/>
+          </a:prstGeom>
+          <a:noFill/>
+          <a:ln/>
+        </p:spPr>
+        <p:txBody>
+          <a:bodyPr wrap="square" lIns="0" tIns="0" rIns="0" bIns="0" rtlCol="0" anchor="ctr">
+            <a:normAutofit/>
+          </a:bodyPr>
+          <a:lstStyle/>
+          <a:p>
+            <a:pPr indent="0" marL="0">
+              <a:lnSpc>
+                <a:spcPct val="100000"/>
+              </a:lnSpc>
+              <a:buNone/>
+            </a:pPr>
+            <a:r>
+              <a:rPr lang="en-US" sz="1600" b="1" dirty="0">
+                <a:solidFill>
+                  <a:srgbClr val="102A3A"/>
+                </a:solidFill>
+                <a:latin typeface="Source Han Sans SC" pitchFamily="34" charset="0"/>
+                <a:ea typeface="Source Han Sans SC" pitchFamily="34" charset="-122"/>
+                <a:cs typeface="Source Han Sans SC" pitchFamily="34" charset="-120"/>
+              </a:rPr>
+              <a:t>操作员</a:t>
+            </a:r>
+            <a:endParaRPr lang="en-US" sz="1600" dirty="0"/>
+          </a:p>
+        </p:txBody>
+      </p:sp>
+      <p:sp>
+        <p:nvSpPr>
+          <p:cNvPr id="28" name="Text 25"/>
+          <p:cNvSpPr/>
+          <p:nvPr/>
+        </p:nvSpPr>
+        <p:spPr>
+          <a:xfrm>
+            <a:off x="2212848" y="5239512"/>
+            <a:ext cx="2011680" cy="274320"/>
+          </a:xfrm>
+          <a:prstGeom prst="rect">
+            <a:avLst/>
+          </a:prstGeom>
+          <a:noFill/>
+          <a:ln/>
+        </p:spPr>
+        <p:txBody>
+          <a:bodyPr wrap="square" lIns="0" tIns="0" rIns="0" bIns="0" rtlCol="0" anchor="ctr">
+            <a:normAutofit/>
+          </a:bodyPr>
+          <a:lstStyle/>
+          <a:p>
+            <a:pPr algn="r" indent="0" marL="0">
+              <a:lnSpc>
+                <a:spcPct val="100000"/>
+              </a:lnSpc>
+              <a:buNone/>
+            </a:pPr>
+            <a:r>
+              <a:rPr lang="en-US" sz="1400" dirty="0">
+                <a:solidFill>
+                  <a:srgbClr val="627987"/>
+                </a:solidFill>
+                <a:latin typeface="Source Han Sans SC" pitchFamily="34" charset="0"/>
+                <a:ea typeface="Source Han Sans SC" pitchFamily="34" charset="-122"/>
+                <a:cs typeface="Source Han Sans SC" pitchFamily="34" charset="-120"/>
+              </a:rPr>
+              <a:t>确认 / 驳回</a:t>
+            </a:r>
+            <a:endParaRPr lang="en-US" sz="1400" dirty="0"/>
+          </a:p>
+        </p:txBody>
+      </p:sp>
+      <p:sp>
+        <p:nvSpPr>
+          <p:cNvPr id="29" name="Shape 26"/>
+          <p:cNvSpPr/>
+          <p:nvPr/>
+        </p:nvSpPr>
+        <p:spPr>
+          <a:xfrm>
+            <a:off x="4773168" y="1737360"/>
+            <a:ext cx="6702552" cy="4407408"/>
+          </a:xfrm>
+          <a:prstGeom prst="roundRect">
+            <a:avLst>
+              <a:gd name="adj" fmla="val 2490"/>
             </a:avLst>
           </a:prstGeom>
           <a:solidFill>
@@ -6429,160 +9183,52 @@
           </a:ln>
         </p:spPr>
       </p:sp>
-      <p:sp>
-        <p:nvSpPr>
-          <p:cNvPr id="23" name="Text 20"/>
-          <p:cNvSpPr/>
-          <p:nvPr/>
-        </p:nvSpPr>
-        <p:spPr>
-          <a:xfrm>
-            <a:off x="6318504" y="2286000"/>
-            <a:ext cx="1362456" cy="530352"/>
-          </a:xfrm>
-          <a:prstGeom prst="rect">
-            <a:avLst/>
-          </a:prstGeom>
-          <a:noFill/>
-          <a:ln/>
-        </p:spPr>
-        <p:txBody>
-          <a:bodyPr wrap="square" lIns="0" tIns="0" rIns="0" bIns="0" rtlCol="0" anchor="ctr">
-            <a:normAutofit/>
-          </a:bodyPr>
-          <a:lstStyle/>
-          <a:p>
-            <a:pPr algn="ctr" indent="0" marL="0">
-              <a:lnSpc>
-                <a:spcPct val="100000"/>
-              </a:lnSpc>
-              <a:buNone/>
-            </a:pPr>
-            <a:r>
-              <a:rPr lang="en-US" sz="1800" b="1" dirty="0">
-                <a:solidFill>
-                  <a:srgbClr val="102A3A"/>
-                </a:solidFill>
-                <a:latin typeface="Source Han Sans SC" pitchFamily="34" charset="0"/>
-                <a:ea typeface="Source Han Sans SC" pitchFamily="34" charset="-122"/>
-                <a:cs typeface="Source Han Sans SC" pitchFamily="34" charset="-120"/>
-              </a:rPr>
-              <a:t>语言模型</a:t>
-            </a:r>
-            <a:endParaRPr lang="en-US" sz="1800" dirty="0"/>
-          </a:p>
-        </p:txBody>
-      </p:sp>
-      <p:sp>
-        <p:nvSpPr>
-          <p:cNvPr id="24" name="Text 21"/>
-          <p:cNvSpPr/>
-          <p:nvPr/>
-        </p:nvSpPr>
-        <p:spPr>
-          <a:xfrm>
-            <a:off x="6327648" y="3044952"/>
-            <a:ext cx="1344168" cy="594360"/>
-          </a:xfrm>
-          <a:prstGeom prst="rect">
-            <a:avLst/>
-          </a:prstGeom>
-          <a:noFill/>
-          <a:ln/>
-        </p:spPr>
-        <p:txBody>
-          <a:bodyPr wrap="square" lIns="0" tIns="0" rIns="0" bIns="0" rtlCol="0" anchor="ctr">
-            <a:normAutofit/>
-          </a:bodyPr>
-          <a:lstStyle/>
-          <a:p>
-            <a:pPr algn="ctr" indent="0" marL="0">
-              <a:lnSpc>
-                <a:spcPct val="100000"/>
-              </a:lnSpc>
-              <a:buNone/>
-            </a:pPr>
-            <a:r>
-              <a:rPr lang="en-US" sz="1300" dirty="0">
-                <a:solidFill>
-                  <a:srgbClr val="627987"/>
-                </a:solidFill>
-                <a:latin typeface="Source Han Sans SC" pitchFamily="34" charset="0"/>
-                <a:ea typeface="Source Han Sans SC" pitchFamily="34" charset="-122"/>
-                <a:cs typeface="Source Han Sans SC" pitchFamily="34" charset="-120"/>
-              </a:rPr>
-              <a:t>基于结构化证据</a:t>
-            </a:r>
-            <a:endParaRPr lang="en-US" sz="1300" dirty="0"/>
-          </a:p>
-          <a:p>
-            <a:pPr algn="ctr" indent="0" marL="0">
-              <a:lnSpc>
-                <a:spcPct val="100000"/>
-              </a:lnSpc>
-              <a:buNone/>
-            </a:pPr>
-            <a:r>
-              <a:rPr lang="en-US" sz="1300" dirty="0">
-                <a:solidFill>
-                  <a:srgbClr val="627987"/>
-                </a:solidFill>
-                <a:latin typeface="Source Han Sans SC" pitchFamily="34" charset="0"/>
-                <a:ea typeface="Source Han Sans SC" pitchFamily="34" charset="-122"/>
-                <a:cs typeface="Source Han Sans SC" pitchFamily="34" charset="-120"/>
-              </a:rPr>
-              <a:t>解释 / 问答</a:t>
-            </a:r>
-            <a:endParaRPr lang="en-US" sz="1300" dirty="0"/>
-          </a:p>
-        </p:txBody>
-      </p:sp>
-      <p:sp>
-        <p:nvSpPr>
-          <p:cNvPr id="25" name="Shape 22"/>
-          <p:cNvSpPr/>
-          <p:nvPr/>
-        </p:nvSpPr>
-        <p:spPr>
-          <a:xfrm>
-            <a:off x="7818120" y="2962656"/>
-            <a:ext cx="256032" cy="0"/>
-          </a:xfrm>
-          <a:prstGeom prst="line">
-            <a:avLst/>
-          </a:prstGeom>
-          <a:noFill/>
-          <a:ln w="30480">
-            <a:solidFill>
-              <a:srgbClr val="13C2C2"/>
-            </a:solidFill>
-            <a:prstDash val="solid"/>
-            <a:tailEnd type="triangle"/>
-          </a:ln>
-        </p:spPr>
-      </p:sp>
-      <p:sp>
-        <p:nvSpPr>
-          <p:cNvPr id="26" name="Shape 23"/>
-          <p:cNvSpPr/>
-          <p:nvPr/>
-        </p:nvSpPr>
-        <p:spPr>
-          <a:xfrm>
-            <a:off x="8119872" y="1938528"/>
-            <a:ext cx="1600200" cy="2029968"/>
+      <p:pic>
+        <p:nvPicPr>
+          <p:cNvPr id="30" name="Image 1" descr="/Users/rocalight/Desktop/All in one Data/01_PROJECTS/FDE任务/03_产品与解决方案/03_连续化工过程偏移副驾驶/90_构建与分析缓存/序安磷煤化工异常早期预警平台_黑客松路演_v14/assets/screenshots/公网DeepSeek_AI研判与证据解释_首屏.png">    </p:cNvPr>
+          <p:cNvPicPr>
+            <a:picLocks noChangeAspect="1"/>
+          </p:cNvPicPr>
+          <p:nvPr/>
+        </p:nvPicPr>
+        <p:blipFill>
+          <a:blip r:embed="rId3"/>
+          <a:stretch>
+            <a:fillRect/>
+          </a:stretch>
+        </p:blipFill>
+        <p:spPr>
+          <a:xfrm>
+            <a:off x="4901184" y="1865376"/>
+            <a:ext cx="6446520" cy="4151376"/>
+          </a:xfrm>
+          <a:prstGeom prst="rect">
+            <a:avLst/>
+          </a:prstGeom>
+        </p:spPr>
+      </p:pic>
+      <p:sp>
+        <p:nvSpPr>
+          <p:cNvPr id="31" name="Shape 27"/>
+          <p:cNvSpPr/>
+          <p:nvPr/>
+        </p:nvSpPr>
+        <p:spPr>
+          <a:xfrm>
+            <a:off x="8942832" y="5596128"/>
+            <a:ext cx="2148840" cy="347472"/>
           </a:xfrm>
           <a:prstGeom prst="roundRect">
             <a:avLst>
-              <a:gd name="adj" fmla="val 6857"/>
+              <a:gd name="adj" fmla="val 31579"/>
             </a:avLst>
           </a:prstGeom>
           <a:solidFill>
-            <a:srgbClr val="FFF5E4"/>
+            <a:srgbClr val="12374A"/>
           </a:solidFill>
           <a:ln w="15240">
             <a:solidFill>
-              <a:srgbClr val="F2A93B"/>
+              <a:srgbClr val="12374A"/>
             </a:solidFill>
             <a:prstDash val="solid"/>
           </a:ln>
@@ -6590,14 +9236,14 @@
       </p:sp>
       <p:sp>
         <p:nvSpPr>
-          <p:cNvPr id="27" name="Text 24"/>
-          <p:cNvSpPr/>
-          <p:nvPr/>
-        </p:nvSpPr>
-        <p:spPr>
-          <a:xfrm>
-            <a:off x="8238744" y="2286000"/>
-            <a:ext cx="1362456" cy="530352"/>
+          <p:cNvPr id="32" name="Text 28"/>
+          <p:cNvSpPr/>
+          <p:nvPr/>
+        </p:nvSpPr>
+        <p:spPr>
+          <a:xfrm>
+            <a:off x="9034272" y="5614416"/>
+            <a:ext cx="1965960" cy="283464"/>
           </a:xfrm>
           <a:prstGeom prst="rect">
             <a:avLst/>
@@ -6618,30 +9264,30 @@
               <a:buNone/>
             </a:pPr>
             <a:r>
-              <a:rPr lang="en-US" sz="1800" b="1" dirty="0">
-                <a:solidFill>
-                  <a:srgbClr val="102A3A"/>
-                </a:solidFill>
-                <a:latin typeface="Source Han Sans SC" pitchFamily="34" charset="0"/>
-                <a:ea typeface="Source Han Sans SC" pitchFamily="34" charset="-122"/>
-                <a:cs typeface="Source Han Sans SC" pitchFamily="34" charset="-120"/>
-              </a:rPr>
-              <a:t>操作员</a:t>
-            </a:r>
-            <a:endParaRPr lang="en-US" sz="1800" dirty="0"/>
-          </a:p>
-        </p:txBody>
-      </p:sp>
-      <p:sp>
-        <p:nvSpPr>
-          <p:cNvPr id="28" name="Text 25"/>
-          <p:cNvSpPr/>
-          <p:nvPr/>
-        </p:nvSpPr>
-        <p:spPr>
-          <a:xfrm>
-            <a:off x="8247888" y="3044952"/>
-            <a:ext cx="1344168" cy="594360"/>
+              <a:rPr lang="en-US" sz="1200" b="1" dirty="0">
+                <a:solidFill>
+                  <a:srgbClr val="13C2C2"/>
+                </a:solidFill>
+                <a:latin typeface="Source Han Sans SC" pitchFamily="34" charset="0"/>
+                <a:ea typeface="Source Han Sans SC" pitchFamily="34" charset="-122"/>
+                <a:cs typeface="Source Han Sans SC" pitchFamily="34" charset="-120"/>
+              </a:rPr>
+              <a:t>PLAYWRIGHT 公网实拍</a:t>
+            </a:r>
+            <a:endParaRPr lang="en-US" sz="1200" dirty="0"/>
+          </a:p>
+        </p:txBody>
+      </p:sp>
+      <p:sp>
+        <p:nvSpPr>
+          <p:cNvPr id="33" name="Text 29"/>
+          <p:cNvSpPr/>
+          <p:nvPr/>
+        </p:nvSpPr>
+        <p:spPr>
+          <a:xfrm>
+            <a:off x="713232" y="6053328"/>
+            <a:ext cx="3840480" cy="310896"/>
           </a:xfrm>
           <a:prstGeom prst="rect">
             <a:avLst/>
@@ -6662,271 +9308,17 @@
               <a:buNone/>
             </a:pPr>
             <a:r>
-              <a:rPr lang="en-US" sz="1300" dirty="0">
-                <a:solidFill>
-                  <a:srgbClr val="627987"/>
-                </a:solidFill>
-                <a:latin typeface="Source Han Sans SC" pitchFamily="34" charset="0"/>
-                <a:ea typeface="Source Han Sans SC" pitchFamily="34" charset="-122"/>
-                <a:cs typeface="Source Han Sans SC" pitchFamily="34" charset="-120"/>
-              </a:rPr>
-              <a:t>确认、驳回、升级</a:t>
+              <a:rPr lang="en-US" sz="1300" b="1" dirty="0">
+                <a:solidFill>
+                  <a:srgbClr val="DE5B6D"/>
+                </a:solidFill>
+                <a:latin typeface="Source Han Sans SC" pitchFamily="34" charset="0"/>
+                <a:ea typeface="Source Han Sans SC" pitchFamily="34" charset="-122"/>
+                <a:cs typeface="Source Han Sans SC" pitchFamily="34" charset="-120"/>
+              </a:rPr>
+              <a:t>语言模型只解释当前事件的结构化证据，不直接控制设备。</a:t>
             </a:r>
             <a:endParaRPr lang="en-US" sz="1300" dirty="0"/>
-          </a:p>
-        </p:txBody>
-      </p:sp>
-      <p:sp>
-        <p:nvSpPr>
-          <p:cNvPr id="29" name="Shape 26"/>
-          <p:cNvSpPr/>
-          <p:nvPr/>
-        </p:nvSpPr>
-        <p:spPr>
-          <a:xfrm>
-            <a:off x="9738360" y="2962656"/>
-            <a:ext cx="256032" cy="0"/>
-          </a:xfrm>
-          <a:prstGeom prst="line">
-            <a:avLst/>
-          </a:prstGeom>
-          <a:noFill/>
-          <a:ln w="30480">
-            <a:solidFill>
-              <a:srgbClr val="13C2C2"/>
-            </a:solidFill>
-            <a:prstDash val="solid"/>
-            <a:tailEnd type="triangle"/>
-          </a:ln>
-        </p:spPr>
-      </p:sp>
-      <p:sp>
-        <p:nvSpPr>
-          <p:cNvPr id="30" name="Shape 27"/>
-          <p:cNvSpPr/>
-          <p:nvPr/>
-        </p:nvSpPr>
-        <p:spPr>
-          <a:xfrm>
-            <a:off x="10040112" y="1938528"/>
-            <a:ext cx="1600200" cy="2029968"/>
-          </a:xfrm>
-          <a:prstGeom prst="roundRect">
-            <a:avLst>
-              <a:gd name="adj" fmla="val 6857"/>
-            </a:avLst>
-          </a:prstGeom>
-          <a:solidFill>
-            <a:srgbClr val="FFFFFF"/>
-          </a:solidFill>
-          <a:ln w="15240">
-            <a:solidFill>
-              <a:srgbClr val="DCEAF5"/>
-            </a:solidFill>
-            <a:prstDash val="solid"/>
-          </a:ln>
-        </p:spPr>
-      </p:sp>
-      <p:sp>
-        <p:nvSpPr>
-          <p:cNvPr id="31" name="Text 28"/>
-          <p:cNvSpPr/>
-          <p:nvPr/>
-        </p:nvSpPr>
-        <p:spPr>
-          <a:xfrm>
-            <a:off x="10158984" y="2286000"/>
-            <a:ext cx="1362456" cy="530352"/>
-          </a:xfrm>
-          <a:prstGeom prst="rect">
-            <a:avLst/>
-          </a:prstGeom>
-          <a:noFill/>
-          <a:ln/>
-        </p:spPr>
-        <p:txBody>
-          <a:bodyPr wrap="square" lIns="0" tIns="0" rIns="0" bIns="0" rtlCol="0" anchor="ctr">
-            <a:normAutofit/>
-          </a:bodyPr>
-          <a:lstStyle/>
-          <a:p>
-            <a:pPr algn="ctr" indent="0" marL="0">
-              <a:lnSpc>
-                <a:spcPct val="100000"/>
-              </a:lnSpc>
-              <a:buNone/>
-            </a:pPr>
-            <a:r>
-              <a:rPr lang="en-US" sz="1800" b="1" dirty="0">
-                <a:solidFill>
-                  <a:srgbClr val="102A3A"/>
-                </a:solidFill>
-                <a:latin typeface="Source Han Sans SC" pitchFamily="34" charset="0"/>
-                <a:ea typeface="Source Han Sans SC" pitchFamily="34" charset="-122"/>
-                <a:cs typeface="Source Han Sans SC" pitchFamily="34" charset="-120"/>
-              </a:rPr>
-              <a:t>审计</a:t>
-            </a:r>
-            <a:endParaRPr lang="en-US" sz="1800" dirty="0"/>
-          </a:p>
-        </p:txBody>
-      </p:sp>
-      <p:sp>
-        <p:nvSpPr>
-          <p:cNvPr id="32" name="Text 29"/>
-          <p:cNvSpPr/>
-          <p:nvPr/>
-        </p:nvSpPr>
-        <p:spPr>
-          <a:xfrm>
-            <a:off x="10168128" y="3044952"/>
-            <a:ext cx="1344168" cy="594360"/>
-          </a:xfrm>
-          <a:prstGeom prst="rect">
-            <a:avLst/>
-          </a:prstGeom>
-          <a:noFill/>
-          <a:ln/>
-        </p:spPr>
-        <p:txBody>
-          <a:bodyPr wrap="square" lIns="0" tIns="0" rIns="0" bIns="0" rtlCol="0" anchor="ctr">
-            <a:normAutofit/>
-          </a:bodyPr>
-          <a:lstStyle/>
-          <a:p>
-            <a:pPr algn="ctr" indent="0" marL="0">
-              <a:lnSpc>
-                <a:spcPct val="100000"/>
-              </a:lnSpc>
-              <a:buNone/>
-            </a:pPr>
-            <a:r>
-              <a:rPr lang="en-US" sz="1300" dirty="0">
-                <a:solidFill>
-                  <a:srgbClr val="627987"/>
-                </a:solidFill>
-                <a:latin typeface="Source Han Sans SC" pitchFamily="34" charset="0"/>
-                <a:ea typeface="Source Han Sans SC" pitchFamily="34" charset="-122"/>
-                <a:cs typeface="Source Han Sans SC" pitchFamily="34" charset="-120"/>
-              </a:rPr>
-              <a:t>留痕；未来受控写回</a:t>
-            </a:r>
-            <a:endParaRPr lang="en-US" sz="1300" dirty="0"/>
-          </a:p>
-        </p:txBody>
-      </p:sp>
-      <p:sp>
-        <p:nvSpPr>
-          <p:cNvPr id="33" name="Shape 30"/>
-          <p:cNvSpPr/>
-          <p:nvPr/>
-        </p:nvSpPr>
-        <p:spPr>
-          <a:xfrm>
-            <a:off x="1051560" y="4773168"/>
-            <a:ext cx="10058400" cy="758952"/>
-          </a:xfrm>
-          <a:prstGeom prst="roundRect">
-            <a:avLst>
-              <a:gd name="adj" fmla="val 14458"/>
-            </a:avLst>
-          </a:prstGeom>
-          <a:solidFill>
-            <a:srgbClr val="EAF7FA"/>
-          </a:solidFill>
-          <a:ln w="15240">
-            <a:solidFill>
-              <a:srgbClr val="13C2C2"/>
-            </a:solidFill>
-            <a:prstDash val="solid"/>
-          </a:ln>
-        </p:spPr>
-      </p:sp>
-      <p:sp>
-        <p:nvSpPr>
-          <p:cNvPr id="34" name="Text 31"/>
-          <p:cNvSpPr/>
-          <p:nvPr/>
-        </p:nvSpPr>
-        <p:spPr>
-          <a:xfrm>
-            <a:off x="1325880" y="4974336"/>
-            <a:ext cx="9509760" cy="347472"/>
-          </a:xfrm>
-          <a:prstGeom prst="rect">
-            <a:avLst/>
-          </a:prstGeom>
-          <a:noFill/>
-          <a:ln/>
-        </p:spPr>
-        <p:txBody>
-          <a:bodyPr wrap="square" lIns="0" tIns="0" rIns="0" bIns="0" rtlCol="0" anchor="ctr">
-            <a:normAutofit/>
-          </a:bodyPr>
-          <a:lstStyle/>
-          <a:p>
-            <a:pPr algn="ctr" indent="0" marL="0">
-              <a:lnSpc>
-                <a:spcPct val="100000"/>
-              </a:lnSpc>
-              <a:buNone/>
-            </a:pPr>
-            <a:r>
-              <a:rPr lang="en-US" sz="1900" b="1" dirty="0">
-                <a:solidFill>
-                  <a:srgbClr val="102A3A"/>
-                </a:solidFill>
-                <a:latin typeface="Source Han Sans SC" pitchFamily="34" charset="0"/>
-                <a:ea typeface="Source Han Sans SC" pitchFamily="34" charset="-122"/>
-                <a:cs typeface="Source Han Sans SC" pitchFamily="34" charset="-120"/>
-              </a:rPr>
-              <a:t>关键边界：语言模型只能解释已经结构化的证据，不能凭一句话直接控制设备。</a:t>
-            </a:r>
-            <a:endParaRPr lang="en-US" sz="1900" dirty="0"/>
-          </a:p>
-        </p:txBody>
-      </p:sp>
-      <p:sp>
-        <p:nvSpPr>
-          <p:cNvPr id="35" name="Text 32"/>
-          <p:cNvSpPr/>
-          <p:nvPr/>
-        </p:nvSpPr>
-        <p:spPr>
-          <a:xfrm>
-            <a:off x="2011680" y="5870448"/>
-            <a:ext cx="8138160" cy="256032"/>
-          </a:xfrm>
-          <a:prstGeom prst="rect">
-            <a:avLst/>
-          </a:prstGeom>
-          <a:noFill/>
-          <a:ln/>
-        </p:spPr>
-        <p:txBody>
-          <a:bodyPr wrap="square" lIns="0" tIns="0" rIns="0" bIns="0" rtlCol="0" anchor="ctr">
-            <a:normAutofit/>
-          </a:bodyPr>
-          <a:lstStyle/>
-          <a:p>
-            <a:pPr algn="ctr" indent="0" marL="0">
-              <a:lnSpc>
-                <a:spcPct val="100000"/>
-              </a:lnSpc>
-              <a:buNone/>
-            </a:pPr>
-            <a:r>
-              <a:rPr lang="en-US" sz="1200" dirty="0">
-                <a:solidFill>
-                  <a:srgbClr val="627987"/>
-                </a:solidFill>
-                <a:latin typeface="Source Han Sans SC" pitchFamily="34" charset="0"/>
-                <a:ea typeface="Source Han Sans SC" pitchFamily="34" charset="-122"/>
-                <a:cs typeface="Source Han Sans SC" pitchFamily="34" charset="-120"/>
-              </a:rPr>
-              <a:t>真实 llm_enhanced 公网截图待供应商恢复后补入；当前不采用 template-v0.1 旧截图。</a:t>
-            </a:r>
-            <a:endParaRPr lang="en-US" sz="1200" dirty="0"/>
           </a:p>
         </p:txBody>
       </p:sp>
@@ -7111,7 +9503,7 @@
                 <a:ea typeface="Source Han Sans SC" pitchFamily="34" charset="-122"/>
                 <a:cs typeface="Source Han Sans SC" pitchFamily="34" charset="-120"/>
               </a:rPr>
-              <a:t>04 / 现场演示</a:t>
+              <a:t>04 / Demo 复现</a:t>
             </a:r>
             <a:endParaRPr lang="en-US" sz="1200" dirty="0"/>
           </a:p>
@@ -7155,7 +9547,7 @@
                 <a:ea typeface="Source Han Sans SC" pitchFamily="34" charset="-122"/>
                 <a:cs typeface="Source Han Sans SC" pitchFamily="34" charset="-120"/>
               </a:rPr>
-              <a:t>我们现场演示的，不是一张静态截图</a:t>
+              <a:t>评委现在就能自己跑一遍</a:t>
             </a:r>
             <a:endParaRPr lang="en-US" sz="3000" dirty="0"/>
           </a:p>
@@ -7199,7 +9591,7 @@
                 <a:ea typeface="Source Han Sans SC" pitchFamily="34" charset="-122"/>
                 <a:cs typeface="Source Han Sans SC" pitchFamily="34" charset="-120"/>
               </a:rPr>
-              <a:t>从回放到确认，走完一条真实产品路径</a:t>
+              <a:t>公网链接 + 演示账号 + 三步操作</a:t>
             </a:r>
             <a:endParaRPr lang="en-US" sz="1600" dirty="0"/>
           </a:p>
@@ -7388,7 +9780,7 @@
                 <a:ea typeface="Source Han Sans SC" pitchFamily="34" charset="-122"/>
                 <a:cs typeface="Source Han Sans SC" pitchFamily="34" charset="-120"/>
               </a:rPr>
-              <a:t>选择场景</a:t>
+              <a:t>登录</a:t>
             </a:r>
             <a:endParaRPr lang="en-US" sz="2000" dirty="0"/>
           </a:p>
@@ -7432,7 +9824,7 @@
                 <a:ea typeface="Source Han Sans SC" pitchFamily="34" charset="-122"/>
                 <a:cs typeface="Source Han Sans SC" pitchFamily="34" charset="-120"/>
               </a:rPr>
-              <a:t>污水 / TEP 公开验证</a:t>
+              <a:t>https://huagong.finlaw.cloud/demo</a:t>
             </a:r>
             <a:endParaRPr lang="en-US" sz="1400" dirty="0"/>
           </a:p>
@@ -7547,7 +9939,7 @@
                 <a:ea typeface="Source Han Sans SC" pitchFamily="34" charset="-122"/>
                 <a:cs typeface="Source Han Sans SC" pitchFamily="34" charset="-120"/>
               </a:rPr>
-              <a:t>过程回放</a:t>
+              <a:t>回放</a:t>
             </a:r>
             <a:endParaRPr lang="en-US" sz="2000" dirty="0"/>
           </a:p>
@@ -7591,7 +9983,27 @@
                 <a:ea typeface="Source Han Sans SC" pitchFamily="34" charset="-122"/>
                 <a:cs typeface="Source Han Sans SC" pitchFamily="34" charset="-120"/>
               </a:rPr>
-              <a:t>变量实时向前推进</a:t>
+              <a:t>账号 operator-01</a:t>
+            </a:r>
+            <a:endParaRPr lang="en-US" sz="1400" dirty="0"/>
+          </a:p>
+          <a:p>
+            <a:pPr indent="0" marL="0">
+              <a:lnSpc>
+                <a:spcPct val="100000"/>
+              </a:lnSpc>
+              <a:buNone/>
+            </a:pPr>
+            <a:r>
+              <a:rPr lang="en-US" sz="1400" dirty="0">
+                <a:solidFill>
+                  <a:srgbClr val="627987"/>
+                </a:solidFill>
+                <a:latin typeface="Source Han Sans SC" pitchFamily="34" charset="0"/>
+                <a:ea typeface="Source Han Sans SC" pitchFamily="34" charset="-122"/>
+                <a:cs typeface="Source Han Sans SC" pitchFamily="34" charset="-120"/>
+              </a:rPr>
+              <a:t>口令 demo-op-2026</a:t>
             </a:r>
             <a:endParaRPr lang="en-US" sz="1400" dirty="0"/>
           </a:p>
@@ -7706,7 +10118,7 @@
                 <a:ea typeface="Source Han Sans SC" pitchFamily="34" charset="-122"/>
                 <a:cs typeface="Source Han Sans SC" pitchFamily="34" charset="-120"/>
               </a:rPr>
-              <a:t>捕获并确认</a:t>
+              <a:t>追问并确认</a:t>
             </a:r>
             <a:endParaRPr lang="en-US" sz="2000" dirty="0"/>
           </a:p>
@@ -7750,7 +10162,27 @@
                 <a:ea typeface="Source Han Sans SC" pitchFamily="34" charset="-122"/>
                 <a:cs typeface="Source Han Sans SC" pitchFamily="34" charset="-120"/>
               </a:rPr>
-              <a:t>异常 → 证据 → 人工留痕</a:t>
+              <a:t>选场景 → 开始回放</a:t>
+            </a:r>
+            <a:endParaRPr lang="en-US" sz="1400" dirty="0"/>
+          </a:p>
+          <a:p>
+            <a:pPr indent="0" marL="0">
+              <a:lnSpc>
+                <a:spcPct val="100000"/>
+              </a:lnSpc>
+              <a:buNone/>
+            </a:pPr>
+            <a:r>
+              <a:rPr lang="en-US" sz="1400" dirty="0">
+                <a:solidFill>
+                  <a:srgbClr val="627987"/>
+                </a:solidFill>
+                <a:latin typeface="Source Han Sans SC" pitchFamily="34" charset="0"/>
+                <a:ea typeface="Source Han Sans SC" pitchFamily="34" charset="-122"/>
+                <a:cs typeface="Source Han Sans SC" pitchFamily="34" charset="-120"/>
+              </a:rPr>
+              <a:t>进事件 → 向序安追问</a:t>
             </a:r>
             <a:endParaRPr lang="en-US" sz="1400" dirty="0"/>
           </a:p>
@@ -10537,7 +12969,7 @@
                 <a:ea typeface="Source Han Sans SC" pitchFamily="34" charset="-122"/>
                 <a:cs typeface="Source Han Sans SC" pitchFamily="34" charset="-120"/>
               </a:rPr>
-              <a:t>07 / 落地方式</a:t>
+              <a:t>07 / 开发边界</a:t>
             </a:r>
             <a:endParaRPr lang="en-US" sz="1200" dirty="0"/>
           </a:p>
@@ -10581,7 +13013,7 @@
                 <a:ea typeface="Source Han Sans SC" pitchFamily="34" charset="-122"/>
                 <a:cs typeface="Source Han Sans SC" pitchFamily="34" charset="-120"/>
               </a:rPr>
-              <a:t>先用一个装置，证明一个预警闭环</a:t>
+              <a:t>48 小时做了什么，哪些不是这次才有</a:t>
             </a:r>
             <a:endParaRPr lang="en-US" sz="3000" dirty="0"/>
           </a:p>
@@ -10625,7 +13057,7 @@
                 <a:ea typeface="Source Han Sans SC" pitchFamily="34" charset="-122"/>
                 <a:cs typeface="Source Han Sans SC" pitchFamily="34" charset="-120"/>
               </a:rPr>
-              <a:t>4–8 周只读 PoC；周期以现场数据条件为准</a:t>
+              <a:t>如实区分本次增量与赛前 / 开源基线</a:t>
             </a:r>
             <a:endParaRPr lang="en-US" sz="1600" dirty="0"/>
           </a:p>
@@ -10707,28 +13139,82 @@
       </p:sp>
       <p:sp>
         <p:nvSpPr>
-          <p:cNvPr id="10" name="Text 7"/>
-          <p:cNvSpPr/>
-          <p:nvPr/>
-        </p:nvSpPr>
-        <p:spPr>
-          <a:xfrm>
-            <a:off x="576072" y="1810512"/>
-            <a:ext cx="2286000" cy="256032"/>
-          </a:xfrm>
-          <a:prstGeom prst="rect">
-            <a:avLst/>
-          </a:prstGeom>
-          <a:noFill/>
-          <a:ln/>
-        </p:spPr>
-        <p:txBody>
-          <a:bodyPr wrap="square" lIns="0" tIns="0" rIns="0" bIns="0" rtlCol="0" anchor="ctr">
-            <a:normAutofit/>
-          </a:bodyPr>
-          <a:lstStyle/>
-          <a:p>
-            <a:pPr indent="0" marL="0">
+          <p:cNvPr id="10" name="Shape 7"/>
+          <p:cNvSpPr/>
+          <p:nvPr/>
+        </p:nvSpPr>
+        <p:spPr>
+          <a:xfrm>
+            <a:off x="676656" y="1755648"/>
+            <a:ext cx="5230368" cy="4315968"/>
+          </a:xfrm>
+          <a:prstGeom prst="roundRect">
+            <a:avLst>
+              <a:gd name="adj" fmla="val 2542"/>
+            </a:avLst>
+          </a:prstGeom>
+          <a:solidFill>
+            <a:srgbClr val="FFFFFF"/>
+          </a:solidFill>
+          <a:ln w="15240">
+            <a:solidFill>
+              <a:srgbClr val="DCEAF5"/>
+            </a:solidFill>
+            <a:prstDash val="solid"/>
+          </a:ln>
+        </p:spPr>
+      </p:sp>
+      <p:sp>
+        <p:nvSpPr>
+          <p:cNvPr id="11" name="Shape 8"/>
+          <p:cNvSpPr/>
+          <p:nvPr/>
+        </p:nvSpPr>
+        <p:spPr>
+          <a:xfrm>
+            <a:off x="932688" y="2029968"/>
+            <a:ext cx="2148840" cy="347472"/>
+          </a:xfrm>
+          <a:prstGeom prst="roundRect">
+            <a:avLst>
+              <a:gd name="adj" fmla="val 31579"/>
+            </a:avLst>
+          </a:prstGeom>
+          <a:solidFill>
+            <a:srgbClr val="EAF7FA"/>
+          </a:solidFill>
+          <a:ln w="15240">
+            <a:solidFill>
+              <a:srgbClr val="EAF7FA"/>
+            </a:solidFill>
+            <a:prstDash val="solid"/>
+          </a:ln>
+        </p:spPr>
+      </p:sp>
+      <p:sp>
+        <p:nvSpPr>
+          <p:cNvPr id="12" name="Text 9"/>
+          <p:cNvSpPr/>
+          <p:nvPr/>
+        </p:nvSpPr>
+        <p:spPr>
+          <a:xfrm>
+            <a:off x="1024128" y="2048256"/>
+            <a:ext cx="1965960" cy="283464"/>
+          </a:xfrm>
+          <a:prstGeom prst="rect">
+            <a:avLst/>
+          </a:prstGeom>
+          <a:noFill/>
+          <a:ln/>
+        </p:spPr>
+        <p:txBody>
+          <a:bodyPr wrap="square" lIns="0" tIns="0" rIns="0" bIns="0" rtlCol="0" anchor="ctr">
+            <a:normAutofit/>
+          </a:bodyPr>
+          <a:lstStyle/>
+          <a:p>
+            <a:pPr algn="ctr" indent="0" marL="0">
               <a:lnSpc>
                 <a:spcPct val="100000"/>
               </a:lnSpc>
@@ -10737,13 +13223,431 @@
             <a:r>
               <a:rPr lang="en-US" sz="1200" b="1" dirty="0">
                 <a:solidFill>
+                  <a:srgbClr val="24839B"/>
+                </a:solidFill>
+                <a:latin typeface="Source Han Sans SC" pitchFamily="34" charset="0"/>
+                <a:ea typeface="Source Han Sans SC" pitchFamily="34" charset="-122"/>
+                <a:cs typeface="Source Han Sans SC" pitchFamily="34" charset="-120"/>
+              </a:rPr>
+              <a:t>赛前 / 开源基线</a:t>
+            </a:r>
+            <a:endParaRPr lang="en-US" sz="1200" dirty="0"/>
+          </a:p>
+        </p:txBody>
+      </p:sp>
+      <p:sp>
+        <p:nvSpPr>
+          <p:cNvPr id="13" name="Text 10"/>
+          <p:cNvSpPr/>
+          <p:nvPr/>
+        </p:nvSpPr>
+        <p:spPr>
+          <a:xfrm>
+            <a:off x="932688" y="2578608"/>
+            <a:ext cx="4498848" cy="384048"/>
+          </a:xfrm>
+          <a:prstGeom prst="rect">
+            <a:avLst/>
+          </a:prstGeom>
+          <a:noFill/>
+          <a:ln/>
+        </p:spPr>
+        <p:txBody>
+          <a:bodyPr wrap="square" lIns="0" tIns="0" rIns="0" bIns="0" rtlCol="0" anchor="ctr">
+            <a:normAutofit/>
+          </a:bodyPr>
+          <a:lstStyle/>
+          <a:p>
+            <a:pPr indent="0" marL="0">
+              <a:lnSpc>
+                <a:spcPct val="100000"/>
+              </a:lnSpc>
+              <a:buNone/>
+            </a:pPr>
+            <a:r>
+              <a:rPr lang="en-US" sz="2200" b="1" dirty="0">
+                <a:solidFill>
+                  <a:srgbClr val="102A3A"/>
+                </a:solidFill>
+                <a:latin typeface="Source Han Sans SC" pitchFamily="34" charset="0"/>
+                <a:ea typeface="Source Han Sans SC" pitchFamily="34" charset="-122"/>
+                <a:cs typeface="Source Han Sans SC" pitchFamily="34" charset="-120"/>
+              </a:rPr>
+              <a:t>不算本次独立从零开发</a:t>
+            </a:r>
+            <a:endParaRPr lang="en-US" sz="2200" dirty="0"/>
+          </a:p>
+        </p:txBody>
+      </p:sp>
+      <p:sp>
+        <p:nvSpPr>
+          <p:cNvPr id="14" name="Shape 11"/>
+          <p:cNvSpPr/>
+          <p:nvPr/>
+        </p:nvSpPr>
+        <p:spPr>
+          <a:xfrm>
+            <a:off x="978408" y="3273552"/>
+            <a:ext cx="146304" cy="146304"/>
+          </a:xfrm>
+          <a:prstGeom prst="ellipse">
+            <a:avLst/>
+          </a:prstGeom>
+          <a:solidFill>
+            <a:srgbClr val="24839B"/>
+          </a:solidFill>
+          <a:ln w="12700">
+            <a:solidFill>
+              <a:srgbClr val="24839B"/>
+            </a:solidFill>
+            <a:prstDash val="solid"/>
+          </a:ln>
+        </p:spPr>
+      </p:sp>
+      <p:sp>
+        <p:nvSpPr>
+          <p:cNvPr id="15" name="Text 12"/>
+          <p:cNvSpPr/>
+          <p:nvPr/>
+        </p:nvSpPr>
+        <p:spPr>
+          <a:xfrm>
+            <a:off x="1261872" y="3154680"/>
+            <a:ext cx="4041648" cy="329184"/>
+          </a:xfrm>
+          <a:prstGeom prst="rect">
+            <a:avLst/>
+          </a:prstGeom>
+          <a:noFill/>
+          <a:ln/>
+        </p:spPr>
+        <p:txBody>
+          <a:bodyPr wrap="square" lIns="0" tIns="0" rIns="0" bIns="0" rtlCol="0" anchor="ctr">
+            <a:normAutofit/>
+          </a:bodyPr>
+          <a:lstStyle/>
+          <a:p>
+            <a:pPr indent="0" marL="0">
+              <a:lnSpc>
+                <a:spcPct val="100000"/>
+              </a:lnSpc>
+              <a:buNone/>
+            </a:pPr>
+            <a:r>
+              <a:rPr lang="en-US" sz="1700" b="1" dirty="0">
+                <a:solidFill>
+                  <a:srgbClr val="627987"/>
+                </a:solidFill>
+                <a:latin typeface="Source Han Sans SC" pitchFamily="34" charset="0"/>
+                <a:ea typeface="Source Han Sans SC" pitchFamily="34" charset="-122"/>
+                <a:cs typeface="Source Han Sans SC" pitchFamily="34" charset="-120"/>
+              </a:rPr>
+              <a:t>Next.js / FastAPI / PostgreSQL 工程骨架</a:t>
+            </a:r>
+            <a:endParaRPr lang="en-US" sz="1700" dirty="0"/>
+          </a:p>
+        </p:txBody>
+      </p:sp>
+      <p:sp>
+        <p:nvSpPr>
+          <p:cNvPr id="16" name="Shape 13"/>
+          <p:cNvSpPr/>
+          <p:nvPr/>
+        </p:nvSpPr>
+        <p:spPr>
+          <a:xfrm>
+            <a:off x="978408" y="3803904"/>
+            <a:ext cx="146304" cy="146304"/>
+          </a:xfrm>
+          <a:prstGeom prst="ellipse">
+            <a:avLst/>
+          </a:prstGeom>
+          <a:solidFill>
+            <a:srgbClr val="24839B"/>
+          </a:solidFill>
+          <a:ln w="12700">
+            <a:solidFill>
+              <a:srgbClr val="24839B"/>
+            </a:solidFill>
+            <a:prstDash val="solid"/>
+          </a:ln>
+        </p:spPr>
+      </p:sp>
+      <p:sp>
+        <p:nvSpPr>
+          <p:cNvPr id="17" name="Text 14"/>
+          <p:cNvSpPr/>
+          <p:nvPr/>
+        </p:nvSpPr>
+        <p:spPr>
+          <a:xfrm>
+            <a:off x="1261872" y="3685032"/>
+            <a:ext cx="4041648" cy="329184"/>
+          </a:xfrm>
+          <a:prstGeom prst="rect">
+            <a:avLst/>
+          </a:prstGeom>
+          <a:noFill/>
+          <a:ln/>
+        </p:spPr>
+        <p:txBody>
+          <a:bodyPr wrap="square" lIns="0" tIns="0" rIns="0" bIns="0" rtlCol="0" anchor="ctr">
+            <a:normAutofit/>
+          </a:bodyPr>
+          <a:lstStyle/>
+          <a:p>
+            <a:pPr indent="0" marL="0">
+              <a:lnSpc>
+                <a:spcPct val="100000"/>
+              </a:lnSpc>
+              <a:buNone/>
+            </a:pPr>
+            <a:r>
+              <a:rPr lang="en-US" sz="1700" dirty="0">
+                <a:solidFill>
+                  <a:srgbClr val="627987"/>
+                </a:solidFill>
+                <a:latin typeface="Source Han Sans SC" pitchFamily="34" charset="0"/>
+                <a:ea typeface="Source Han Sans SC" pitchFamily="34" charset="-122"/>
+                <a:cs typeface="Source Han Sans SC" pitchFamily="34" charset="-120"/>
+              </a:rPr>
+              <a:t>TEP 与 UCI 公开数据</a:t>
+            </a:r>
+            <a:endParaRPr lang="en-US" sz="1700" dirty="0"/>
+          </a:p>
+        </p:txBody>
+      </p:sp>
+      <p:sp>
+        <p:nvSpPr>
+          <p:cNvPr id="18" name="Shape 15"/>
+          <p:cNvSpPr/>
+          <p:nvPr/>
+        </p:nvSpPr>
+        <p:spPr>
+          <a:xfrm>
+            <a:off x="978408" y="4334256"/>
+            <a:ext cx="146304" cy="146304"/>
+          </a:xfrm>
+          <a:prstGeom prst="ellipse">
+            <a:avLst/>
+          </a:prstGeom>
+          <a:solidFill>
+            <a:srgbClr val="24839B"/>
+          </a:solidFill>
+          <a:ln w="12700">
+            <a:solidFill>
+              <a:srgbClr val="24839B"/>
+            </a:solidFill>
+            <a:prstDash val="solid"/>
+          </a:ln>
+        </p:spPr>
+      </p:sp>
+      <p:sp>
+        <p:nvSpPr>
+          <p:cNvPr id="19" name="Text 16"/>
+          <p:cNvSpPr/>
+          <p:nvPr/>
+        </p:nvSpPr>
+        <p:spPr>
+          <a:xfrm>
+            <a:off x="1261872" y="4215384"/>
+            <a:ext cx="4041648" cy="329184"/>
+          </a:xfrm>
+          <a:prstGeom prst="rect">
+            <a:avLst/>
+          </a:prstGeom>
+          <a:noFill/>
+          <a:ln/>
+        </p:spPr>
+        <p:txBody>
+          <a:bodyPr wrap="square" lIns="0" tIns="0" rIns="0" bIns="0" rtlCol="0" anchor="ctr">
+            <a:normAutofit/>
+          </a:bodyPr>
+          <a:lstStyle/>
+          <a:p>
+            <a:pPr indent="0" marL="0">
+              <a:lnSpc>
+                <a:spcPct val="100000"/>
+              </a:lnSpc>
+              <a:buNone/>
+            </a:pPr>
+            <a:r>
+              <a:rPr lang="en-US" sz="1700" dirty="0">
+                <a:solidFill>
+                  <a:srgbClr val="627987"/>
+                </a:solidFill>
+                <a:latin typeface="Source Han Sans SC" pitchFamily="34" charset="0"/>
+                <a:ea typeface="Source Han Sans SC" pitchFamily="34" charset="-122"/>
+                <a:cs typeface="Source Han Sans SC" pitchFamily="34" charset="-120"/>
+              </a:rPr>
+              <a:t>基础过程回放与只读理念</a:t>
+            </a:r>
+            <a:endParaRPr lang="en-US" sz="1700" dirty="0"/>
+          </a:p>
+        </p:txBody>
+      </p:sp>
+      <p:sp>
+        <p:nvSpPr>
+          <p:cNvPr id="20" name="Shape 17"/>
+          <p:cNvSpPr/>
+          <p:nvPr/>
+        </p:nvSpPr>
+        <p:spPr>
+          <a:xfrm>
+            <a:off x="978408" y="4864608"/>
+            <a:ext cx="146304" cy="146304"/>
+          </a:xfrm>
+          <a:prstGeom prst="ellipse">
+            <a:avLst/>
+          </a:prstGeom>
+          <a:solidFill>
+            <a:srgbClr val="24839B"/>
+          </a:solidFill>
+          <a:ln w="12700">
+            <a:solidFill>
+              <a:srgbClr val="24839B"/>
+            </a:solidFill>
+            <a:prstDash val="solid"/>
+          </a:ln>
+        </p:spPr>
+      </p:sp>
+      <p:sp>
+        <p:nvSpPr>
+          <p:cNvPr id="21" name="Text 18"/>
+          <p:cNvSpPr/>
+          <p:nvPr/>
+        </p:nvSpPr>
+        <p:spPr>
+          <a:xfrm>
+            <a:off x="1261872" y="4745736"/>
+            <a:ext cx="4041648" cy="329184"/>
+          </a:xfrm>
+          <a:prstGeom prst="rect">
+            <a:avLst/>
+          </a:prstGeom>
+          <a:noFill/>
+          <a:ln/>
+        </p:spPr>
+        <p:txBody>
+          <a:bodyPr wrap="square" lIns="0" tIns="0" rIns="0" bIns="0" rtlCol="0" anchor="ctr">
+            <a:normAutofit/>
+          </a:bodyPr>
+          <a:lstStyle/>
+          <a:p>
+            <a:pPr indent="0" marL="0">
+              <a:lnSpc>
+                <a:spcPct val="100000"/>
+              </a:lnSpc>
+              <a:buNone/>
+            </a:pPr>
+            <a:r>
+              <a:rPr lang="en-US" sz="1700" dirty="0">
+                <a:solidFill>
+                  <a:srgbClr val="627987"/>
+                </a:solidFill>
+                <a:latin typeface="Source Han Sans SC" pitchFamily="34" charset="0"/>
+                <a:ea typeface="Source Han Sans SC" pitchFamily="34" charset="-122"/>
+                <a:cs typeface="Source Han Sans SC" pitchFamily="34" charset="-120"/>
+              </a:rPr>
+              <a:t>开源依赖和通用工具链</a:t>
+            </a:r>
+            <a:endParaRPr lang="en-US" sz="1700" dirty="0"/>
+          </a:p>
+        </p:txBody>
+      </p:sp>
+      <p:sp>
+        <p:nvSpPr>
+          <p:cNvPr id="22" name="Shape 19"/>
+          <p:cNvSpPr/>
+          <p:nvPr/>
+        </p:nvSpPr>
+        <p:spPr>
+          <a:xfrm>
+            <a:off x="6236208" y="1755648"/>
+            <a:ext cx="5257800" cy="4315968"/>
+          </a:xfrm>
+          <a:prstGeom prst="roundRect">
+            <a:avLst>
+              <a:gd name="adj" fmla="val 2542"/>
+            </a:avLst>
+          </a:prstGeom>
+          <a:solidFill>
+            <a:srgbClr val="061B2A"/>
+          </a:solidFill>
+          <a:ln w="15240">
+            <a:solidFill>
+              <a:srgbClr val="061B2A"/>
+            </a:solidFill>
+            <a:prstDash val="solid"/>
+          </a:ln>
+        </p:spPr>
+      </p:sp>
+      <p:sp>
+        <p:nvSpPr>
+          <p:cNvPr id="23" name="Shape 20"/>
+          <p:cNvSpPr/>
+          <p:nvPr/>
+        </p:nvSpPr>
+        <p:spPr>
+          <a:xfrm>
+            <a:off x="6510528" y="2029968"/>
+            <a:ext cx="2487168" cy="347472"/>
+          </a:xfrm>
+          <a:prstGeom prst="roundRect">
+            <a:avLst>
+              <a:gd name="adj" fmla="val 31579"/>
+            </a:avLst>
+          </a:prstGeom>
+          <a:solidFill>
+            <a:srgbClr val="12374A"/>
+          </a:solidFill>
+          <a:ln w="15240">
+            <a:solidFill>
+              <a:srgbClr val="12374A"/>
+            </a:solidFill>
+            <a:prstDash val="solid"/>
+          </a:ln>
+        </p:spPr>
+      </p:sp>
+      <p:sp>
+        <p:nvSpPr>
+          <p:cNvPr id="24" name="Text 21"/>
+          <p:cNvSpPr/>
+          <p:nvPr/>
+        </p:nvSpPr>
+        <p:spPr>
+          <a:xfrm>
+            <a:off x="6601968" y="2048256"/>
+            <a:ext cx="2304288" cy="283464"/>
+          </a:xfrm>
+          <a:prstGeom prst="rect">
+            <a:avLst/>
+          </a:prstGeom>
+          <a:noFill/>
+          <a:ln/>
+        </p:spPr>
+        <p:txBody>
+          <a:bodyPr wrap="square" lIns="0" tIns="0" rIns="0" bIns="0" rtlCol="0" anchor="ctr">
+            <a:normAutofit/>
+          </a:bodyPr>
+          <a:lstStyle/>
+          <a:p>
+            <a:pPr algn="ctr" indent="0" marL="0">
+              <a:lnSpc>
+                <a:spcPct val="100000"/>
+              </a:lnSpc>
+              <a:buNone/>
+            </a:pPr>
+            <a:r>
+              <a:rPr lang="en-US" sz="1200" b="1" dirty="0">
+                <a:solidFill>
                   <a:srgbClr val="13C2C2"/>
                 </a:solidFill>
                 <a:latin typeface="Source Han Sans SC" pitchFamily="34" charset="0"/>
                 <a:ea typeface="Source Han Sans SC" pitchFamily="34" charset="-122"/>
                 <a:cs typeface="Source Han Sans SC" pitchFamily="34" charset="-120"/>
               </a:rPr>
-              <a:t>第 1–2 周</a:t>
+              <a:t>本次 48 小时新增 / 重构</a:t>
             </a:r>
             <a:endParaRPr lang="en-US" sz="1200" dirty="0"/>
           </a:p>
@@ -10751,20 +13655,66 @@
       </p:sp>
       <p:sp>
         <p:nvSpPr>
-          <p:cNvPr id="11" name="Shape 8"/>
-          <p:cNvSpPr/>
-          <p:nvPr/>
-        </p:nvSpPr>
-        <p:spPr>
-          <a:xfrm>
-            <a:off x="576072" y="2194560"/>
-            <a:ext cx="2304288" cy="0"/>
-          </a:xfrm>
-          <a:prstGeom prst="line">
-            <a:avLst/>
-          </a:prstGeom>
-          <a:noFill/>
-          <a:ln w="63500">
+          <p:cNvPr id="25" name="Text 22"/>
+          <p:cNvSpPr/>
+          <p:nvPr/>
+        </p:nvSpPr>
+        <p:spPr>
+          <a:xfrm>
+            <a:off x="6510528" y="2578608"/>
+            <a:ext cx="4315968" cy="384048"/>
+          </a:xfrm>
+          <a:prstGeom prst="rect">
+            <a:avLst/>
+          </a:prstGeom>
+          <a:noFill/>
+          <a:ln/>
+        </p:spPr>
+        <p:txBody>
+          <a:bodyPr wrap="square" lIns="0" tIns="0" rIns="0" bIns="0" rtlCol="0" anchor="ctr">
+            <a:normAutofit/>
+          </a:bodyPr>
+          <a:lstStyle/>
+          <a:p>
+            <a:pPr indent="0" marL="0">
+              <a:lnSpc>
+                <a:spcPct val="100000"/>
+              </a:lnSpc>
+              <a:buNone/>
+            </a:pPr>
+            <a:r>
+              <a:rPr lang="en-US" sz="2300" b="1" dirty="0">
+                <a:solidFill>
+                  <a:srgbClr val="FFFFFF"/>
+                </a:solidFill>
+                <a:latin typeface="Source Han Sans SC" pitchFamily="34" charset="0"/>
+                <a:ea typeface="Source Han Sans SC" pitchFamily="34" charset="-122"/>
+                <a:cs typeface="Source Han Sans SC" pitchFamily="34" charset="-120"/>
+              </a:rPr>
+              <a:t>可验证的增量</a:t>
+            </a:r>
+            <a:endParaRPr lang="en-US" sz="2300" dirty="0"/>
+          </a:p>
+        </p:txBody>
+      </p:sp>
+      <p:sp>
+        <p:nvSpPr>
+          <p:cNvPr id="26" name="Shape 23"/>
+          <p:cNvSpPr/>
+          <p:nvPr/>
+        </p:nvSpPr>
+        <p:spPr>
+          <a:xfrm>
+            <a:off x="6547104" y="3182112"/>
+            <a:ext cx="146304" cy="146304"/>
+          </a:xfrm>
+          <a:prstGeom prst="ellipse">
+            <a:avLst/>
+          </a:prstGeom>
+          <a:solidFill>
+            <a:srgbClr val="13C2C2"/>
+          </a:solidFill>
+          <a:ln w="12700">
             <a:solidFill>
               <a:srgbClr val="13C2C2"/>
             </a:solidFill>
@@ -10774,58 +13724,14 @@
       </p:sp>
       <p:sp>
         <p:nvSpPr>
-          <p:cNvPr id="12" name="Text 9"/>
-          <p:cNvSpPr/>
-          <p:nvPr/>
-        </p:nvSpPr>
-        <p:spPr>
-          <a:xfrm>
-            <a:off x="576072" y="2487168"/>
-            <a:ext cx="2304288" cy="402336"/>
-          </a:xfrm>
-          <a:prstGeom prst="rect">
-            <a:avLst/>
-          </a:prstGeom>
-          <a:noFill/>
-          <a:ln/>
-        </p:spPr>
-        <p:txBody>
-          <a:bodyPr wrap="square" lIns="0" tIns="0" rIns="0" bIns="0" rtlCol="0" anchor="ctr">
-            <a:normAutofit/>
-          </a:bodyPr>
-          <a:lstStyle/>
-          <a:p>
-            <a:pPr indent="0" marL="0">
-              <a:lnSpc>
-                <a:spcPct val="100000"/>
-              </a:lnSpc>
-              <a:buNone/>
-            </a:pPr>
-            <a:r>
-              <a:rPr lang="en-US" sz="2300" b="1" dirty="0">
-                <a:solidFill>
-                  <a:srgbClr val="102A3A"/>
-                </a:solidFill>
-                <a:latin typeface="Source Han Sans SC" pitchFamily="34" charset="0"/>
-                <a:ea typeface="Source Han Sans SC" pitchFamily="34" charset="-122"/>
-                <a:cs typeface="Source Han Sans SC" pitchFamily="34" charset="-120"/>
-              </a:rPr>
-              <a:t>定义问题</a:t>
-            </a:r>
-            <a:endParaRPr lang="en-US" sz="2300" dirty="0"/>
-          </a:p>
-        </p:txBody>
-      </p:sp>
-      <p:sp>
-        <p:nvSpPr>
-          <p:cNvPr id="13" name="Text 10"/>
-          <p:cNvSpPr/>
-          <p:nvPr/>
-        </p:nvSpPr>
-        <p:spPr>
-          <a:xfrm>
-            <a:off x="576072" y="3145536"/>
-            <a:ext cx="2304288" cy="914400"/>
+          <p:cNvPr id="27" name="Text 24"/>
+          <p:cNvSpPr/>
+          <p:nvPr/>
+        </p:nvSpPr>
+        <p:spPr>
+          <a:xfrm>
+            <a:off x="6839712" y="3063240"/>
+            <a:ext cx="4005072" cy="310896"/>
           </a:xfrm>
           <a:prstGeom prst="rect">
             <a:avLst/>
@@ -10848,98 +13754,36 @@
             <a:r>
               <a:rPr lang="en-US" sz="1600" dirty="0">
                 <a:solidFill>
-                  <a:srgbClr val="627987"/>
-                </a:solidFill>
-                <a:latin typeface="Source Han Sans SC" pitchFamily="34" charset="0"/>
-                <a:ea typeface="Source Han Sans SC" pitchFamily="34" charset="-122"/>
-                <a:cs typeface="Source Han Sans SC" pitchFamily="34" charset="-120"/>
-              </a:rPr>
-              <a:t>选一个装置、一个风险目标</a:t>
+                  <a:srgbClr val="FFFFFF"/>
+                </a:solidFill>
+                <a:latin typeface="Source Han Sans SC" pitchFamily="34" charset="0"/>
+                <a:ea typeface="Source Han Sans SC" pitchFamily="34" charset="-122"/>
+                <a:cs typeface="Source Han Sans SC" pitchFamily="34" charset="-120"/>
+              </a:rPr>
+              <a:t>磷煤化工异常早期预警定位</a:t>
             </a:r>
             <a:endParaRPr lang="en-US" sz="1600" dirty="0"/>
           </a:p>
-          <a:p>
-            <a:pPr indent="0" marL="0">
-              <a:lnSpc>
-                <a:spcPct val="100000"/>
-              </a:lnSpc>
-              <a:buNone/>
-            </a:pPr>
-            <a:r>
-              <a:rPr lang="en-US" sz="1600" dirty="0">
-                <a:solidFill>
-                  <a:srgbClr val="627987"/>
-                </a:solidFill>
-                <a:latin typeface="Source Han Sans SC" pitchFamily="34" charset="0"/>
-                <a:ea typeface="Source Han Sans SC" pitchFamily="34" charset="-122"/>
-                <a:cs typeface="Source Han Sans SC" pitchFamily="34" charset="-120"/>
-              </a:rPr>
-              <a:t>确认变量与化验标签</a:t>
-            </a:r>
-            <a:endParaRPr lang="en-US" sz="1600" dirty="0"/>
-          </a:p>
-        </p:txBody>
-      </p:sp>
-      <p:sp>
-        <p:nvSpPr>
-          <p:cNvPr id="14" name="Text 11"/>
-          <p:cNvSpPr/>
-          <p:nvPr/>
-        </p:nvSpPr>
-        <p:spPr>
-          <a:xfrm>
-            <a:off x="3429000" y="1810512"/>
-            <a:ext cx="2286000" cy="256032"/>
-          </a:xfrm>
-          <a:prstGeom prst="rect">
-            <a:avLst/>
-          </a:prstGeom>
-          <a:noFill/>
-          <a:ln/>
-        </p:spPr>
-        <p:txBody>
-          <a:bodyPr wrap="square" lIns="0" tIns="0" rIns="0" bIns="0" rtlCol="0" anchor="ctr">
-            <a:normAutofit/>
-          </a:bodyPr>
-          <a:lstStyle/>
-          <a:p>
-            <a:pPr indent="0" marL="0">
-              <a:lnSpc>
-                <a:spcPct val="100000"/>
-              </a:lnSpc>
-              <a:buNone/>
-            </a:pPr>
-            <a:r>
-              <a:rPr lang="en-US" sz="1200" b="1" dirty="0">
-                <a:solidFill>
-                  <a:srgbClr val="13C2C2"/>
-                </a:solidFill>
-                <a:latin typeface="Source Han Sans SC" pitchFamily="34" charset="0"/>
-                <a:ea typeface="Source Han Sans SC" pitchFamily="34" charset="-122"/>
-                <a:cs typeface="Source Han Sans SC" pitchFamily="34" charset="-120"/>
-              </a:rPr>
-              <a:t>第 3–4 周</a:t>
-            </a:r>
-            <a:endParaRPr lang="en-US" sz="1200" dirty="0"/>
-          </a:p>
-        </p:txBody>
-      </p:sp>
-      <p:sp>
-        <p:nvSpPr>
-          <p:cNvPr id="15" name="Shape 12"/>
-          <p:cNvSpPr/>
-          <p:nvPr/>
-        </p:nvSpPr>
-        <p:spPr>
-          <a:xfrm>
-            <a:off x="3429000" y="2194560"/>
-            <a:ext cx="2304288" cy="0"/>
-          </a:xfrm>
-          <a:prstGeom prst="line">
-            <a:avLst/>
-          </a:prstGeom>
-          <a:noFill/>
-          <a:ln w="63500">
+        </p:txBody>
+      </p:sp>
+      <p:sp>
+        <p:nvSpPr>
+          <p:cNvPr id="28" name="Shape 25"/>
+          <p:cNvSpPr/>
+          <p:nvPr/>
+        </p:nvSpPr>
+        <p:spPr>
+          <a:xfrm>
+            <a:off x="6547104" y="3675888"/>
+            <a:ext cx="146304" cy="146304"/>
+          </a:xfrm>
+          <a:prstGeom prst="ellipse">
+            <a:avLst/>
+          </a:prstGeom>
+          <a:solidFill>
+            <a:srgbClr val="13C2C2"/>
+          </a:solidFill>
+          <a:ln w="12700">
             <a:solidFill>
               <a:srgbClr val="13C2C2"/>
             </a:solidFill>
@@ -10949,58 +13793,14 @@
       </p:sp>
       <p:sp>
         <p:nvSpPr>
-          <p:cNvPr id="16" name="Text 13"/>
-          <p:cNvSpPr/>
-          <p:nvPr/>
-        </p:nvSpPr>
-        <p:spPr>
-          <a:xfrm>
-            <a:off x="3429000" y="2487168"/>
-            <a:ext cx="2304288" cy="402336"/>
-          </a:xfrm>
-          <a:prstGeom prst="rect">
-            <a:avLst/>
-          </a:prstGeom>
-          <a:noFill/>
-          <a:ln/>
-        </p:spPr>
-        <p:txBody>
-          <a:bodyPr wrap="square" lIns="0" tIns="0" rIns="0" bIns="0" rtlCol="0" anchor="ctr">
-            <a:normAutofit/>
-          </a:bodyPr>
-          <a:lstStyle/>
-          <a:p>
-            <a:pPr indent="0" marL="0">
-              <a:lnSpc>
-                <a:spcPct val="100000"/>
-              </a:lnSpc>
-              <a:buNone/>
-            </a:pPr>
-            <a:r>
-              <a:rPr lang="en-US" sz="2300" b="1" dirty="0">
-                <a:solidFill>
-                  <a:srgbClr val="102A3A"/>
-                </a:solidFill>
-                <a:latin typeface="Source Han Sans SC" pitchFamily="34" charset="0"/>
-                <a:ea typeface="Source Han Sans SC" pitchFamily="34" charset="-122"/>
-                <a:cs typeface="Source Han Sans SC" pitchFamily="34" charset="-120"/>
-              </a:rPr>
-              <a:t>离线验证</a:t>
-            </a:r>
-            <a:endParaRPr lang="en-US" sz="2300" dirty="0"/>
-          </a:p>
-        </p:txBody>
-      </p:sp>
-      <p:sp>
-        <p:nvSpPr>
-          <p:cNvPr id="17" name="Text 14"/>
-          <p:cNvSpPr/>
-          <p:nvPr/>
-        </p:nvSpPr>
-        <p:spPr>
-          <a:xfrm>
-            <a:off x="3429000" y="3145536"/>
-            <a:ext cx="2304288" cy="914400"/>
+          <p:cNvPr id="29" name="Text 26"/>
+          <p:cNvSpPr/>
+          <p:nvPr/>
+        </p:nvSpPr>
+        <p:spPr>
+          <a:xfrm>
+            <a:off x="6839712" y="3557016"/>
+            <a:ext cx="4005072" cy="310896"/>
           </a:xfrm>
           <a:prstGeom prst="rect">
             <a:avLst/>
@@ -11023,33 +13823,82 @@
             <a:r>
               <a:rPr lang="en-US" sz="1600" dirty="0">
                 <a:solidFill>
-                  <a:srgbClr val="627987"/>
-                </a:solidFill>
-                <a:latin typeface="Source Han Sans SC" pitchFamily="34" charset="0"/>
-                <a:ea typeface="Source Han Sans SC" pitchFamily="34" charset="-122"/>
-                <a:cs typeface="Source Han Sans SC" pitchFamily="34" charset="-120"/>
-              </a:rPr>
-              <a:t>清洗历史数据</a:t>
+                  <a:srgbClr val="FFFFFF"/>
+                </a:solidFill>
+                <a:latin typeface="Source Han Sans SC" pitchFamily="34" charset="0"/>
+                <a:ea typeface="Source Han Sans SC" pitchFamily="34" charset="-122"/>
+                <a:cs typeface="Source Han Sans SC" pitchFamily="34" charset="-120"/>
+              </a:rPr>
+              <a:t>污水软测量 + TEP 双场景旅程</a:t>
             </a:r>
             <a:endParaRPr lang="en-US" sz="1600" dirty="0"/>
           </a:p>
-          <a:p>
-            <a:pPr indent="0" marL="0">
-              <a:lnSpc>
-                <a:spcPct val="100000"/>
-              </a:lnSpc>
-              <a:buNone/>
-            </a:pPr>
-            <a:r>
-              <a:rPr lang="en-US" sz="1600" dirty="0">
-                <a:solidFill>
-                  <a:srgbClr val="627987"/>
-                </a:solidFill>
-                <a:latin typeface="Source Han Sans SC" pitchFamily="34" charset="0"/>
-                <a:ea typeface="Source Han Sans SC" pitchFamily="34" charset="-122"/>
-                <a:cs typeface="Source Han Sans SC" pitchFamily="34" charset="-120"/>
-              </a:rPr>
-              <a:t>回放异常窗口和证据</a:t>
+        </p:txBody>
+      </p:sp>
+      <p:sp>
+        <p:nvSpPr>
+          <p:cNvPr id="30" name="Shape 27"/>
+          <p:cNvSpPr/>
+          <p:nvPr/>
+        </p:nvSpPr>
+        <p:spPr>
+          <a:xfrm>
+            <a:off x="6547104" y="4169664"/>
+            <a:ext cx="146304" cy="146304"/>
+          </a:xfrm>
+          <a:prstGeom prst="ellipse">
+            <a:avLst/>
+          </a:prstGeom>
+          <a:solidFill>
+            <a:srgbClr val="F2A93B"/>
+          </a:solidFill>
+          <a:ln w="12700">
+            <a:solidFill>
+              <a:srgbClr val="F2A93B"/>
+            </a:solidFill>
+            <a:prstDash val="solid"/>
+          </a:ln>
+        </p:spPr>
+      </p:sp>
+      <p:sp>
+        <p:nvSpPr>
+          <p:cNvPr id="31" name="Text 28"/>
+          <p:cNvSpPr/>
+          <p:nvPr/>
+        </p:nvSpPr>
+        <p:spPr>
+          <a:xfrm>
+            <a:off x="6839712" y="4050792"/>
+            <a:ext cx="4005072" cy="310896"/>
+          </a:xfrm>
+          <a:prstGeom prst="rect">
+            <a:avLst/>
+          </a:prstGeom>
+          <a:noFill/>
+          <a:ln/>
+        </p:spPr>
+        <p:txBody>
+          <a:bodyPr wrap="square" lIns="0" tIns="0" rIns="0" bIns="0" rtlCol="0" anchor="ctr">
+            <a:normAutofit/>
+          </a:bodyPr>
+          <a:lstStyle/>
+          <a:p>
+            <a:pPr indent="0" marL="0">
+              <a:lnSpc>
+                <a:spcPct val="100000"/>
+              </a:lnSpc>
+              <a:buNone/>
+            </a:pPr>
+            <a:r>
+              <a:rPr lang="en-US" sz="1600" b="1" dirty="0">
+                <a:solidFill>
+                  <a:srgbClr val="FFFFFF"/>
+                </a:solidFill>
+                <a:latin typeface="Source Han Sans SC" pitchFamily="34" charset="0"/>
+                <a:ea typeface="Source Han Sans SC" pitchFamily="34" charset="-122"/>
+                <a:cs typeface="Source Han Sans SC" pitchFamily="34" charset="-120"/>
+              </a:rPr>
+              <a:t>DeepSeek 真实在线解释与 Trace</a:t>
             </a:r>
             <a:endParaRPr lang="en-US" sz="1600" dirty="0"/>
           </a:p>
@@ -11057,64 +13906,22 @@
       </p:sp>
       <p:sp>
         <p:nvSpPr>
-          <p:cNvPr id="18" name="Text 15"/>
-          <p:cNvSpPr/>
-          <p:nvPr/>
-        </p:nvSpPr>
-        <p:spPr>
-          <a:xfrm>
-            <a:off x="6281928" y="1810512"/>
-            <a:ext cx="2286000" cy="256032"/>
-          </a:xfrm>
-          <a:prstGeom prst="rect">
-            <a:avLst/>
-          </a:prstGeom>
-          <a:noFill/>
-          <a:ln/>
-        </p:spPr>
-        <p:txBody>
-          <a:bodyPr wrap="square" lIns="0" tIns="0" rIns="0" bIns="0" rtlCol="0" anchor="ctr">
-            <a:normAutofit/>
-          </a:bodyPr>
-          <a:lstStyle/>
-          <a:p>
-            <a:pPr indent="0" marL="0">
-              <a:lnSpc>
-                <a:spcPct val="100000"/>
-              </a:lnSpc>
-              <a:buNone/>
-            </a:pPr>
-            <a:r>
-              <a:rPr lang="en-US" sz="1200" b="1" dirty="0">
-                <a:solidFill>
-                  <a:srgbClr val="13C2C2"/>
-                </a:solidFill>
-                <a:latin typeface="Source Han Sans SC" pitchFamily="34" charset="0"/>
-                <a:ea typeface="Source Han Sans SC" pitchFamily="34" charset="-122"/>
-                <a:cs typeface="Source Han Sans SC" pitchFamily="34" charset="-120"/>
-              </a:rPr>
-              <a:t>第 5–6 周</a:t>
-            </a:r>
-            <a:endParaRPr lang="en-US" sz="1200" dirty="0"/>
-          </a:p>
-        </p:txBody>
-      </p:sp>
-      <p:sp>
-        <p:nvSpPr>
-          <p:cNvPr id="19" name="Shape 16"/>
-          <p:cNvSpPr/>
-          <p:nvPr/>
-        </p:nvSpPr>
-        <p:spPr>
-          <a:xfrm>
-            <a:off x="6281928" y="2194560"/>
-            <a:ext cx="2304288" cy="0"/>
-          </a:xfrm>
-          <a:prstGeom prst="line">
-            <a:avLst/>
-          </a:prstGeom>
-          <a:noFill/>
-          <a:ln w="63500">
+          <p:cNvPr id="32" name="Shape 29"/>
+          <p:cNvSpPr/>
+          <p:nvPr/>
+        </p:nvSpPr>
+        <p:spPr>
+          <a:xfrm>
+            <a:off x="6547104" y="4663440"/>
+            <a:ext cx="146304" cy="146304"/>
+          </a:xfrm>
+          <a:prstGeom prst="ellipse">
+            <a:avLst/>
+          </a:prstGeom>
+          <a:solidFill>
+            <a:srgbClr val="13C2C2"/>
+          </a:solidFill>
+          <a:ln w="12700">
             <a:solidFill>
               <a:srgbClr val="13C2C2"/>
             </a:solidFill>
@@ -11124,58 +13931,14 @@
       </p:sp>
       <p:sp>
         <p:nvSpPr>
-          <p:cNvPr id="20" name="Text 17"/>
-          <p:cNvSpPr/>
-          <p:nvPr/>
-        </p:nvSpPr>
-        <p:spPr>
-          <a:xfrm>
-            <a:off x="6281928" y="2487168"/>
-            <a:ext cx="2304288" cy="402336"/>
-          </a:xfrm>
-          <a:prstGeom prst="rect">
-            <a:avLst/>
-          </a:prstGeom>
-          <a:noFill/>
-          <a:ln/>
-        </p:spPr>
-        <p:txBody>
-          <a:bodyPr wrap="square" lIns="0" tIns="0" rIns="0" bIns="0" rtlCol="0" anchor="ctr">
-            <a:normAutofit/>
-          </a:bodyPr>
-          <a:lstStyle/>
-          <a:p>
-            <a:pPr indent="0" marL="0">
-              <a:lnSpc>
-                <a:spcPct val="100000"/>
-              </a:lnSpc>
-              <a:buNone/>
-            </a:pPr>
-            <a:r>
-              <a:rPr lang="en-US" sz="2300" b="1" dirty="0">
-                <a:solidFill>
-                  <a:srgbClr val="102A3A"/>
-                </a:solidFill>
-                <a:latin typeface="Source Han Sans SC" pitchFamily="34" charset="0"/>
-                <a:ea typeface="Source Han Sans SC" pitchFamily="34" charset="-122"/>
-                <a:cs typeface="Source Han Sans SC" pitchFamily="34" charset="-120"/>
-              </a:rPr>
-              <a:t>影子运行</a:t>
-            </a:r>
-            <a:endParaRPr lang="en-US" sz="2300" dirty="0"/>
-          </a:p>
-        </p:txBody>
-      </p:sp>
-      <p:sp>
-        <p:nvSpPr>
-          <p:cNvPr id="21" name="Text 18"/>
-          <p:cNvSpPr/>
-          <p:nvPr/>
-        </p:nvSpPr>
-        <p:spPr>
-          <a:xfrm>
-            <a:off x="6281928" y="3145536"/>
-            <a:ext cx="2304288" cy="914400"/>
+          <p:cNvPr id="33" name="Text 30"/>
+          <p:cNvSpPr/>
+          <p:nvPr/>
+        </p:nvSpPr>
+        <p:spPr>
+          <a:xfrm>
+            <a:off x="6839712" y="4544568"/>
+            <a:ext cx="4005072" cy="310896"/>
           </a:xfrm>
           <a:prstGeom prst="rect">
             <a:avLst/>
@@ -11198,233 +13961,36 @@
             <a:r>
               <a:rPr lang="en-US" sz="1600" dirty="0">
                 <a:solidFill>
-                  <a:srgbClr val="627987"/>
-                </a:solidFill>
-                <a:latin typeface="Source Han Sans SC" pitchFamily="34" charset="0"/>
-                <a:ea typeface="Source Han Sans SC" pitchFamily="34" charset="-122"/>
-                <a:cs typeface="Source Han Sans SC" pitchFamily="34" charset="-120"/>
-              </a:rPr>
-              <a:t>只读接入 / 文件同步</a:t>
+                  <a:srgbClr val="FFFFFF"/>
+                </a:solidFill>
+                <a:latin typeface="Source Han Sans SC" pitchFamily="34" charset="0"/>
+                <a:ea typeface="Source Han Sans SC" pitchFamily="34" charset="-122"/>
+                <a:cs typeface="Source Han Sans SC" pitchFamily="34" charset="-120"/>
+              </a:rPr>
+              <a:t>人工确认、影子闸门与公网 Demo</a:t>
             </a:r>
             <a:endParaRPr lang="en-US" sz="1600" dirty="0"/>
           </a:p>
-          <a:p>
-            <a:pPr indent="0" marL="0">
-              <a:lnSpc>
-                <a:spcPct val="100000"/>
-              </a:lnSpc>
-              <a:buNone/>
-            </a:pPr>
-            <a:r>
-              <a:rPr lang="en-US" sz="1600" dirty="0">
-                <a:solidFill>
-                  <a:srgbClr val="627987"/>
-                </a:solidFill>
-                <a:latin typeface="Source Han Sans SC" pitchFamily="34" charset="0"/>
-                <a:ea typeface="Source Han Sans SC" pitchFamily="34" charset="-122"/>
-                <a:cs typeface="Source Han Sans SC" pitchFamily="34" charset="-120"/>
-              </a:rPr>
-              <a:t>与班组判断并行对照</a:t>
-            </a:r>
-            <a:endParaRPr lang="en-US" sz="1600" dirty="0"/>
-          </a:p>
-        </p:txBody>
-      </p:sp>
-      <p:sp>
-        <p:nvSpPr>
-          <p:cNvPr id="22" name="Text 19"/>
-          <p:cNvSpPr/>
-          <p:nvPr/>
-        </p:nvSpPr>
-        <p:spPr>
-          <a:xfrm>
-            <a:off x="9134856" y="1810512"/>
-            <a:ext cx="2286000" cy="256032"/>
-          </a:xfrm>
-          <a:prstGeom prst="rect">
-            <a:avLst/>
-          </a:prstGeom>
-          <a:noFill/>
-          <a:ln/>
-        </p:spPr>
-        <p:txBody>
-          <a:bodyPr wrap="square" lIns="0" tIns="0" rIns="0" bIns="0" rtlCol="0" anchor="ctr">
-            <a:normAutofit/>
-          </a:bodyPr>
-          <a:lstStyle/>
-          <a:p>
-            <a:pPr indent="0" marL="0">
-              <a:lnSpc>
-                <a:spcPct val="100000"/>
-              </a:lnSpc>
-              <a:buNone/>
-            </a:pPr>
-            <a:r>
-              <a:rPr lang="en-US" sz="1200" b="1" dirty="0">
-                <a:solidFill>
-                  <a:srgbClr val="13C2C2"/>
-                </a:solidFill>
-                <a:latin typeface="Source Han Sans SC" pitchFamily="34" charset="0"/>
-                <a:ea typeface="Source Han Sans SC" pitchFamily="34" charset="-122"/>
-                <a:cs typeface="Source Han Sans SC" pitchFamily="34" charset="-120"/>
-              </a:rPr>
-              <a:t>第 7–8 周</a:t>
-            </a:r>
-            <a:endParaRPr lang="en-US" sz="1200" dirty="0"/>
-          </a:p>
-        </p:txBody>
-      </p:sp>
-      <p:sp>
-        <p:nvSpPr>
-          <p:cNvPr id="23" name="Shape 20"/>
-          <p:cNvSpPr/>
-          <p:nvPr/>
-        </p:nvSpPr>
-        <p:spPr>
-          <a:xfrm>
-            <a:off x="9134856" y="2194560"/>
-            <a:ext cx="2304288" cy="0"/>
-          </a:xfrm>
-          <a:prstGeom prst="line">
-            <a:avLst/>
-          </a:prstGeom>
-          <a:noFill/>
-          <a:ln w="63500">
-            <a:solidFill>
-              <a:srgbClr val="F2A93B"/>
-            </a:solidFill>
-            <a:prstDash val="solid"/>
-          </a:ln>
-        </p:spPr>
-      </p:sp>
-      <p:sp>
-        <p:nvSpPr>
-          <p:cNvPr id="24" name="Text 21"/>
-          <p:cNvSpPr/>
-          <p:nvPr/>
-        </p:nvSpPr>
-        <p:spPr>
-          <a:xfrm>
-            <a:off x="9134856" y="2487168"/>
-            <a:ext cx="2304288" cy="402336"/>
-          </a:xfrm>
-          <a:prstGeom prst="rect">
-            <a:avLst/>
-          </a:prstGeom>
-          <a:noFill/>
-          <a:ln/>
-        </p:spPr>
-        <p:txBody>
-          <a:bodyPr wrap="square" lIns="0" tIns="0" rIns="0" bIns="0" rtlCol="0" anchor="ctr">
-            <a:normAutofit/>
-          </a:bodyPr>
-          <a:lstStyle/>
-          <a:p>
-            <a:pPr indent="0" marL="0">
-              <a:lnSpc>
-                <a:spcPct val="100000"/>
-              </a:lnSpc>
-              <a:buNone/>
-            </a:pPr>
-            <a:r>
-              <a:rPr lang="en-US" sz="2300" b="1" dirty="0">
-                <a:solidFill>
-                  <a:srgbClr val="102A3A"/>
-                </a:solidFill>
-                <a:latin typeface="Source Han Sans SC" pitchFamily="34" charset="0"/>
-                <a:ea typeface="Source Han Sans SC" pitchFamily="34" charset="-122"/>
-                <a:cs typeface="Source Han Sans SC" pitchFamily="34" charset="-120"/>
-              </a:rPr>
-              <a:t>共同验收</a:t>
-            </a:r>
-            <a:endParaRPr lang="en-US" sz="2300" dirty="0"/>
-          </a:p>
-        </p:txBody>
-      </p:sp>
-      <p:sp>
-        <p:nvSpPr>
-          <p:cNvPr id="25" name="Text 22"/>
-          <p:cNvSpPr/>
-          <p:nvPr/>
-        </p:nvSpPr>
-        <p:spPr>
-          <a:xfrm>
-            <a:off x="9134856" y="3145536"/>
-            <a:ext cx="2304288" cy="914400"/>
-          </a:xfrm>
-          <a:prstGeom prst="rect">
-            <a:avLst/>
-          </a:prstGeom>
-          <a:noFill/>
-          <a:ln/>
-        </p:spPr>
-        <p:txBody>
-          <a:bodyPr wrap="square" lIns="0" tIns="0" rIns="0" bIns="0" rtlCol="0" anchor="ctr">
-            <a:normAutofit/>
-          </a:bodyPr>
-          <a:lstStyle/>
-          <a:p>
-            <a:pPr indent="0" marL="0">
-              <a:lnSpc>
-                <a:spcPct val="100000"/>
-              </a:lnSpc>
-              <a:buNone/>
-            </a:pPr>
-            <a:r>
-              <a:rPr lang="en-US" sz="1600" dirty="0">
-                <a:solidFill>
-                  <a:srgbClr val="627987"/>
-                </a:solidFill>
-                <a:latin typeface="Source Han Sans SC" pitchFamily="34" charset="0"/>
-                <a:ea typeface="Source Han Sans SC" pitchFamily="34" charset="-122"/>
-                <a:cs typeface="Source Han Sans SC" pitchFamily="34" charset="-120"/>
-              </a:rPr>
-              <a:t>看提前量、误报、可解释性</a:t>
-            </a:r>
-            <a:endParaRPr lang="en-US" sz="1600" dirty="0"/>
-          </a:p>
-          <a:p>
-            <a:pPr indent="0" marL="0">
-              <a:lnSpc>
-                <a:spcPct val="100000"/>
-              </a:lnSpc>
-              <a:buNone/>
-            </a:pPr>
-            <a:r>
-              <a:rPr lang="en-US" sz="1600" dirty="0">
-                <a:solidFill>
-                  <a:srgbClr val="627987"/>
-                </a:solidFill>
-                <a:latin typeface="Source Han Sans SC" pitchFamily="34" charset="0"/>
-                <a:ea typeface="Source Han Sans SC" pitchFamily="34" charset="-122"/>
-                <a:cs typeface="Source Han Sans SC" pitchFamily="34" charset="-120"/>
-              </a:rPr>
-              <a:t>决定是否扩大范围</a:t>
-            </a:r>
-            <a:endParaRPr lang="en-US" sz="1600" dirty="0"/>
-          </a:p>
-        </p:txBody>
-      </p:sp>
-      <p:sp>
-        <p:nvSpPr>
-          <p:cNvPr id="26" name="Shape 23"/>
-          <p:cNvSpPr/>
-          <p:nvPr/>
-        </p:nvSpPr>
-        <p:spPr>
-          <a:xfrm>
-            <a:off x="685800" y="4709160"/>
-            <a:ext cx="10789920" cy="868680"/>
-          </a:xfrm>
-          <a:prstGeom prst="roundRect">
-            <a:avLst>
-              <a:gd name="adj" fmla="val 12632"/>
-            </a:avLst>
+        </p:txBody>
+      </p:sp>
+      <p:sp>
+        <p:nvSpPr>
+          <p:cNvPr id="34" name="Shape 31"/>
+          <p:cNvSpPr/>
+          <p:nvPr/>
+        </p:nvSpPr>
+        <p:spPr>
+          <a:xfrm>
+            <a:off x="6547104" y="5157216"/>
+            <a:ext cx="146304" cy="146304"/>
+          </a:xfrm>
+          <a:prstGeom prst="ellipse">
+            <a:avLst/>
           </a:prstGeom>
           <a:solidFill>
-            <a:srgbClr val="EAF7FA"/>
+            <a:srgbClr val="13C2C2"/>
           </a:solidFill>
-          <a:ln w="15240">
+          <a:ln w="12700">
             <a:solidFill>
               <a:srgbClr val="13C2C2"/>
             </a:solidFill>
@@ -11434,89 +14000,45 @@
       </p:sp>
       <p:sp>
         <p:nvSpPr>
-          <p:cNvPr id="27" name="Text 24"/>
-          <p:cNvSpPr/>
-          <p:nvPr/>
-        </p:nvSpPr>
-        <p:spPr>
-          <a:xfrm>
-            <a:off x="987552" y="4937760"/>
-            <a:ext cx="10186416" cy="365760"/>
-          </a:xfrm>
-          <a:prstGeom prst="rect">
-            <a:avLst/>
-          </a:prstGeom>
-          <a:noFill/>
-          <a:ln/>
-        </p:spPr>
-        <p:txBody>
-          <a:bodyPr wrap="square" lIns="0" tIns="0" rIns="0" bIns="0" rtlCol="0" anchor="ctr">
-            <a:normAutofit/>
-          </a:bodyPr>
-          <a:lstStyle/>
-          <a:p>
-            <a:pPr algn="ctr" indent="0" marL="0">
-              <a:lnSpc>
-                <a:spcPct val="100000"/>
-              </a:lnSpc>
-              <a:buNone/>
-            </a:pPr>
-            <a:r>
-              <a:rPr lang="en-US" sz="1800" b="1" dirty="0">
-                <a:solidFill>
-                  <a:srgbClr val="102A3A"/>
-                </a:solidFill>
-                <a:latin typeface="Source Han Sans SC" pitchFamily="34" charset="0"/>
-                <a:ea typeface="Source Han Sans SC" pitchFamily="34" charset="-122"/>
-                <a:cs typeface="Source Han Sans SC" pitchFamily="34" charset="-120"/>
-              </a:rPr>
-              <a:t>最低数据清单：时间戳一致的过程变量、有限化验/事件标签、设备与工艺上下文、明确访问授权。</a:t>
-            </a:r>
-            <a:endParaRPr lang="en-US" sz="1800" dirty="0"/>
-          </a:p>
-        </p:txBody>
-      </p:sp>
-      <p:sp>
-        <p:nvSpPr>
-          <p:cNvPr id="28" name="Text 25"/>
-          <p:cNvSpPr/>
-          <p:nvPr/>
-        </p:nvSpPr>
-        <p:spPr>
-          <a:xfrm>
-            <a:off x="1847088" y="5852160"/>
-            <a:ext cx="8458200" cy="292608"/>
-          </a:xfrm>
-          <a:prstGeom prst="rect">
-            <a:avLst/>
-          </a:prstGeom>
-          <a:noFill/>
-          <a:ln/>
-        </p:spPr>
-        <p:txBody>
-          <a:bodyPr wrap="square" lIns="0" tIns="0" rIns="0" bIns="0" rtlCol="0" anchor="ctr">
-            <a:normAutofit/>
-          </a:bodyPr>
-          <a:lstStyle/>
-          <a:p>
-            <a:pPr algn="ctr" indent="0" marL="0">
-              <a:lnSpc>
-                <a:spcPct val="100000"/>
-              </a:lnSpc>
-              <a:buNone/>
-            </a:pPr>
-            <a:r>
-              <a:rPr lang="en-US" sz="1500" b="1" dirty="0">
-                <a:solidFill>
-                  <a:srgbClr val="627987"/>
-                </a:solidFill>
-                <a:latin typeface="Source Han Sans SC" pitchFamily="34" charset="0"/>
-                <a:ea typeface="Source Han Sans SC" pitchFamily="34" charset="-122"/>
-                <a:cs typeface="Source Han Sans SC" pitchFamily="34" charset="-120"/>
-              </a:rPr>
-              <a:t>PoC 不承诺虚构效果；用共同认可的回放与影子运行结果决定下一步。</a:t>
-            </a:r>
-            <a:endParaRPr lang="en-US" sz="1500" dirty="0"/>
+          <p:cNvPr id="35" name="Text 32"/>
+          <p:cNvSpPr/>
+          <p:nvPr/>
+        </p:nvSpPr>
+        <p:spPr>
+          <a:xfrm>
+            <a:off x="6839712" y="5038344"/>
+            <a:ext cx="4005072" cy="310896"/>
+          </a:xfrm>
+          <a:prstGeom prst="rect">
+            <a:avLst/>
+          </a:prstGeom>
+          <a:noFill/>
+          <a:ln/>
+        </p:spPr>
+        <p:txBody>
+          <a:bodyPr wrap="square" lIns="0" tIns="0" rIns="0" bIns="0" rtlCol="0" anchor="ctr">
+            <a:normAutofit/>
+          </a:bodyPr>
+          <a:lstStyle/>
+          <a:p>
+            <a:pPr indent="0" marL="0">
+              <a:lnSpc>
+                <a:spcPct val="100000"/>
+              </a:lnSpc>
+              <a:buNone/>
+            </a:pPr>
+            <a:r>
+              <a:rPr lang="en-US" sz="1600" dirty="0">
+                <a:solidFill>
+                  <a:srgbClr val="FFFFFF"/>
+                </a:solidFill>
+                <a:latin typeface="Source Han Sans SC" pitchFamily="34" charset="0"/>
+                <a:ea typeface="Source Han Sans SC" pitchFamily="34" charset="-122"/>
+                <a:cs typeface="Source Han Sans SC" pitchFamily="34" charset="-120"/>
+              </a:rPr>
+              <a:t>Playwright 复现证据与路演材料</a:t>
+            </a:r>
+            <a:endParaRPr lang="en-US" sz="1600" dirty="0"/>
           </a:p>
         </p:txBody>
       </p:sp>

--- a/04_交付成品/序安_磷煤化工异常早期预警平台_黑客松路演_v14_ZH_REVIEW.pptx
+++ b/04_交付成品/序安_磷煤化工异常早期预警平台_黑客松路演_v14_ZH_REVIEW.pptx
@@ -1217,7 +1217,7 @@
           <a:p>
             <a:r>
               <a:rPr lang="en-US" dirty="0"/>
-              <a:t>评委可以现场复现。第一步，打开 https://huagong.finlaw.cloud/demo，用 operator-01 和口令 demo-op-2026 登录。第二步，选择污水出水风险或 TEP 场景，开始过程回放。第三步，进入捕获到的风险事件，向序安追问并做人工确认。当前 Demo 只读，不会向 PLC 或 DCS 发送指令。</a:t>
+              <a:t>评委可以现场复现。第一步，打开 https://huagong.finlaw.cloud/demo，用 operator-01 和口令 demo-op-2026 登录。第二步，选择污水出水风险或 TEP 场景，开始过程回放。第三步，进入捕获到的风险事件，向序安追问并做人工确认。2026 年 8 月 30 日公网完整 Playwright 用户旅程 11/11 通过，耗时约 2.6 分钟，覆盖双场景、AI 同链 Trace、人工决策、后台审计和多端无横向溢出。这是 Demo 可复现证据，不是生产验证。当前 Demo 只读，不会向 PLC 或 DCS 发送指令。</a:t>
             </a:r>
             <a:endParaRPr lang="en-US" dirty="0"/>
           </a:p>
@@ -10318,8 +10318,8 @@
         </p:nvSpPr>
         <p:spPr>
           <a:xfrm>
-            <a:off x="8915400" y="5596128"/>
-            <a:ext cx="2212848" cy="347472"/>
+            <a:off x="8503920" y="5596128"/>
+            <a:ext cx="2624328" cy="347472"/>
           </a:xfrm>
           <a:prstGeom prst="roundRect">
             <a:avLst>
@@ -10345,8 +10345,8 @@
         </p:nvSpPr>
         <p:spPr>
           <a:xfrm>
-            <a:off x="9006840" y="5614416"/>
-            <a:ext cx="2029968" cy="283464"/>
+            <a:off x="8595360" y="5614416"/>
+            <a:ext cx="2441448" cy="283464"/>
           </a:xfrm>
           <a:prstGeom prst="rect">
             <a:avLst/>
@@ -10375,7 +10375,7 @@
                 <a:ea typeface="Source Han Sans SC" pitchFamily="34" charset="-122"/>
                 <a:cs typeface="Source Han Sans SC" pitchFamily="34" charset="-120"/>
               </a:rPr>
-              <a:t>PLAYWRIGHT 公网实拍</a:t>
+              <a:t>公网用户旅程 11/11 通过</a:t>
             </a:r>
             <a:endParaRPr lang="en-US" sz="1200" dirty="0"/>
           </a:p>
@@ -14036,7 +14036,7 @@
                 <a:ea typeface="Source Han Sans SC" pitchFamily="34" charset="-122"/>
                 <a:cs typeface="Source Han Sans SC" pitchFamily="34" charset="-120"/>
               </a:rPr>
-              <a:t>Playwright 复现证据与路演材料</a:t>
+              <a:t>公网 Playwright 用户旅程 11/11 通过</a:t>
             </a:r>
             <a:endParaRPr lang="en-US" sz="1600" dirty="0"/>
           </a:p>
